--- a/Docs/Automated Dependency Monitoring in CI Pipeline.pptx
+++ b/Docs/Automated Dependency Monitoring in CI Pipeline.pptx
@@ -5,7 +5,7 @@
     <p:sldMasterId id="2147483660" r:id="rId1"/>
   </p:sldMasterIdLst>
   <p:notesMasterIdLst>
-    <p:notesMasterId r:id="rId31"/>
+    <p:notesMasterId r:id="rId34"/>
   </p:notesMasterIdLst>
   <p:sldIdLst>
     <p:sldId id="256" r:id="rId2"/>
@@ -24,19 +24,22 @@
     <p:sldId id="277" r:id="rId15"/>
     <p:sldId id="274" r:id="rId16"/>
     <p:sldId id="283" r:id="rId17"/>
-    <p:sldId id="267" r:id="rId18"/>
-    <p:sldId id="273" r:id="rId19"/>
-    <p:sldId id="271" r:id="rId20"/>
-    <p:sldId id="282" r:id="rId21"/>
-    <p:sldId id="278" r:id="rId22"/>
-    <p:sldId id="279" r:id="rId23"/>
-    <p:sldId id="280" r:id="rId24"/>
-    <p:sldId id="261" r:id="rId25"/>
-    <p:sldId id="270" r:id="rId26"/>
-    <p:sldId id="284" r:id="rId27"/>
-    <p:sldId id="285" r:id="rId28"/>
-    <p:sldId id="286" r:id="rId29"/>
-    <p:sldId id="260" r:id="rId30"/>
+    <p:sldId id="273" r:id="rId18"/>
+    <p:sldId id="290" r:id="rId19"/>
+    <p:sldId id="289" r:id="rId20"/>
+    <p:sldId id="271" r:id="rId21"/>
+    <p:sldId id="282" r:id="rId22"/>
+    <p:sldId id="280" r:id="rId23"/>
+    <p:sldId id="278" r:id="rId24"/>
+    <p:sldId id="279" r:id="rId25"/>
+    <p:sldId id="287" r:id="rId26"/>
+    <p:sldId id="288" r:id="rId27"/>
+    <p:sldId id="261" r:id="rId28"/>
+    <p:sldId id="270" r:id="rId29"/>
+    <p:sldId id="284" r:id="rId30"/>
+    <p:sldId id="285" r:id="rId31"/>
+    <p:sldId id="286" r:id="rId32"/>
+    <p:sldId id="260" r:id="rId33"/>
   </p:sldIdLst>
   <p:sldSz cx="12192000" cy="6858000"/>
   <p:notesSz cx="6858000" cy="9144000"/>
@@ -233,7 +236,7 @@
           <a:p>
             <a:fld id="{1B4A69DD-57AF-4D82-8B9D-45C505689E2E}" type="datetimeFigureOut">
               <a:rPr lang="en-IN" smtClean="0"/>
-              <a:t>28-02-2026</a:t>
+              <a:t>09-03-2026</a:t>
             </a:fld>
             <a:endParaRPr lang="en-IN"/>
           </a:p>
@@ -506,6 +509,121 @@
   <p:cSld>
     <p:spTree>
       <p:nvGrpSpPr>
+        <p:cNvPr id="1" name="">
+          <a:extLst>
+            <a:ext uri="{FF2B5EF4-FFF2-40B4-BE49-F238E27FC236}">
+              <a16:creationId xmlns:a16="http://schemas.microsoft.com/office/drawing/2014/main" id="{BE5B6BD5-2975-6831-F4AE-4E656A440104}"/>
+            </a:ext>
+          </a:extLst>
+        </p:cNvPr>
+        <p:cNvGrpSpPr/>
+        <p:nvPr/>
+      </p:nvGrpSpPr>
+      <p:grpSpPr>
+        <a:xfrm>
+          <a:off x="0" y="0"/>
+          <a:ext cx="0" cy="0"/>
+          <a:chOff x="0" y="0"/>
+          <a:chExt cx="0" cy="0"/>
+        </a:xfrm>
+      </p:grpSpPr>
+      <p:sp>
+        <p:nvSpPr>
+          <p:cNvPr id="2" name="Slide Image Placeholder 1">
+            <a:extLst>
+              <a:ext uri="{FF2B5EF4-FFF2-40B4-BE49-F238E27FC236}">
+                <a16:creationId xmlns:a16="http://schemas.microsoft.com/office/drawing/2014/main" id="{D4EB3701-C98A-6AA8-53AB-F3A7F484DB47}"/>
+              </a:ext>
+            </a:extLst>
+          </p:cNvPr>
+          <p:cNvSpPr>
+            <a:spLocks noGrp="1" noRot="1" noChangeAspect="1"/>
+          </p:cNvSpPr>
+          <p:nvPr>
+            <p:ph type="sldImg"/>
+          </p:nvPr>
+        </p:nvSpPr>
+        <p:spPr/>
+        <p:txBody>
+          <a:bodyPr/>
+          <a:lstStyle/>
+          <a:p>
+            <a:endParaRPr lang="en-IN"/>
+          </a:p>
+        </p:txBody>
+      </p:sp>
+      <p:sp>
+        <p:nvSpPr>
+          <p:cNvPr id="3" name="Notes Placeholder 2">
+            <a:extLst>
+              <a:ext uri="{FF2B5EF4-FFF2-40B4-BE49-F238E27FC236}">
+                <a16:creationId xmlns:a16="http://schemas.microsoft.com/office/drawing/2014/main" id="{5109BE5A-6B78-C1BD-58AE-DB67EA48DF39}"/>
+              </a:ext>
+            </a:extLst>
+          </p:cNvPr>
+          <p:cNvSpPr>
+            <a:spLocks noGrp="1"/>
+          </p:cNvSpPr>
+          <p:nvPr>
+            <p:ph type="body" idx="1"/>
+          </p:nvPr>
+        </p:nvSpPr>
+        <p:spPr/>
+        <p:txBody>
+          <a:bodyPr/>
+          <a:lstStyle/>
+          <a:p>
+            <a:endParaRPr lang="en-IN" dirty="0"/>
+          </a:p>
+        </p:txBody>
+      </p:sp>
+      <p:sp>
+        <p:nvSpPr>
+          <p:cNvPr id="4" name="Slide Number Placeholder 3">
+            <a:extLst>
+              <a:ext uri="{FF2B5EF4-FFF2-40B4-BE49-F238E27FC236}">
+                <a16:creationId xmlns:a16="http://schemas.microsoft.com/office/drawing/2014/main" id="{9B9F25B2-5D94-6744-02C1-F926FC388C3B}"/>
+              </a:ext>
+            </a:extLst>
+          </p:cNvPr>
+          <p:cNvSpPr>
+            <a:spLocks noGrp="1"/>
+          </p:cNvSpPr>
+          <p:nvPr>
+            <p:ph type="sldNum" sz="quarter" idx="5"/>
+          </p:nvPr>
+        </p:nvSpPr>
+        <p:spPr/>
+        <p:txBody>
+          <a:bodyPr/>
+          <a:lstStyle/>
+          <a:p>
+            <a:fld id="{57800552-50F2-4D62-BE3A-CFEB2CAE8D55}" type="slidenum">
+              <a:rPr lang="en-IN" smtClean="0"/>
+              <a:t>22</a:t>
+            </a:fld>
+            <a:endParaRPr lang="en-IN"/>
+          </a:p>
+        </p:txBody>
+      </p:sp>
+    </p:spTree>
+    <p:extLst>
+      <p:ext uri="{BB962C8B-B14F-4D97-AF65-F5344CB8AC3E}">
+        <p14:creationId xmlns:p14="http://schemas.microsoft.com/office/powerpoint/2010/main" val="2205833655"/>
+      </p:ext>
+    </p:extLst>
+  </p:cSld>
+  <p:clrMapOvr>
+    <a:masterClrMapping/>
+  </p:clrMapOvr>
+</p:notes>
+</file>
+
+<file path=ppt/notesSlides/notesSlide2.xml><?xml version="1.0" encoding="utf-8"?>
+<p:notes xmlns:a="http://schemas.openxmlformats.org/drawingml/2006/main" xmlns:r="http://schemas.openxmlformats.org/officeDocument/2006/relationships" xmlns:p="http://schemas.openxmlformats.org/presentationml/2006/main">
+  <p:cSld>
+    <p:spTree>
+      <p:nvGrpSpPr>
         <p:cNvPr id="1" name=""/>
         <p:cNvGrpSpPr/>
         <p:nvPr/>
@@ -573,7 +691,7 @@
           <a:p>
             <a:fld id="{57800552-50F2-4D62-BE3A-CFEB2CAE8D55}" type="slidenum">
               <a:rPr lang="en-IN" smtClean="0"/>
-              <a:t>21</a:t>
+              <a:t>23</a:t>
             </a:fld>
             <a:endParaRPr lang="en-IN"/>
           </a:p>
@@ -592,7 +710,7 @@
 </p:notes>
 </file>
 
-<file path=ppt/notesSlides/notesSlide2.xml><?xml version="1.0" encoding="utf-8"?>
+<file path=ppt/notesSlides/notesSlide3.xml><?xml version="1.0" encoding="utf-8"?>
 <p:notes xmlns:a="http://schemas.openxmlformats.org/drawingml/2006/main" xmlns:r="http://schemas.openxmlformats.org/officeDocument/2006/relationships" xmlns:p="http://schemas.openxmlformats.org/presentationml/2006/main">
   <p:cSld>
     <p:spTree>
@@ -1232,7 +1350,7 @@
           <a:p>
             <a:fld id="{57800552-50F2-4D62-BE3A-CFEB2CAE8D55}" type="slidenum">
               <a:rPr lang="en-IN" smtClean="0"/>
-              <a:t>22</a:t>
+              <a:t>24</a:t>
             </a:fld>
             <a:endParaRPr lang="en-IN"/>
           </a:p>
@@ -1242,121 +1360,6 @@
     <p:extLst>
       <p:ext uri="{BB962C8B-B14F-4D97-AF65-F5344CB8AC3E}">
         <p14:creationId xmlns:p14="http://schemas.microsoft.com/office/powerpoint/2010/main" val="623264938"/>
-      </p:ext>
-    </p:extLst>
-  </p:cSld>
-  <p:clrMapOvr>
-    <a:masterClrMapping/>
-  </p:clrMapOvr>
-</p:notes>
-</file>
-
-<file path=ppt/notesSlides/notesSlide3.xml><?xml version="1.0" encoding="utf-8"?>
-<p:notes xmlns:a="http://schemas.openxmlformats.org/drawingml/2006/main" xmlns:r="http://schemas.openxmlformats.org/officeDocument/2006/relationships" xmlns:p="http://schemas.openxmlformats.org/presentationml/2006/main">
-  <p:cSld>
-    <p:spTree>
-      <p:nvGrpSpPr>
-        <p:cNvPr id="1" name="">
-          <a:extLst>
-            <a:ext uri="{FF2B5EF4-FFF2-40B4-BE49-F238E27FC236}">
-              <a16:creationId xmlns:a16="http://schemas.microsoft.com/office/drawing/2014/main" id="{BE5B6BD5-2975-6831-F4AE-4E656A440104}"/>
-            </a:ext>
-          </a:extLst>
-        </p:cNvPr>
-        <p:cNvGrpSpPr/>
-        <p:nvPr/>
-      </p:nvGrpSpPr>
-      <p:grpSpPr>
-        <a:xfrm>
-          <a:off x="0" y="0"/>
-          <a:ext cx="0" cy="0"/>
-          <a:chOff x="0" y="0"/>
-          <a:chExt cx="0" cy="0"/>
-        </a:xfrm>
-      </p:grpSpPr>
-      <p:sp>
-        <p:nvSpPr>
-          <p:cNvPr id="2" name="Slide Image Placeholder 1">
-            <a:extLst>
-              <a:ext uri="{FF2B5EF4-FFF2-40B4-BE49-F238E27FC236}">
-                <a16:creationId xmlns:a16="http://schemas.microsoft.com/office/drawing/2014/main" id="{D4EB3701-C98A-6AA8-53AB-F3A7F484DB47}"/>
-              </a:ext>
-            </a:extLst>
-          </p:cNvPr>
-          <p:cNvSpPr>
-            <a:spLocks noGrp="1" noRot="1" noChangeAspect="1"/>
-          </p:cNvSpPr>
-          <p:nvPr>
-            <p:ph type="sldImg"/>
-          </p:nvPr>
-        </p:nvSpPr>
-        <p:spPr/>
-        <p:txBody>
-          <a:bodyPr/>
-          <a:lstStyle/>
-          <a:p>
-            <a:endParaRPr lang="en-IN"/>
-          </a:p>
-        </p:txBody>
-      </p:sp>
-      <p:sp>
-        <p:nvSpPr>
-          <p:cNvPr id="3" name="Notes Placeholder 2">
-            <a:extLst>
-              <a:ext uri="{FF2B5EF4-FFF2-40B4-BE49-F238E27FC236}">
-                <a16:creationId xmlns:a16="http://schemas.microsoft.com/office/drawing/2014/main" id="{5109BE5A-6B78-C1BD-58AE-DB67EA48DF39}"/>
-              </a:ext>
-            </a:extLst>
-          </p:cNvPr>
-          <p:cNvSpPr>
-            <a:spLocks noGrp="1"/>
-          </p:cNvSpPr>
-          <p:nvPr>
-            <p:ph type="body" idx="1"/>
-          </p:nvPr>
-        </p:nvSpPr>
-        <p:spPr/>
-        <p:txBody>
-          <a:bodyPr/>
-          <a:lstStyle/>
-          <a:p>
-            <a:endParaRPr lang="en-IN" dirty="0"/>
-          </a:p>
-        </p:txBody>
-      </p:sp>
-      <p:sp>
-        <p:nvSpPr>
-          <p:cNvPr id="4" name="Slide Number Placeholder 3">
-            <a:extLst>
-              <a:ext uri="{FF2B5EF4-FFF2-40B4-BE49-F238E27FC236}">
-                <a16:creationId xmlns:a16="http://schemas.microsoft.com/office/drawing/2014/main" id="{9B9F25B2-5D94-6744-02C1-F926FC388C3B}"/>
-              </a:ext>
-            </a:extLst>
-          </p:cNvPr>
-          <p:cNvSpPr>
-            <a:spLocks noGrp="1"/>
-          </p:cNvSpPr>
-          <p:nvPr>
-            <p:ph type="sldNum" sz="quarter" idx="5"/>
-          </p:nvPr>
-        </p:nvSpPr>
-        <p:spPr/>
-        <p:txBody>
-          <a:bodyPr/>
-          <a:lstStyle/>
-          <a:p>
-            <a:fld id="{57800552-50F2-4D62-BE3A-CFEB2CAE8D55}" type="slidenum">
-              <a:rPr lang="en-IN" smtClean="0"/>
-              <a:t>23</a:t>
-            </a:fld>
-            <a:endParaRPr lang="en-IN"/>
-          </a:p>
-        </p:txBody>
-      </p:sp>
-    </p:spTree>
-    <p:extLst>
-      <p:ext uri="{BB962C8B-B14F-4D97-AF65-F5344CB8AC3E}">
-        <p14:creationId xmlns:p14="http://schemas.microsoft.com/office/powerpoint/2010/main" val="2205833655"/>
       </p:ext>
     </p:extLst>
   </p:cSld>
@@ -1495,7 +1498,7 @@
           <a:p>
             <a:fld id="{846CE7D5-CF57-46EF-B807-FDD0502418D4}" type="datetimeFigureOut">
               <a:rPr lang="en-US" smtClean="0"/>
-              <a:t>2/28/2026</a:t>
+              <a:t>3/9/2026</a:t>
             </a:fld>
             <a:endParaRPr lang="en-US"/>
           </a:p>
@@ -1663,7 +1666,7 @@
           <a:p>
             <a:fld id="{846CE7D5-CF57-46EF-B807-FDD0502418D4}" type="datetimeFigureOut">
               <a:rPr lang="en-US" smtClean="0"/>
-              <a:t>2/28/2026</a:t>
+              <a:t>3/9/2026</a:t>
             </a:fld>
             <a:endParaRPr lang="en-US"/>
           </a:p>
@@ -1841,7 +1844,7 @@
           <a:p>
             <a:fld id="{846CE7D5-CF57-46EF-B807-FDD0502418D4}" type="datetimeFigureOut">
               <a:rPr lang="en-US" smtClean="0"/>
-              <a:t>2/28/2026</a:t>
+              <a:t>3/9/2026</a:t>
             </a:fld>
             <a:endParaRPr lang="en-US"/>
           </a:p>
@@ -2009,7 +2012,7 @@
           <a:p>
             <a:fld id="{846CE7D5-CF57-46EF-B807-FDD0502418D4}" type="datetimeFigureOut">
               <a:rPr lang="en-US" smtClean="0"/>
-              <a:t>2/28/2026</a:t>
+              <a:t>3/9/2026</a:t>
             </a:fld>
             <a:endParaRPr lang="en-US"/>
           </a:p>
@@ -2254,7 +2257,7 @@
           <a:p>
             <a:fld id="{846CE7D5-CF57-46EF-B807-FDD0502418D4}" type="datetimeFigureOut">
               <a:rPr lang="en-US" smtClean="0"/>
-              <a:t>2/28/2026</a:t>
+              <a:t>3/9/2026</a:t>
             </a:fld>
             <a:endParaRPr lang="en-US"/>
           </a:p>
@@ -2483,7 +2486,7 @@
           <a:p>
             <a:fld id="{846CE7D5-CF57-46EF-B807-FDD0502418D4}" type="datetimeFigureOut">
               <a:rPr lang="en-US" smtClean="0"/>
-              <a:t>2/28/2026</a:t>
+              <a:t>3/9/2026</a:t>
             </a:fld>
             <a:endParaRPr lang="en-US"/>
           </a:p>
@@ -2847,7 +2850,7 @@
           <a:p>
             <a:fld id="{846CE7D5-CF57-46EF-B807-FDD0502418D4}" type="datetimeFigureOut">
               <a:rPr lang="en-US" smtClean="0"/>
-              <a:t>2/28/2026</a:t>
+              <a:t>3/9/2026</a:t>
             </a:fld>
             <a:endParaRPr lang="en-US"/>
           </a:p>
@@ -2964,7 +2967,7 @@
           <a:p>
             <a:fld id="{846CE7D5-CF57-46EF-B807-FDD0502418D4}" type="datetimeFigureOut">
               <a:rPr lang="en-US" smtClean="0"/>
-              <a:t>2/28/2026</a:t>
+              <a:t>3/9/2026</a:t>
             </a:fld>
             <a:endParaRPr lang="en-US"/>
           </a:p>
@@ -3059,7 +3062,7 @@
           <a:p>
             <a:fld id="{846CE7D5-CF57-46EF-B807-FDD0502418D4}" type="datetimeFigureOut">
               <a:rPr lang="en-US" smtClean="0"/>
-              <a:t>2/28/2026</a:t>
+              <a:t>3/9/2026</a:t>
             </a:fld>
             <a:endParaRPr lang="en-US"/>
           </a:p>
@@ -3334,7 +3337,7 @@
           <a:p>
             <a:fld id="{846CE7D5-CF57-46EF-B807-FDD0502418D4}" type="datetimeFigureOut">
               <a:rPr lang="en-US" smtClean="0"/>
-              <a:t>2/28/2026</a:t>
+              <a:t>3/9/2026</a:t>
             </a:fld>
             <a:endParaRPr lang="en-US"/>
           </a:p>
@@ -3589,7 +3592,7 @@
           <a:p>
             <a:fld id="{846CE7D5-CF57-46EF-B807-FDD0502418D4}" type="datetimeFigureOut">
               <a:rPr lang="en-US" smtClean="0"/>
-              <a:t>2/28/2026</a:t>
+              <a:t>3/9/2026</a:t>
             </a:fld>
             <a:endParaRPr lang="en-US"/>
           </a:p>
@@ -3800,7 +3803,7 @@
           <a:p>
             <a:fld id="{846CE7D5-CF57-46EF-B807-FDD0502418D4}" type="datetimeFigureOut">
               <a:rPr lang="en-US" smtClean="0"/>
-              <a:t>2/28/2026</a:t>
+              <a:t>3/9/2026</a:t>
             </a:fld>
             <a:endParaRPr lang="en-US"/>
           </a:p>
@@ -4299,18 +4302,18 @@
         </p:nvSpPr>
         <p:spPr>
           <a:xfrm>
-            <a:off x="618565" y="216897"/>
+            <a:off x="611638" y="257268"/>
             <a:ext cx="10515600" cy="423769"/>
           </a:xfrm>
         </p:spPr>
         <p:txBody>
           <a:bodyPr>
-            <a:normAutofit fontScale="90000"/>
+            <a:noAutofit/>
           </a:bodyPr>
           <a:lstStyle/>
           <a:p>
             <a:r>
-              <a:rPr lang="en-IN" dirty="0"/>
+              <a:rPr lang="en-IN" sz="3600" dirty="0"/>
               <a:t>Consolidated Actual Dependencies List (.adeps)</a:t>
             </a:r>
           </a:p>
@@ -4467,10 +4470,10 @@
       </p:sp>
       <p:pic>
         <p:nvPicPr>
-          <p:cNvPr id="5" name="Picture 4">
+          <p:cNvPr id="6" name="Picture 5">
             <a:extLst>
               <a:ext uri="{FF2B5EF4-FFF2-40B4-BE49-F238E27FC236}">
-                <a16:creationId xmlns:a16="http://schemas.microsoft.com/office/drawing/2014/main" id="{7294D4EC-6514-D3D8-36C5-EF31B765DC93}"/>
+                <a16:creationId xmlns:a16="http://schemas.microsoft.com/office/drawing/2014/main" id="{7C8F8710-E8A4-644A-D214-189BFA41BC9F}"/>
               </a:ext>
             </a:extLst>
           </p:cNvPr>
@@ -4487,8 +4490,8 @@
         </p:blipFill>
         <p:spPr>
           <a:xfrm>
-            <a:off x="6692182" y="1044388"/>
-            <a:ext cx="3881913" cy="4985061"/>
+            <a:off x="6396558" y="820267"/>
+            <a:ext cx="3836855" cy="5521327"/>
           </a:xfrm>
           <a:prstGeom prst="rect">
             <a:avLst/>
@@ -4613,15 +4616,15 @@
               <a:buAutoNum type="arabicPeriod"/>
             </a:pPr>
             <a:r>
-              <a:rPr lang="en-US" sz="2200" dirty="0"/>
-              <a:t>Create .lvproj for each .</a:t>
-            </a:r>
-            <a:r>
-              <a:rPr lang="en-US" sz="2200" dirty="0" err="1"/>
+              <a:rPr lang="en-US" dirty="0"/>
+              <a:t>Initial Setup: Create .lvproj for each .</a:t>
+            </a:r>
+            <a:r>
+              <a:rPr lang="en-US" dirty="0" err="1"/>
               <a:t>lvlib</a:t>
             </a:r>
             <a:r>
-              <a:rPr lang="en-US" sz="2200" dirty="0"/>
+              <a:rPr lang="en-US" dirty="0"/>
               <a:t> to track actual dependencies.</a:t>
             </a:r>
           </a:p>
@@ -4633,15 +4636,15 @@
               <a:buAutoNum type="arabicPeriod"/>
             </a:pPr>
             <a:r>
-              <a:rPr lang="en-US" sz="2200" dirty="0"/>
-              <a:t>Tech Leads Define the Expected Dependencies (.deps) for each .</a:t>
-            </a:r>
-            <a:r>
-              <a:rPr lang="en-US" sz="2200" dirty="0" err="1"/>
+              <a:rPr lang="en-US" dirty="0"/>
+              <a:t>Initial Setup: Tech Leads Define the Expected Dependencies (.deps) for each .</a:t>
+            </a:r>
+            <a:r>
+              <a:rPr lang="en-US" dirty="0" err="1"/>
               <a:t>lvlib</a:t>
             </a:r>
             <a:r>
-              <a:rPr lang="en-US" sz="2200" dirty="0"/>
+              <a:rPr lang="en-US" dirty="0"/>
               <a:t> in the repository.</a:t>
             </a:r>
           </a:p>
@@ -4653,8 +4656,8 @@
               <a:buAutoNum type="arabicPeriod"/>
             </a:pPr>
             <a:r>
-              <a:rPr lang="en-US" sz="2200" dirty="0"/>
-              <a:t>Feature development is done and PR is Created in repository.</a:t>
+              <a:rPr lang="en-US" dirty="0"/>
+              <a:t>For each feature development, a PR is created in the repository for review</a:t>
             </a:r>
           </a:p>
           <a:p>
@@ -4665,7 +4668,7 @@
               <a:buAutoNum type="arabicPeriod"/>
             </a:pPr>
             <a:r>
-              <a:rPr lang="en-US" sz="2200" dirty="0"/>
+              <a:rPr lang="en-US" dirty="0"/>
               <a:t>CI Checks run in a Virtual Machine</a:t>
             </a:r>
           </a:p>
@@ -4677,7 +4680,7 @@
               <a:buAutoNum type="arabicPeriod"/>
             </a:pPr>
             <a:r>
-              <a:rPr lang="en-US" sz="2200" dirty="0"/>
+              <a:rPr lang="en-US" dirty="0"/>
               <a:t>If CI Checks Fail or Pending, PR merge is blocked</a:t>
             </a:r>
           </a:p>
@@ -4689,7 +4692,7 @@
               <a:buAutoNum type="arabicPeriod"/>
             </a:pPr>
             <a:r>
-              <a:rPr lang="en-US" sz="2200" dirty="0"/>
+              <a:rPr lang="en-US" dirty="0"/>
               <a:t>Scenario 1: Developers understand the failures and defined boundaries, update the code accordingly to adhere to the defined dependencies.</a:t>
             </a:r>
           </a:p>
@@ -4701,14 +4704,14 @@
               <a:buAutoNum type="arabicPeriod"/>
             </a:pPr>
             <a:r>
-              <a:rPr lang="en-US" sz="2200" dirty="0"/>
+              <a:rPr lang="en-US" dirty="0"/>
               <a:t>Scenario 2: Developers propose change in .deps and get approval. </a:t>
             </a:r>
             <a:br>
-              <a:rPr lang="en-US" sz="2200" dirty="0"/>
+              <a:rPr lang="en-US" dirty="0"/>
             </a:br>
             <a:r>
-              <a:rPr lang="en-US" sz="2200" dirty="0"/>
+              <a:rPr lang="en-US" dirty="0"/>
               <a:t>This is a Guided change in design.</a:t>
             </a:r>
           </a:p>
@@ -4720,7 +4723,7 @@
               <a:buAutoNum type="arabicPeriod"/>
             </a:pPr>
             <a:r>
-              <a:rPr lang="en-US" sz="2200" dirty="0"/>
+              <a:rPr lang="en-US" dirty="0"/>
               <a:t>After the fix, the checks are trigged again, and the checks pass.</a:t>
             </a:r>
           </a:p>
@@ -4732,7 +4735,7 @@
               <a:buAutoNum type="arabicPeriod"/>
             </a:pPr>
             <a:r>
-              <a:rPr lang="en-US" sz="2200" dirty="0"/>
+              <a:rPr lang="en-US" dirty="0"/>
               <a:t>If CI Checks Pass, PR merge is allowed</a:t>
             </a:r>
           </a:p>
@@ -7723,6 +7726,1228 @@
   <p:clrMapOvr>
     <a:masterClrMapping/>
   </p:clrMapOvr>
+  <p:timing>
+    <p:tnLst>
+      <p:par>
+        <p:cTn id="1" dur="indefinite" restart="never" nodeType="tmRoot">
+          <p:childTnLst>
+            <p:seq concurrent="1" nextAc="seek">
+              <p:cTn id="2" dur="indefinite" nodeType="mainSeq">
+                <p:childTnLst>
+                  <p:par>
+                    <p:cTn id="3" fill="hold">
+                      <p:stCondLst>
+                        <p:cond delay="indefinite"/>
+                      </p:stCondLst>
+                      <p:childTnLst>
+                        <p:par>
+                          <p:cTn id="4" fill="hold">
+                            <p:stCondLst>
+                              <p:cond delay="0"/>
+                            </p:stCondLst>
+                            <p:childTnLst>
+                              <p:par>
+                                <p:cTn id="5" presetID="1" presetClass="entr" presetSubtype="0" fill="hold" grpId="0" nodeType="clickEffect">
+                                  <p:stCondLst>
+                                    <p:cond delay="0"/>
+                                  </p:stCondLst>
+                                  <p:childTnLst>
+                                    <p:set>
+                                      <p:cBhvr>
+                                        <p:cTn id="6" dur="1" fill="hold">
+                                          <p:stCondLst>
+                                            <p:cond delay="0"/>
+                                          </p:stCondLst>
+                                        </p:cTn>
+                                        <p:tgtEl>
+                                          <p:spTgt spid="3"/>
+                                        </p:tgtEl>
+                                        <p:attrNameLst>
+                                          <p:attrName>style.visibility</p:attrName>
+                                        </p:attrNameLst>
+                                      </p:cBhvr>
+                                      <p:to>
+                                        <p:strVal val="visible"/>
+                                      </p:to>
+                                    </p:set>
+                                  </p:childTnLst>
+                                </p:cTn>
+                              </p:par>
+                              <p:par>
+                                <p:cTn id="7" presetID="1" presetClass="entr" presetSubtype="0" fill="hold" nodeType="withEffect">
+                                  <p:stCondLst>
+                                    <p:cond delay="0"/>
+                                  </p:stCondLst>
+                                  <p:childTnLst>
+                                    <p:set>
+                                      <p:cBhvr>
+                                        <p:cTn id="8" dur="1" fill="hold">
+                                          <p:stCondLst>
+                                            <p:cond delay="0"/>
+                                          </p:stCondLst>
+                                        </p:cTn>
+                                        <p:tgtEl>
+                                          <p:spTgt spid="3">
+                                            <p:txEl>
+                                              <p:pRg st="0" end="0"/>
+                                            </p:txEl>
+                                          </p:spTgt>
+                                        </p:tgtEl>
+                                        <p:attrNameLst>
+                                          <p:attrName>style.visibility</p:attrName>
+                                        </p:attrNameLst>
+                                      </p:cBhvr>
+                                      <p:to>
+                                        <p:strVal val="visible"/>
+                                      </p:to>
+                                    </p:set>
+                                  </p:childTnLst>
+                                </p:cTn>
+                              </p:par>
+                              <p:par>
+                                <p:cTn id="9" presetID="1" presetClass="entr" presetSubtype="0" fill="hold" nodeType="withEffect">
+                                  <p:stCondLst>
+                                    <p:cond delay="0"/>
+                                  </p:stCondLst>
+                                  <p:childTnLst>
+                                    <p:set>
+                                      <p:cBhvr>
+                                        <p:cTn id="10" dur="1" fill="hold">
+                                          <p:stCondLst>
+                                            <p:cond delay="0"/>
+                                          </p:stCondLst>
+                                        </p:cTn>
+                                        <p:tgtEl>
+                                          <p:spTgt spid="3">
+                                            <p:txEl>
+                                              <p:pRg st="1" end="1"/>
+                                            </p:txEl>
+                                          </p:spTgt>
+                                        </p:tgtEl>
+                                        <p:attrNameLst>
+                                          <p:attrName>style.visibility</p:attrName>
+                                        </p:attrNameLst>
+                                      </p:cBhvr>
+                                      <p:to>
+                                        <p:strVal val="visible"/>
+                                      </p:to>
+                                    </p:set>
+                                  </p:childTnLst>
+                                </p:cTn>
+                              </p:par>
+                            </p:childTnLst>
+                          </p:cTn>
+                        </p:par>
+                      </p:childTnLst>
+                    </p:cTn>
+                  </p:par>
+                  <p:par>
+                    <p:cTn id="11" fill="hold">
+                      <p:stCondLst>
+                        <p:cond delay="indefinite"/>
+                      </p:stCondLst>
+                      <p:childTnLst>
+                        <p:par>
+                          <p:cTn id="12" fill="hold">
+                            <p:stCondLst>
+                              <p:cond delay="0"/>
+                            </p:stCondLst>
+                            <p:childTnLst>
+                              <p:par>
+                                <p:cTn id="13" presetID="1" presetClass="entr" presetSubtype="0" fill="hold" nodeType="clickEffect">
+                                  <p:stCondLst>
+                                    <p:cond delay="0"/>
+                                  </p:stCondLst>
+                                  <p:childTnLst>
+                                    <p:set>
+                                      <p:cBhvr>
+                                        <p:cTn id="14" dur="1" fill="hold">
+                                          <p:stCondLst>
+                                            <p:cond delay="0"/>
+                                          </p:stCondLst>
+                                        </p:cTn>
+                                        <p:tgtEl>
+                                          <p:spTgt spid="3">
+                                            <p:txEl>
+                                              <p:pRg st="2" end="2"/>
+                                            </p:txEl>
+                                          </p:spTgt>
+                                        </p:tgtEl>
+                                        <p:attrNameLst>
+                                          <p:attrName>style.visibility</p:attrName>
+                                        </p:attrNameLst>
+                                      </p:cBhvr>
+                                      <p:to>
+                                        <p:strVal val="visible"/>
+                                      </p:to>
+                                    </p:set>
+                                  </p:childTnLst>
+                                </p:cTn>
+                              </p:par>
+                            </p:childTnLst>
+                          </p:cTn>
+                        </p:par>
+                      </p:childTnLst>
+                    </p:cTn>
+                  </p:par>
+                  <p:par>
+                    <p:cTn id="15" fill="hold">
+                      <p:stCondLst>
+                        <p:cond delay="indefinite"/>
+                      </p:stCondLst>
+                      <p:childTnLst>
+                        <p:par>
+                          <p:cTn id="16" fill="hold">
+                            <p:stCondLst>
+                              <p:cond delay="0"/>
+                            </p:stCondLst>
+                            <p:childTnLst>
+                              <p:par>
+                                <p:cTn id="17" presetID="1" presetClass="entr" presetSubtype="0" fill="hold" nodeType="clickEffect">
+                                  <p:stCondLst>
+                                    <p:cond delay="0"/>
+                                  </p:stCondLst>
+                                  <p:childTnLst>
+                                    <p:set>
+                                      <p:cBhvr>
+                                        <p:cTn id="18" dur="1" fill="hold">
+                                          <p:stCondLst>
+                                            <p:cond delay="0"/>
+                                          </p:stCondLst>
+                                        </p:cTn>
+                                        <p:tgtEl>
+                                          <p:spTgt spid="3">
+                                            <p:txEl>
+                                              <p:pRg st="3" end="3"/>
+                                            </p:txEl>
+                                          </p:spTgt>
+                                        </p:tgtEl>
+                                        <p:attrNameLst>
+                                          <p:attrName>style.visibility</p:attrName>
+                                        </p:attrNameLst>
+                                      </p:cBhvr>
+                                      <p:to>
+                                        <p:strVal val="visible"/>
+                                      </p:to>
+                                    </p:set>
+                                  </p:childTnLst>
+                                </p:cTn>
+                              </p:par>
+                              <p:par>
+                                <p:cTn id="19" presetID="1" presetClass="entr" presetSubtype="0" fill="hold" nodeType="withEffect">
+                                  <p:stCondLst>
+                                    <p:cond delay="0"/>
+                                  </p:stCondLst>
+                                  <p:childTnLst>
+                                    <p:set>
+                                      <p:cBhvr>
+                                        <p:cTn id="20" dur="1" fill="hold">
+                                          <p:stCondLst>
+                                            <p:cond delay="0"/>
+                                          </p:stCondLst>
+                                        </p:cTn>
+                                        <p:tgtEl>
+                                          <p:spTgt spid="3">
+                                            <p:txEl>
+                                              <p:pRg st="4" end="4"/>
+                                            </p:txEl>
+                                          </p:spTgt>
+                                        </p:tgtEl>
+                                        <p:attrNameLst>
+                                          <p:attrName>style.visibility</p:attrName>
+                                        </p:attrNameLst>
+                                      </p:cBhvr>
+                                      <p:to>
+                                        <p:strVal val="visible"/>
+                                      </p:to>
+                                    </p:set>
+                                  </p:childTnLst>
+                                </p:cTn>
+                              </p:par>
+                              <p:par>
+                                <p:cTn id="21" presetID="1" presetClass="entr" presetSubtype="0" fill="hold" nodeType="withEffect">
+                                  <p:stCondLst>
+                                    <p:cond delay="0"/>
+                                  </p:stCondLst>
+                                  <p:childTnLst>
+                                    <p:set>
+                                      <p:cBhvr>
+                                        <p:cTn id="22" dur="1" fill="hold">
+                                          <p:stCondLst>
+                                            <p:cond delay="0"/>
+                                          </p:stCondLst>
+                                        </p:cTn>
+                                        <p:tgtEl>
+                                          <p:spTgt spid="3">
+                                            <p:txEl>
+                                              <p:pRg st="5" end="5"/>
+                                            </p:txEl>
+                                          </p:spTgt>
+                                        </p:tgtEl>
+                                        <p:attrNameLst>
+                                          <p:attrName>style.visibility</p:attrName>
+                                        </p:attrNameLst>
+                                      </p:cBhvr>
+                                      <p:to>
+                                        <p:strVal val="visible"/>
+                                      </p:to>
+                                    </p:set>
+                                  </p:childTnLst>
+                                </p:cTn>
+                              </p:par>
+                              <p:par>
+                                <p:cTn id="23" presetID="1" presetClass="entr" presetSubtype="0" fill="hold" nodeType="withEffect">
+                                  <p:stCondLst>
+                                    <p:cond delay="0"/>
+                                  </p:stCondLst>
+                                  <p:childTnLst>
+                                    <p:set>
+                                      <p:cBhvr>
+                                        <p:cTn id="24" dur="1" fill="hold">
+                                          <p:stCondLst>
+                                            <p:cond delay="0"/>
+                                          </p:stCondLst>
+                                        </p:cTn>
+                                        <p:tgtEl>
+                                          <p:spTgt spid="3">
+                                            <p:txEl>
+                                              <p:pRg st="6" end="6"/>
+                                            </p:txEl>
+                                          </p:spTgt>
+                                        </p:tgtEl>
+                                        <p:attrNameLst>
+                                          <p:attrName>style.visibility</p:attrName>
+                                        </p:attrNameLst>
+                                      </p:cBhvr>
+                                      <p:to>
+                                        <p:strVal val="visible"/>
+                                      </p:to>
+                                    </p:set>
+                                  </p:childTnLst>
+                                </p:cTn>
+                              </p:par>
+                              <p:par>
+                                <p:cTn id="25" presetID="1" presetClass="entr" presetSubtype="0" fill="hold" nodeType="withEffect">
+                                  <p:stCondLst>
+                                    <p:cond delay="0"/>
+                                  </p:stCondLst>
+                                  <p:childTnLst>
+                                    <p:set>
+                                      <p:cBhvr>
+                                        <p:cTn id="26" dur="1" fill="hold">
+                                          <p:stCondLst>
+                                            <p:cond delay="0"/>
+                                          </p:stCondLst>
+                                        </p:cTn>
+                                        <p:tgtEl>
+                                          <p:spTgt spid="3">
+                                            <p:txEl>
+                                              <p:pRg st="7" end="7"/>
+                                            </p:txEl>
+                                          </p:spTgt>
+                                        </p:tgtEl>
+                                        <p:attrNameLst>
+                                          <p:attrName>style.visibility</p:attrName>
+                                        </p:attrNameLst>
+                                      </p:cBhvr>
+                                      <p:to>
+                                        <p:strVal val="visible"/>
+                                      </p:to>
+                                    </p:set>
+                                  </p:childTnLst>
+                                </p:cTn>
+                              </p:par>
+                              <p:par>
+                                <p:cTn id="27" presetID="1" presetClass="entr" presetSubtype="0" fill="hold" nodeType="withEffect">
+                                  <p:stCondLst>
+                                    <p:cond delay="0"/>
+                                  </p:stCondLst>
+                                  <p:childTnLst>
+                                    <p:set>
+                                      <p:cBhvr>
+                                        <p:cTn id="28" dur="1" fill="hold">
+                                          <p:stCondLst>
+                                            <p:cond delay="0"/>
+                                          </p:stCondLst>
+                                        </p:cTn>
+                                        <p:tgtEl>
+                                          <p:spTgt spid="3">
+                                            <p:txEl>
+                                              <p:pRg st="8" end="8"/>
+                                            </p:txEl>
+                                          </p:spTgt>
+                                        </p:tgtEl>
+                                        <p:attrNameLst>
+                                          <p:attrName>style.visibility</p:attrName>
+                                        </p:attrNameLst>
+                                      </p:cBhvr>
+                                      <p:to>
+                                        <p:strVal val="visible"/>
+                                      </p:to>
+                                    </p:set>
+                                  </p:childTnLst>
+                                </p:cTn>
+                              </p:par>
+                              <p:par>
+                                <p:cTn id="29" presetID="1" presetClass="entr" presetSubtype="0" fill="hold" nodeType="withEffect">
+                                  <p:stCondLst>
+                                    <p:cond delay="0"/>
+                                  </p:stCondLst>
+                                  <p:childTnLst>
+                                    <p:set>
+                                      <p:cBhvr>
+                                        <p:cTn id="30" dur="1" fill="hold">
+                                          <p:stCondLst>
+                                            <p:cond delay="0"/>
+                                          </p:stCondLst>
+                                        </p:cTn>
+                                        <p:tgtEl>
+                                          <p:spTgt spid="3">
+                                            <p:txEl>
+                                              <p:pRg st="9" end="9"/>
+                                            </p:txEl>
+                                          </p:spTgt>
+                                        </p:tgtEl>
+                                        <p:attrNameLst>
+                                          <p:attrName>style.visibility</p:attrName>
+                                        </p:attrNameLst>
+                                      </p:cBhvr>
+                                      <p:to>
+                                        <p:strVal val="visible"/>
+                                      </p:to>
+                                    </p:set>
+                                  </p:childTnLst>
+                                </p:cTn>
+                              </p:par>
+                              <p:par>
+                                <p:cTn id="31" presetID="1" presetClass="entr" presetSubtype="0" fill="hold" nodeType="withEffect">
+                                  <p:stCondLst>
+                                    <p:cond delay="0"/>
+                                  </p:stCondLst>
+                                  <p:childTnLst>
+                                    <p:set>
+                                      <p:cBhvr>
+                                        <p:cTn id="32" dur="1" fill="hold">
+                                          <p:stCondLst>
+                                            <p:cond delay="0"/>
+                                          </p:stCondLst>
+                                        </p:cTn>
+                                        <p:tgtEl>
+                                          <p:spTgt spid="3">
+                                            <p:txEl>
+                                              <p:pRg st="10" end="10"/>
+                                            </p:txEl>
+                                          </p:spTgt>
+                                        </p:tgtEl>
+                                        <p:attrNameLst>
+                                          <p:attrName>style.visibility</p:attrName>
+                                        </p:attrNameLst>
+                                      </p:cBhvr>
+                                      <p:to>
+                                        <p:strVal val="visible"/>
+                                      </p:to>
+                                    </p:set>
+                                  </p:childTnLst>
+                                </p:cTn>
+                              </p:par>
+                              <p:par>
+                                <p:cTn id="33" presetID="1" presetClass="entr" presetSubtype="0" fill="hold" nodeType="withEffect">
+                                  <p:stCondLst>
+                                    <p:cond delay="0"/>
+                                  </p:stCondLst>
+                                  <p:childTnLst>
+                                    <p:set>
+                                      <p:cBhvr>
+                                        <p:cTn id="34" dur="1" fill="hold">
+                                          <p:stCondLst>
+                                            <p:cond delay="0"/>
+                                          </p:stCondLst>
+                                        </p:cTn>
+                                        <p:tgtEl>
+                                          <p:spTgt spid="3">
+                                            <p:txEl>
+                                              <p:pRg st="11" end="11"/>
+                                            </p:txEl>
+                                          </p:spTgt>
+                                        </p:tgtEl>
+                                        <p:attrNameLst>
+                                          <p:attrName>style.visibility</p:attrName>
+                                        </p:attrNameLst>
+                                      </p:cBhvr>
+                                      <p:to>
+                                        <p:strVal val="visible"/>
+                                      </p:to>
+                                    </p:set>
+                                  </p:childTnLst>
+                                </p:cTn>
+                              </p:par>
+                              <p:par>
+                                <p:cTn id="35" presetID="1" presetClass="entr" presetSubtype="0" fill="hold" nodeType="withEffect">
+                                  <p:stCondLst>
+                                    <p:cond delay="0"/>
+                                  </p:stCondLst>
+                                  <p:childTnLst>
+                                    <p:set>
+                                      <p:cBhvr>
+                                        <p:cTn id="36" dur="1" fill="hold">
+                                          <p:stCondLst>
+                                            <p:cond delay="0"/>
+                                          </p:stCondLst>
+                                        </p:cTn>
+                                        <p:tgtEl>
+                                          <p:spTgt spid="3">
+                                            <p:txEl>
+                                              <p:pRg st="12" end="12"/>
+                                            </p:txEl>
+                                          </p:spTgt>
+                                        </p:tgtEl>
+                                        <p:attrNameLst>
+                                          <p:attrName>style.visibility</p:attrName>
+                                        </p:attrNameLst>
+                                      </p:cBhvr>
+                                      <p:to>
+                                        <p:strVal val="visible"/>
+                                      </p:to>
+                                    </p:set>
+                                  </p:childTnLst>
+                                </p:cTn>
+                              </p:par>
+                              <p:par>
+                                <p:cTn id="37" presetID="1" presetClass="entr" presetSubtype="0" fill="hold" nodeType="withEffect">
+                                  <p:stCondLst>
+                                    <p:cond delay="0"/>
+                                  </p:stCondLst>
+                                  <p:childTnLst>
+                                    <p:set>
+                                      <p:cBhvr>
+                                        <p:cTn id="38" dur="1" fill="hold">
+                                          <p:stCondLst>
+                                            <p:cond delay="0"/>
+                                          </p:stCondLst>
+                                        </p:cTn>
+                                        <p:tgtEl>
+                                          <p:spTgt spid="3">
+                                            <p:txEl>
+                                              <p:pRg st="13" end="13"/>
+                                            </p:txEl>
+                                          </p:spTgt>
+                                        </p:tgtEl>
+                                        <p:attrNameLst>
+                                          <p:attrName>style.visibility</p:attrName>
+                                        </p:attrNameLst>
+                                      </p:cBhvr>
+                                      <p:to>
+                                        <p:strVal val="visible"/>
+                                      </p:to>
+                                    </p:set>
+                                  </p:childTnLst>
+                                </p:cTn>
+                              </p:par>
+                            </p:childTnLst>
+                          </p:cTn>
+                        </p:par>
+                      </p:childTnLst>
+                    </p:cTn>
+                  </p:par>
+                  <p:par>
+                    <p:cTn id="39" fill="hold">
+                      <p:stCondLst>
+                        <p:cond delay="indefinite"/>
+                      </p:stCondLst>
+                      <p:childTnLst>
+                        <p:par>
+                          <p:cTn id="40" fill="hold">
+                            <p:stCondLst>
+                              <p:cond delay="0"/>
+                            </p:stCondLst>
+                            <p:childTnLst>
+                              <p:par>
+                                <p:cTn id="41" presetID="1" presetClass="entr" presetSubtype="0" fill="hold" nodeType="clickEffect">
+                                  <p:stCondLst>
+                                    <p:cond delay="0"/>
+                                  </p:stCondLst>
+                                  <p:childTnLst>
+                                    <p:set>
+                                      <p:cBhvr>
+                                        <p:cTn id="42" dur="1" fill="hold">
+                                          <p:stCondLst>
+                                            <p:cond delay="0"/>
+                                          </p:stCondLst>
+                                        </p:cTn>
+                                        <p:tgtEl>
+                                          <p:spTgt spid="3">
+                                            <p:txEl>
+                                              <p:pRg st="14" end="14"/>
+                                            </p:txEl>
+                                          </p:spTgt>
+                                        </p:tgtEl>
+                                        <p:attrNameLst>
+                                          <p:attrName>style.visibility</p:attrName>
+                                        </p:attrNameLst>
+                                      </p:cBhvr>
+                                      <p:to>
+                                        <p:strVal val="visible"/>
+                                      </p:to>
+                                    </p:set>
+                                  </p:childTnLst>
+                                </p:cTn>
+                              </p:par>
+                              <p:par>
+                                <p:cTn id="43" presetID="1" presetClass="entr" presetSubtype="0" fill="hold" nodeType="withEffect">
+                                  <p:stCondLst>
+                                    <p:cond delay="0"/>
+                                  </p:stCondLst>
+                                  <p:childTnLst>
+                                    <p:set>
+                                      <p:cBhvr>
+                                        <p:cTn id="44" dur="1" fill="hold">
+                                          <p:stCondLst>
+                                            <p:cond delay="0"/>
+                                          </p:stCondLst>
+                                        </p:cTn>
+                                        <p:tgtEl>
+                                          <p:spTgt spid="3">
+                                            <p:txEl>
+                                              <p:pRg st="15" end="15"/>
+                                            </p:txEl>
+                                          </p:spTgt>
+                                        </p:tgtEl>
+                                        <p:attrNameLst>
+                                          <p:attrName>style.visibility</p:attrName>
+                                        </p:attrNameLst>
+                                      </p:cBhvr>
+                                      <p:to>
+                                        <p:strVal val="visible"/>
+                                      </p:to>
+                                    </p:set>
+                                  </p:childTnLst>
+                                </p:cTn>
+                              </p:par>
+                              <p:par>
+                                <p:cTn id="45" presetID="1" presetClass="entr" presetSubtype="0" fill="hold" nodeType="withEffect">
+                                  <p:stCondLst>
+                                    <p:cond delay="0"/>
+                                  </p:stCondLst>
+                                  <p:childTnLst>
+                                    <p:set>
+                                      <p:cBhvr>
+                                        <p:cTn id="46" dur="1" fill="hold">
+                                          <p:stCondLst>
+                                            <p:cond delay="0"/>
+                                          </p:stCondLst>
+                                        </p:cTn>
+                                        <p:tgtEl>
+                                          <p:spTgt spid="3">
+                                            <p:txEl>
+                                              <p:pRg st="16" end="16"/>
+                                            </p:txEl>
+                                          </p:spTgt>
+                                        </p:tgtEl>
+                                        <p:attrNameLst>
+                                          <p:attrName>style.visibility</p:attrName>
+                                        </p:attrNameLst>
+                                      </p:cBhvr>
+                                      <p:to>
+                                        <p:strVal val="visible"/>
+                                      </p:to>
+                                    </p:set>
+                                  </p:childTnLst>
+                                </p:cTn>
+                              </p:par>
+                              <p:par>
+                                <p:cTn id="47" presetID="1" presetClass="entr" presetSubtype="0" fill="hold" nodeType="withEffect">
+                                  <p:stCondLst>
+                                    <p:cond delay="0"/>
+                                  </p:stCondLst>
+                                  <p:childTnLst>
+                                    <p:set>
+                                      <p:cBhvr>
+                                        <p:cTn id="48" dur="1" fill="hold">
+                                          <p:stCondLst>
+                                            <p:cond delay="0"/>
+                                          </p:stCondLst>
+                                        </p:cTn>
+                                        <p:tgtEl>
+                                          <p:spTgt spid="3">
+                                            <p:txEl>
+                                              <p:pRg st="17" end="17"/>
+                                            </p:txEl>
+                                          </p:spTgt>
+                                        </p:tgtEl>
+                                        <p:attrNameLst>
+                                          <p:attrName>style.visibility</p:attrName>
+                                        </p:attrNameLst>
+                                      </p:cBhvr>
+                                      <p:to>
+                                        <p:strVal val="visible"/>
+                                      </p:to>
+                                    </p:set>
+                                  </p:childTnLst>
+                                </p:cTn>
+                              </p:par>
+                              <p:par>
+                                <p:cTn id="49" presetID="1" presetClass="entr" presetSubtype="0" fill="hold" nodeType="withEffect">
+                                  <p:stCondLst>
+                                    <p:cond delay="0"/>
+                                  </p:stCondLst>
+                                  <p:childTnLst>
+                                    <p:set>
+                                      <p:cBhvr>
+                                        <p:cTn id="50" dur="1" fill="hold">
+                                          <p:stCondLst>
+                                            <p:cond delay="0"/>
+                                          </p:stCondLst>
+                                        </p:cTn>
+                                        <p:tgtEl>
+                                          <p:spTgt spid="3">
+                                            <p:txEl>
+                                              <p:pRg st="18" end="18"/>
+                                            </p:txEl>
+                                          </p:spTgt>
+                                        </p:tgtEl>
+                                        <p:attrNameLst>
+                                          <p:attrName>style.visibility</p:attrName>
+                                        </p:attrNameLst>
+                                      </p:cBhvr>
+                                      <p:to>
+                                        <p:strVal val="visible"/>
+                                      </p:to>
+                                    </p:set>
+                                  </p:childTnLst>
+                                </p:cTn>
+                              </p:par>
+                              <p:par>
+                                <p:cTn id="51" presetID="1" presetClass="entr" presetSubtype="0" fill="hold" nodeType="withEffect">
+                                  <p:stCondLst>
+                                    <p:cond delay="0"/>
+                                  </p:stCondLst>
+                                  <p:childTnLst>
+                                    <p:set>
+                                      <p:cBhvr>
+                                        <p:cTn id="52" dur="1" fill="hold">
+                                          <p:stCondLst>
+                                            <p:cond delay="0"/>
+                                          </p:stCondLst>
+                                        </p:cTn>
+                                        <p:tgtEl>
+                                          <p:spTgt spid="3">
+                                            <p:txEl>
+                                              <p:pRg st="19" end="19"/>
+                                            </p:txEl>
+                                          </p:spTgt>
+                                        </p:tgtEl>
+                                        <p:attrNameLst>
+                                          <p:attrName>style.visibility</p:attrName>
+                                        </p:attrNameLst>
+                                      </p:cBhvr>
+                                      <p:to>
+                                        <p:strVal val="visible"/>
+                                      </p:to>
+                                    </p:set>
+                                  </p:childTnLst>
+                                </p:cTn>
+                              </p:par>
+                              <p:par>
+                                <p:cTn id="53" presetID="1" presetClass="entr" presetSubtype="0" fill="hold" nodeType="withEffect">
+                                  <p:stCondLst>
+                                    <p:cond delay="0"/>
+                                  </p:stCondLst>
+                                  <p:childTnLst>
+                                    <p:set>
+                                      <p:cBhvr>
+                                        <p:cTn id="54" dur="1" fill="hold">
+                                          <p:stCondLst>
+                                            <p:cond delay="0"/>
+                                          </p:stCondLst>
+                                        </p:cTn>
+                                        <p:tgtEl>
+                                          <p:spTgt spid="3">
+                                            <p:txEl>
+                                              <p:pRg st="20" end="20"/>
+                                            </p:txEl>
+                                          </p:spTgt>
+                                        </p:tgtEl>
+                                        <p:attrNameLst>
+                                          <p:attrName>style.visibility</p:attrName>
+                                        </p:attrNameLst>
+                                      </p:cBhvr>
+                                      <p:to>
+                                        <p:strVal val="visible"/>
+                                      </p:to>
+                                    </p:set>
+                                  </p:childTnLst>
+                                </p:cTn>
+                              </p:par>
+                            </p:childTnLst>
+                          </p:cTn>
+                        </p:par>
+                      </p:childTnLst>
+                    </p:cTn>
+                  </p:par>
+                  <p:par>
+                    <p:cTn id="55" fill="hold">
+                      <p:stCondLst>
+                        <p:cond delay="indefinite"/>
+                      </p:stCondLst>
+                      <p:childTnLst>
+                        <p:par>
+                          <p:cTn id="56" fill="hold">
+                            <p:stCondLst>
+                              <p:cond delay="0"/>
+                            </p:stCondLst>
+                            <p:childTnLst>
+                              <p:par>
+                                <p:cTn id="57" presetID="1" presetClass="entr" presetSubtype="0" fill="hold" nodeType="clickEffect">
+                                  <p:stCondLst>
+                                    <p:cond delay="0"/>
+                                  </p:stCondLst>
+                                  <p:childTnLst>
+                                    <p:set>
+                                      <p:cBhvr>
+                                        <p:cTn id="58" dur="1" fill="hold">
+                                          <p:stCondLst>
+                                            <p:cond delay="0"/>
+                                          </p:stCondLst>
+                                        </p:cTn>
+                                        <p:tgtEl>
+                                          <p:spTgt spid="3">
+                                            <p:txEl>
+                                              <p:pRg st="21" end="21"/>
+                                            </p:txEl>
+                                          </p:spTgt>
+                                        </p:tgtEl>
+                                        <p:attrNameLst>
+                                          <p:attrName>style.visibility</p:attrName>
+                                        </p:attrNameLst>
+                                      </p:cBhvr>
+                                      <p:to>
+                                        <p:strVal val="visible"/>
+                                      </p:to>
+                                    </p:set>
+                                  </p:childTnLst>
+                                </p:cTn>
+                              </p:par>
+                              <p:par>
+                                <p:cTn id="59" presetID="1" presetClass="entr" presetSubtype="0" fill="hold" nodeType="withEffect">
+                                  <p:stCondLst>
+                                    <p:cond delay="0"/>
+                                  </p:stCondLst>
+                                  <p:childTnLst>
+                                    <p:set>
+                                      <p:cBhvr>
+                                        <p:cTn id="60" dur="1" fill="hold">
+                                          <p:stCondLst>
+                                            <p:cond delay="0"/>
+                                          </p:stCondLst>
+                                        </p:cTn>
+                                        <p:tgtEl>
+                                          <p:spTgt spid="3">
+                                            <p:txEl>
+                                              <p:pRg st="22" end="22"/>
+                                            </p:txEl>
+                                          </p:spTgt>
+                                        </p:tgtEl>
+                                        <p:attrNameLst>
+                                          <p:attrName>style.visibility</p:attrName>
+                                        </p:attrNameLst>
+                                      </p:cBhvr>
+                                      <p:to>
+                                        <p:strVal val="visible"/>
+                                      </p:to>
+                                    </p:set>
+                                  </p:childTnLst>
+                                </p:cTn>
+                              </p:par>
+                              <p:par>
+                                <p:cTn id="61" presetID="1" presetClass="entr" presetSubtype="0" fill="hold" nodeType="withEffect">
+                                  <p:stCondLst>
+                                    <p:cond delay="0"/>
+                                  </p:stCondLst>
+                                  <p:childTnLst>
+                                    <p:set>
+                                      <p:cBhvr>
+                                        <p:cTn id="62" dur="1" fill="hold">
+                                          <p:stCondLst>
+                                            <p:cond delay="0"/>
+                                          </p:stCondLst>
+                                        </p:cTn>
+                                        <p:tgtEl>
+                                          <p:spTgt spid="3">
+                                            <p:txEl>
+                                              <p:pRg st="23" end="23"/>
+                                            </p:txEl>
+                                          </p:spTgt>
+                                        </p:tgtEl>
+                                        <p:attrNameLst>
+                                          <p:attrName>style.visibility</p:attrName>
+                                        </p:attrNameLst>
+                                      </p:cBhvr>
+                                      <p:to>
+                                        <p:strVal val="visible"/>
+                                      </p:to>
+                                    </p:set>
+                                  </p:childTnLst>
+                                </p:cTn>
+                              </p:par>
+                              <p:par>
+                                <p:cTn id="63" presetID="1" presetClass="entr" presetSubtype="0" fill="hold" nodeType="withEffect">
+                                  <p:stCondLst>
+                                    <p:cond delay="0"/>
+                                  </p:stCondLst>
+                                  <p:childTnLst>
+                                    <p:set>
+                                      <p:cBhvr>
+                                        <p:cTn id="64" dur="1" fill="hold">
+                                          <p:stCondLst>
+                                            <p:cond delay="0"/>
+                                          </p:stCondLst>
+                                        </p:cTn>
+                                        <p:tgtEl>
+                                          <p:spTgt spid="3">
+                                            <p:txEl>
+                                              <p:pRg st="24" end="24"/>
+                                            </p:txEl>
+                                          </p:spTgt>
+                                        </p:tgtEl>
+                                        <p:attrNameLst>
+                                          <p:attrName>style.visibility</p:attrName>
+                                        </p:attrNameLst>
+                                      </p:cBhvr>
+                                      <p:to>
+                                        <p:strVal val="visible"/>
+                                      </p:to>
+                                    </p:set>
+                                  </p:childTnLst>
+                                </p:cTn>
+                              </p:par>
+                              <p:par>
+                                <p:cTn id="65" presetID="1" presetClass="entr" presetSubtype="0" fill="hold" nodeType="withEffect">
+                                  <p:stCondLst>
+                                    <p:cond delay="0"/>
+                                  </p:stCondLst>
+                                  <p:childTnLst>
+                                    <p:set>
+                                      <p:cBhvr>
+                                        <p:cTn id="66" dur="1" fill="hold">
+                                          <p:stCondLst>
+                                            <p:cond delay="0"/>
+                                          </p:stCondLst>
+                                        </p:cTn>
+                                        <p:tgtEl>
+                                          <p:spTgt spid="3">
+                                            <p:txEl>
+                                              <p:pRg st="25" end="25"/>
+                                            </p:txEl>
+                                          </p:spTgt>
+                                        </p:tgtEl>
+                                        <p:attrNameLst>
+                                          <p:attrName>style.visibility</p:attrName>
+                                        </p:attrNameLst>
+                                      </p:cBhvr>
+                                      <p:to>
+                                        <p:strVal val="visible"/>
+                                      </p:to>
+                                    </p:set>
+                                  </p:childTnLst>
+                                </p:cTn>
+                              </p:par>
+                              <p:par>
+                                <p:cTn id="67" presetID="1" presetClass="entr" presetSubtype="0" fill="hold" nodeType="withEffect">
+                                  <p:stCondLst>
+                                    <p:cond delay="0"/>
+                                  </p:stCondLst>
+                                  <p:childTnLst>
+                                    <p:set>
+                                      <p:cBhvr>
+                                        <p:cTn id="68" dur="1" fill="hold">
+                                          <p:stCondLst>
+                                            <p:cond delay="0"/>
+                                          </p:stCondLst>
+                                        </p:cTn>
+                                        <p:tgtEl>
+                                          <p:spTgt spid="3">
+                                            <p:txEl>
+                                              <p:pRg st="26" end="26"/>
+                                            </p:txEl>
+                                          </p:spTgt>
+                                        </p:tgtEl>
+                                        <p:attrNameLst>
+                                          <p:attrName>style.visibility</p:attrName>
+                                        </p:attrNameLst>
+                                      </p:cBhvr>
+                                      <p:to>
+                                        <p:strVal val="visible"/>
+                                      </p:to>
+                                    </p:set>
+                                  </p:childTnLst>
+                                </p:cTn>
+                              </p:par>
+                              <p:par>
+                                <p:cTn id="69" presetID="1" presetClass="entr" presetSubtype="0" fill="hold" nodeType="withEffect">
+                                  <p:stCondLst>
+                                    <p:cond delay="0"/>
+                                  </p:stCondLst>
+                                  <p:childTnLst>
+                                    <p:set>
+                                      <p:cBhvr>
+                                        <p:cTn id="70" dur="1" fill="hold">
+                                          <p:stCondLst>
+                                            <p:cond delay="0"/>
+                                          </p:stCondLst>
+                                        </p:cTn>
+                                        <p:tgtEl>
+                                          <p:spTgt spid="3">
+                                            <p:txEl>
+                                              <p:pRg st="27" end="27"/>
+                                            </p:txEl>
+                                          </p:spTgt>
+                                        </p:tgtEl>
+                                        <p:attrNameLst>
+                                          <p:attrName>style.visibility</p:attrName>
+                                        </p:attrNameLst>
+                                      </p:cBhvr>
+                                      <p:to>
+                                        <p:strVal val="visible"/>
+                                      </p:to>
+                                    </p:set>
+                                  </p:childTnLst>
+                                </p:cTn>
+                              </p:par>
+                              <p:par>
+                                <p:cTn id="71" presetID="1" presetClass="entr" presetSubtype="0" fill="hold" nodeType="withEffect">
+                                  <p:stCondLst>
+                                    <p:cond delay="0"/>
+                                  </p:stCondLst>
+                                  <p:childTnLst>
+                                    <p:set>
+                                      <p:cBhvr>
+                                        <p:cTn id="72" dur="1" fill="hold">
+                                          <p:stCondLst>
+                                            <p:cond delay="0"/>
+                                          </p:stCondLst>
+                                        </p:cTn>
+                                        <p:tgtEl>
+                                          <p:spTgt spid="3">
+                                            <p:txEl>
+                                              <p:pRg st="28" end="28"/>
+                                            </p:txEl>
+                                          </p:spTgt>
+                                        </p:tgtEl>
+                                        <p:attrNameLst>
+                                          <p:attrName>style.visibility</p:attrName>
+                                        </p:attrNameLst>
+                                      </p:cBhvr>
+                                      <p:to>
+                                        <p:strVal val="visible"/>
+                                      </p:to>
+                                    </p:set>
+                                  </p:childTnLst>
+                                </p:cTn>
+                              </p:par>
+                              <p:par>
+                                <p:cTn id="73" presetID="1" presetClass="entr" presetSubtype="0" fill="hold" nodeType="withEffect">
+                                  <p:stCondLst>
+                                    <p:cond delay="0"/>
+                                  </p:stCondLst>
+                                  <p:childTnLst>
+                                    <p:set>
+                                      <p:cBhvr>
+                                        <p:cTn id="74" dur="1" fill="hold">
+                                          <p:stCondLst>
+                                            <p:cond delay="0"/>
+                                          </p:stCondLst>
+                                        </p:cTn>
+                                        <p:tgtEl>
+                                          <p:spTgt spid="3">
+                                            <p:txEl>
+                                              <p:pRg st="29" end="29"/>
+                                            </p:txEl>
+                                          </p:spTgt>
+                                        </p:tgtEl>
+                                        <p:attrNameLst>
+                                          <p:attrName>style.visibility</p:attrName>
+                                        </p:attrNameLst>
+                                      </p:cBhvr>
+                                      <p:to>
+                                        <p:strVal val="visible"/>
+                                      </p:to>
+                                    </p:set>
+                                  </p:childTnLst>
+                                </p:cTn>
+                              </p:par>
+                              <p:par>
+                                <p:cTn id="75" presetID="1" presetClass="entr" presetSubtype="0" fill="hold" nodeType="withEffect">
+                                  <p:stCondLst>
+                                    <p:cond delay="0"/>
+                                  </p:stCondLst>
+                                  <p:childTnLst>
+                                    <p:set>
+                                      <p:cBhvr>
+                                        <p:cTn id="76" dur="1" fill="hold">
+                                          <p:stCondLst>
+                                            <p:cond delay="0"/>
+                                          </p:stCondLst>
+                                        </p:cTn>
+                                        <p:tgtEl>
+                                          <p:spTgt spid="3">
+                                            <p:txEl>
+                                              <p:pRg st="30" end="30"/>
+                                            </p:txEl>
+                                          </p:spTgt>
+                                        </p:tgtEl>
+                                        <p:attrNameLst>
+                                          <p:attrName>style.visibility</p:attrName>
+                                        </p:attrNameLst>
+                                      </p:cBhvr>
+                                      <p:to>
+                                        <p:strVal val="visible"/>
+                                      </p:to>
+                                    </p:set>
+                                  </p:childTnLst>
+                                </p:cTn>
+                              </p:par>
+                            </p:childTnLst>
+                          </p:cTn>
+                        </p:par>
+                      </p:childTnLst>
+                    </p:cTn>
+                  </p:par>
+                  <p:par>
+                    <p:cTn id="77" fill="hold">
+                      <p:stCondLst>
+                        <p:cond delay="indefinite"/>
+                      </p:stCondLst>
+                      <p:childTnLst>
+                        <p:par>
+                          <p:cTn id="78" fill="hold">
+                            <p:stCondLst>
+                              <p:cond delay="0"/>
+                            </p:stCondLst>
+                            <p:childTnLst>
+                              <p:par>
+                                <p:cTn id="79" presetID="1" presetClass="entr" presetSubtype="0" fill="hold" nodeType="clickEffect">
+                                  <p:stCondLst>
+                                    <p:cond delay="0"/>
+                                  </p:stCondLst>
+                                  <p:childTnLst>
+                                    <p:set>
+                                      <p:cBhvr>
+                                        <p:cTn id="80" dur="1" fill="hold">
+                                          <p:stCondLst>
+                                            <p:cond delay="0"/>
+                                          </p:stCondLst>
+                                        </p:cTn>
+                                        <p:tgtEl>
+                                          <p:spTgt spid="3">
+                                            <p:txEl>
+                                              <p:pRg st="31" end="31"/>
+                                            </p:txEl>
+                                          </p:spTgt>
+                                        </p:tgtEl>
+                                        <p:attrNameLst>
+                                          <p:attrName>style.visibility</p:attrName>
+                                        </p:attrNameLst>
+                                      </p:cBhvr>
+                                      <p:to>
+                                        <p:strVal val="visible"/>
+                                      </p:to>
+                                    </p:set>
+                                  </p:childTnLst>
+                                </p:cTn>
+                              </p:par>
+                              <p:par>
+                                <p:cTn id="81" presetID="1" presetClass="entr" presetSubtype="0" fill="hold" nodeType="withEffect">
+                                  <p:stCondLst>
+                                    <p:cond delay="0"/>
+                                  </p:stCondLst>
+                                  <p:childTnLst>
+                                    <p:set>
+                                      <p:cBhvr>
+                                        <p:cTn id="82" dur="1" fill="hold">
+                                          <p:stCondLst>
+                                            <p:cond delay="0"/>
+                                          </p:stCondLst>
+                                        </p:cTn>
+                                        <p:tgtEl>
+                                          <p:spTgt spid="3">
+                                            <p:txEl>
+                                              <p:pRg st="32" end="32"/>
+                                            </p:txEl>
+                                          </p:spTgt>
+                                        </p:tgtEl>
+                                        <p:attrNameLst>
+                                          <p:attrName>style.visibility</p:attrName>
+                                        </p:attrNameLst>
+                                      </p:cBhvr>
+                                      <p:to>
+                                        <p:strVal val="visible"/>
+                                      </p:to>
+                                    </p:set>
+                                  </p:childTnLst>
+                                </p:cTn>
+                              </p:par>
+                              <p:par>
+                                <p:cTn id="83" presetID="1" presetClass="entr" presetSubtype="0" fill="hold" nodeType="withEffect">
+                                  <p:stCondLst>
+                                    <p:cond delay="0"/>
+                                  </p:stCondLst>
+                                  <p:childTnLst>
+                                    <p:set>
+                                      <p:cBhvr>
+                                        <p:cTn id="84" dur="1" fill="hold">
+                                          <p:stCondLst>
+                                            <p:cond delay="0"/>
+                                          </p:stCondLst>
+                                        </p:cTn>
+                                        <p:tgtEl>
+                                          <p:spTgt spid="3">
+                                            <p:txEl>
+                                              <p:pRg st="33" end="33"/>
+                                            </p:txEl>
+                                          </p:spTgt>
+                                        </p:tgtEl>
+                                        <p:attrNameLst>
+                                          <p:attrName>style.visibility</p:attrName>
+                                        </p:attrNameLst>
+                                      </p:cBhvr>
+                                      <p:to>
+                                        <p:strVal val="visible"/>
+                                      </p:to>
+                                    </p:set>
+                                  </p:childTnLst>
+                                </p:cTn>
+                              </p:par>
+                            </p:childTnLst>
+                          </p:cTn>
+                        </p:par>
+                      </p:childTnLst>
+                    </p:cTn>
+                  </p:par>
+                </p:childTnLst>
+              </p:cTn>
+              <p:prevCondLst>
+                <p:cond evt="onPrev" delay="0">
+                  <p:tgtEl>
+                    <p:sldTgt/>
+                  </p:tgtEl>
+                </p:cond>
+              </p:prevCondLst>
+              <p:nextCondLst>
+                <p:cond evt="onNext" delay="0">
+                  <p:tgtEl>
+                    <p:sldTgt/>
+                  </p:tgtEl>
+                </p:cond>
+              </p:nextCondLst>
+            </p:seq>
+          </p:childTnLst>
+        </p:cTn>
+      </p:par>
+    </p:tnLst>
+    <p:bldLst>
+      <p:bldP spid="3" grpId="0" animBg="1"/>
+    </p:bldLst>
+  </p:timing>
 </p:sld>
 </file>
 
@@ -8728,6 +9953,877 @@
   <p:clrMapOvr>
     <a:masterClrMapping/>
   </p:clrMapOvr>
+  <p:timing>
+    <p:tnLst>
+      <p:par>
+        <p:cTn id="1" dur="indefinite" restart="never" nodeType="tmRoot">
+          <p:childTnLst>
+            <p:seq concurrent="1" nextAc="seek">
+              <p:cTn id="2" dur="indefinite" nodeType="mainSeq">
+                <p:childTnLst>
+                  <p:par>
+                    <p:cTn id="3" fill="hold">
+                      <p:stCondLst>
+                        <p:cond delay="indefinite"/>
+                      </p:stCondLst>
+                      <p:childTnLst>
+                        <p:par>
+                          <p:cTn id="4" fill="hold">
+                            <p:stCondLst>
+                              <p:cond delay="0"/>
+                            </p:stCondLst>
+                            <p:childTnLst>
+                              <p:par>
+                                <p:cTn id="5" presetID="1" presetClass="entr" presetSubtype="0" fill="hold" grpId="0" nodeType="clickEffect">
+                                  <p:stCondLst>
+                                    <p:cond delay="0"/>
+                                  </p:stCondLst>
+                                  <p:childTnLst>
+                                    <p:set>
+                                      <p:cBhvr>
+                                        <p:cTn id="6" dur="1" fill="hold">
+                                          <p:stCondLst>
+                                            <p:cond delay="0"/>
+                                          </p:stCondLst>
+                                        </p:cTn>
+                                        <p:tgtEl>
+                                          <p:spTgt spid="3"/>
+                                        </p:tgtEl>
+                                        <p:attrNameLst>
+                                          <p:attrName>style.visibility</p:attrName>
+                                        </p:attrNameLst>
+                                      </p:cBhvr>
+                                      <p:to>
+                                        <p:strVal val="visible"/>
+                                      </p:to>
+                                    </p:set>
+                                  </p:childTnLst>
+                                </p:cTn>
+                              </p:par>
+                              <p:par>
+                                <p:cTn id="7" presetID="1" presetClass="entr" presetSubtype="0" fill="hold" nodeType="withEffect">
+                                  <p:stCondLst>
+                                    <p:cond delay="0"/>
+                                  </p:stCondLst>
+                                  <p:childTnLst>
+                                    <p:set>
+                                      <p:cBhvr>
+                                        <p:cTn id="8" dur="1" fill="hold">
+                                          <p:stCondLst>
+                                            <p:cond delay="0"/>
+                                          </p:stCondLst>
+                                        </p:cTn>
+                                        <p:tgtEl>
+                                          <p:spTgt spid="3">
+                                            <p:txEl>
+                                              <p:pRg st="0" end="0"/>
+                                            </p:txEl>
+                                          </p:spTgt>
+                                        </p:tgtEl>
+                                        <p:attrNameLst>
+                                          <p:attrName>style.visibility</p:attrName>
+                                        </p:attrNameLst>
+                                      </p:cBhvr>
+                                      <p:to>
+                                        <p:strVal val="visible"/>
+                                      </p:to>
+                                    </p:set>
+                                  </p:childTnLst>
+                                </p:cTn>
+                              </p:par>
+                              <p:par>
+                                <p:cTn id="9" presetID="1" presetClass="entr" presetSubtype="0" fill="hold" nodeType="withEffect">
+                                  <p:stCondLst>
+                                    <p:cond delay="0"/>
+                                  </p:stCondLst>
+                                  <p:childTnLst>
+                                    <p:set>
+                                      <p:cBhvr>
+                                        <p:cTn id="10" dur="1" fill="hold">
+                                          <p:stCondLst>
+                                            <p:cond delay="0"/>
+                                          </p:stCondLst>
+                                        </p:cTn>
+                                        <p:tgtEl>
+                                          <p:spTgt spid="3">
+                                            <p:txEl>
+                                              <p:pRg st="1" end="1"/>
+                                            </p:txEl>
+                                          </p:spTgt>
+                                        </p:tgtEl>
+                                        <p:attrNameLst>
+                                          <p:attrName>style.visibility</p:attrName>
+                                        </p:attrNameLst>
+                                      </p:cBhvr>
+                                      <p:to>
+                                        <p:strVal val="visible"/>
+                                      </p:to>
+                                    </p:set>
+                                  </p:childTnLst>
+                                </p:cTn>
+                              </p:par>
+                              <p:par>
+                                <p:cTn id="11" presetID="1" presetClass="entr" presetSubtype="0" fill="hold" nodeType="withEffect">
+                                  <p:stCondLst>
+                                    <p:cond delay="0"/>
+                                  </p:stCondLst>
+                                  <p:childTnLst>
+                                    <p:set>
+                                      <p:cBhvr>
+                                        <p:cTn id="12" dur="1" fill="hold">
+                                          <p:stCondLst>
+                                            <p:cond delay="0"/>
+                                          </p:stCondLst>
+                                        </p:cTn>
+                                        <p:tgtEl>
+                                          <p:spTgt spid="3">
+                                            <p:txEl>
+                                              <p:pRg st="2" end="2"/>
+                                            </p:txEl>
+                                          </p:spTgt>
+                                        </p:tgtEl>
+                                        <p:attrNameLst>
+                                          <p:attrName>style.visibility</p:attrName>
+                                        </p:attrNameLst>
+                                      </p:cBhvr>
+                                      <p:to>
+                                        <p:strVal val="visible"/>
+                                      </p:to>
+                                    </p:set>
+                                  </p:childTnLst>
+                                </p:cTn>
+                              </p:par>
+                              <p:par>
+                                <p:cTn id="13" presetID="1" presetClass="entr" presetSubtype="0" fill="hold" nodeType="withEffect">
+                                  <p:stCondLst>
+                                    <p:cond delay="0"/>
+                                  </p:stCondLst>
+                                  <p:childTnLst>
+                                    <p:set>
+                                      <p:cBhvr>
+                                        <p:cTn id="14" dur="1" fill="hold">
+                                          <p:stCondLst>
+                                            <p:cond delay="0"/>
+                                          </p:stCondLst>
+                                        </p:cTn>
+                                        <p:tgtEl>
+                                          <p:spTgt spid="3">
+                                            <p:txEl>
+                                              <p:pRg st="3" end="3"/>
+                                            </p:txEl>
+                                          </p:spTgt>
+                                        </p:tgtEl>
+                                        <p:attrNameLst>
+                                          <p:attrName>style.visibility</p:attrName>
+                                        </p:attrNameLst>
+                                      </p:cBhvr>
+                                      <p:to>
+                                        <p:strVal val="visible"/>
+                                      </p:to>
+                                    </p:set>
+                                  </p:childTnLst>
+                                </p:cTn>
+                              </p:par>
+                            </p:childTnLst>
+                          </p:cTn>
+                        </p:par>
+                      </p:childTnLst>
+                    </p:cTn>
+                  </p:par>
+                  <p:par>
+                    <p:cTn id="15" fill="hold">
+                      <p:stCondLst>
+                        <p:cond delay="indefinite"/>
+                      </p:stCondLst>
+                      <p:childTnLst>
+                        <p:par>
+                          <p:cTn id="16" fill="hold">
+                            <p:stCondLst>
+                              <p:cond delay="0"/>
+                            </p:stCondLst>
+                            <p:childTnLst>
+                              <p:par>
+                                <p:cTn id="17" presetID="1" presetClass="entr" presetSubtype="0" fill="hold" nodeType="clickEffect">
+                                  <p:stCondLst>
+                                    <p:cond delay="0"/>
+                                  </p:stCondLst>
+                                  <p:childTnLst>
+                                    <p:set>
+                                      <p:cBhvr>
+                                        <p:cTn id="18" dur="1" fill="hold">
+                                          <p:stCondLst>
+                                            <p:cond delay="0"/>
+                                          </p:stCondLst>
+                                        </p:cTn>
+                                        <p:tgtEl>
+                                          <p:spTgt spid="3">
+                                            <p:txEl>
+                                              <p:pRg st="4" end="4"/>
+                                            </p:txEl>
+                                          </p:spTgt>
+                                        </p:tgtEl>
+                                        <p:attrNameLst>
+                                          <p:attrName>style.visibility</p:attrName>
+                                        </p:attrNameLst>
+                                      </p:cBhvr>
+                                      <p:to>
+                                        <p:strVal val="visible"/>
+                                      </p:to>
+                                    </p:set>
+                                  </p:childTnLst>
+                                </p:cTn>
+                              </p:par>
+                              <p:par>
+                                <p:cTn id="19" presetID="1" presetClass="entr" presetSubtype="0" fill="hold" nodeType="withEffect">
+                                  <p:stCondLst>
+                                    <p:cond delay="0"/>
+                                  </p:stCondLst>
+                                  <p:childTnLst>
+                                    <p:set>
+                                      <p:cBhvr>
+                                        <p:cTn id="20" dur="1" fill="hold">
+                                          <p:stCondLst>
+                                            <p:cond delay="0"/>
+                                          </p:stCondLst>
+                                        </p:cTn>
+                                        <p:tgtEl>
+                                          <p:spTgt spid="3">
+                                            <p:txEl>
+                                              <p:pRg st="5" end="5"/>
+                                            </p:txEl>
+                                          </p:spTgt>
+                                        </p:tgtEl>
+                                        <p:attrNameLst>
+                                          <p:attrName>style.visibility</p:attrName>
+                                        </p:attrNameLst>
+                                      </p:cBhvr>
+                                      <p:to>
+                                        <p:strVal val="visible"/>
+                                      </p:to>
+                                    </p:set>
+                                  </p:childTnLst>
+                                </p:cTn>
+                              </p:par>
+                              <p:par>
+                                <p:cTn id="21" presetID="1" presetClass="entr" presetSubtype="0" fill="hold" nodeType="withEffect">
+                                  <p:stCondLst>
+                                    <p:cond delay="0"/>
+                                  </p:stCondLst>
+                                  <p:childTnLst>
+                                    <p:set>
+                                      <p:cBhvr>
+                                        <p:cTn id="22" dur="1" fill="hold">
+                                          <p:stCondLst>
+                                            <p:cond delay="0"/>
+                                          </p:stCondLst>
+                                        </p:cTn>
+                                        <p:tgtEl>
+                                          <p:spTgt spid="3">
+                                            <p:txEl>
+                                              <p:pRg st="6" end="6"/>
+                                            </p:txEl>
+                                          </p:spTgt>
+                                        </p:tgtEl>
+                                        <p:attrNameLst>
+                                          <p:attrName>style.visibility</p:attrName>
+                                        </p:attrNameLst>
+                                      </p:cBhvr>
+                                      <p:to>
+                                        <p:strVal val="visible"/>
+                                      </p:to>
+                                    </p:set>
+                                  </p:childTnLst>
+                                </p:cTn>
+                              </p:par>
+                              <p:par>
+                                <p:cTn id="23" presetID="1" presetClass="entr" presetSubtype="0" fill="hold" nodeType="withEffect">
+                                  <p:stCondLst>
+                                    <p:cond delay="0"/>
+                                  </p:stCondLst>
+                                  <p:childTnLst>
+                                    <p:set>
+                                      <p:cBhvr>
+                                        <p:cTn id="24" dur="1" fill="hold">
+                                          <p:stCondLst>
+                                            <p:cond delay="0"/>
+                                          </p:stCondLst>
+                                        </p:cTn>
+                                        <p:tgtEl>
+                                          <p:spTgt spid="3">
+                                            <p:txEl>
+                                              <p:pRg st="7" end="7"/>
+                                            </p:txEl>
+                                          </p:spTgt>
+                                        </p:tgtEl>
+                                        <p:attrNameLst>
+                                          <p:attrName>style.visibility</p:attrName>
+                                        </p:attrNameLst>
+                                      </p:cBhvr>
+                                      <p:to>
+                                        <p:strVal val="visible"/>
+                                      </p:to>
+                                    </p:set>
+                                  </p:childTnLst>
+                                </p:cTn>
+                              </p:par>
+                              <p:par>
+                                <p:cTn id="25" presetID="1" presetClass="entr" presetSubtype="0" fill="hold" nodeType="withEffect">
+                                  <p:stCondLst>
+                                    <p:cond delay="0"/>
+                                  </p:stCondLst>
+                                  <p:childTnLst>
+                                    <p:set>
+                                      <p:cBhvr>
+                                        <p:cTn id="26" dur="1" fill="hold">
+                                          <p:stCondLst>
+                                            <p:cond delay="0"/>
+                                          </p:stCondLst>
+                                        </p:cTn>
+                                        <p:tgtEl>
+                                          <p:spTgt spid="3">
+                                            <p:txEl>
+                                              <p:pRg st="8" end="8"/>
+                                            </p:txEl>
+                                          </p:spTgt>
+                                        </p:tgtEl>
+                                        <p:attrNameLst>
+                                          <p:attrName>style.visibility</p:attrName>
+                                        </p:attrNameLst>
+                                      </p:cBhvr>
+                                      <p:to>
+                                        <p:strVal val="visible"/>
+                                      </p:to>
+                                    </p:set>
+                                  </p:childTnLst>
+                                </p:cTn>
+                              </p:par>
+                              <p:par>
+                                <p:cTn id="27" presetID="1" presetClass="entr" presetSubtype="0" fill="hold" nodeType="withEffect">
+                                  <p:stCondLst>
+                                    <p:cond delay="0"/>
+                                  </p:stCondLst>
+                                  <p:childTnLst>
+                                    <p:set>
+                                      <p:cBhvr>
+                                        <p:cTn id="28" dur="1" fill="hold">
+                                          <p:stCondLst>
+                                            <p:cond delay="0"/>
+                                          </p:stCondLst>
+                                        </p:cTn>
+                                        <p:tgtEl>
+                                          <p:spTgt spid="3">
+                                            <p:txEl>
+                                              <p:pRg st="9" end="9"/>
+                                            </p:txEl>
+                                          </p:spTgt>
+                                        </p:tgtEl>
+                                        <p:attrNameLst>
+                                          <p:attrName>style.visibility</p:attrName>
+                                        </p:attrNameLst>
+                                      </p:cBhvr>
+                                      <p:to>
+                                        <p:strVal val="visible"/>
+                                      </p:to>
+                                    </p:set>
+                                  </p:childTnLst>
+                                </p:cTn>
+                              </p:par>
+                              <p:par>
+                                <p:cTn id="29" presetID="1" presetClass="entr" presetSubtype="0" fill="hold" nodeType="withEffect">
+                                  <p:stCondLst>
+                                    <p:cond delay="0"/>
+                                  </p:stCondLst>
+                                  <p:childTnLst>
+                                    <p:set>
+                                      <p:cBhvr>
+                                        <p:cTn id="30" dur="1" fill="hold">
+                                          <p:stCondLst>
+                                            <p:cond delay="0"/>
+                                          </p:stCondLst>
+                                        </p:cTn>
+                                        <p:tgtEl>
+                                          <p:spTgt spid="3">
+                                            <p:txEl>
+                                              <p:pRg st="10" end="10"/>
+                                            </p:txEl>
+                                          </p:spTgt>
+                                        </p:tgtEl>
+                                        <p:attrNameLst>
+                                          <p:attrName>style.visibility</p:attrName>
+                                        </p:attrNameLst>
+                                      </p:cBhvr>
+                                      <p:to>
+                                        <p:strVal val="visible"/>
+                                      </p:to>
+                                    </p:set>
+                                  </p:childTnLst>
+                                </p:cTn>
+                              </p:par>
+                              <p:par>
+                                <p:cTn id="31" presetID="1" presetClass="entr" presetSubtype="0" fill="hold" nodeType="withEffect">
+                                  <p:stCondLst>
+                                    <p:cond delay="0"/>
+                                  </p:stCondLst>
+                                  <p:childTnLst>
+                                    <p:set>
+                                      <p:cBhvr>
+                                        <p:cTn id="32" dur="1" fill="hold">
+                                          <p:stCondLst>
+                                            <p:cond delay="0"/>
+                                          </p:stCondLst>
+                                        </p:cTn>
+                                        <p:tgtEl>
+                                          <p:spTgt spid="3">
+                                            <p:txEl>
+                                              <p:pRg st="11" end="11"/>
+                                            </p:txEl>
+                                          </p:spTgt>
+                                        </p:tgtEl>
+                                        <p:attrNameLst>
+                                          <p:attrName>style.visibility</p:attrName>
+                                        </p:attrNameLst>
+                                      </p:cBhvr>
+                                      <p:to>
+                                        <p:strVal val="visible"/>
+                                      </p:to>
+                                    </p:set>
+                                  </p:childTnLst>
+                                </p:cTn>
+                              </p:par>
+                              <p:par>
+                                <p:cTn id="33" presetID="1" presetClass="entr" presetSubtype="0" fill="hold" nodeType="withEffect">
+                                  <p:stCondLst>
+                                    <p:cond delay="0"/>
+                                  </p:stCondLst>
+                                  <p:childTnLst>
+                                    <p:set>
+                                      <p:cBhvr>
+                                        <p:cTn id="34" dur="1" fill="hold">
+                                          <p:stCondLst>
+                                            <p:cond delay="0"/>
+                                          </p:stCondLst>
+                                        </p:cTn>
+                                        <p:tgtEl>
+                                          <p:spTgt spid="3">
+                                            <p:txEl>
+                                              <p:pRg st="12" end="12"/>
+                                            </p:txEl>
+                                          </p:spTgt>
+                                        </p:tgtEl>
+                                        <p:attrNameLst>
+                                          <p:attrName>style.visibility</p:attrName>
+                                        </p:attrNameLst>
+                                      </p:cBhvr>
+                                      <p:to>
+                                        <p:strVal val="visible"/>
+                                      </p:to>
+                                    </p:set>
+                                  </p:childTnLst>
+                                </p:cTn>
+                              </p:par>
+                              <p:par>
+                                <p:cTn id="35" presetID="1" presetClass="entr" presetSubtype="0" fill="hold" nodeType="withEffect">
+                                  <p:stCondLst>
+                                    <p:cond delay="0"/>
+                                  </p:stCondLst>
+                                  <p:childTnLst>
+                                    <p:set>
+                                      <p:cBhvr>
+                                        <p:cTn id="36" dur="1" fill="hold">
+                                          <p:stCondLst>
+                                            <p:cond delay="0"/>
+                                          </p:stCondLst>
+                                        </p:cTn>
+                                        <p:tgtEl>
+                                          <p:spTgt spid="3">
+                                            <p:txEl>
+                                              <p:pRg st="13" end="13"/>
+                                            </p:txEl>
+                                          </p:spTgt>
+                                        </p:tgtEl>
+                                        <p:attrNameLst>
+                                          <p:attrName>style.visibility</p:attrName>
+                                        </p:attrNameLst>
+                                      </p:cBhvr>
+                                      <p:to>
+                                        <p:strVal val="visible"/>
+                                      </p:to>
+                                    </p:set>
+                                  </p:childTnLst>
+                                </p:cTn>
+                              </p:par>
+                              <p:par>
+                                <p:cTn id="37" presetID="1" presetClass="entr" presetSubtype="0" fill="hold" nodeType="withEffect">
+                                  <p:stCondLst>
+                                    <p:cond delay="0"/>
+                                  </p:stCondLst>
+                                  <p:childTnLst>
+                                    <p:set>
+                                      <p:cBhvr>
+                                        <p:cTn id="38" dur="1" fill="hold">
+                                          <p:stCondLst>
+                                            <p:cond delay="0"/>
+                                          </p:stCondLst>
+                                        </p:cTn>
+                                        <p:tgtEl>
+                                          <p:spTgt spid="3">
+                                            <p:txEl>
+                                              <p:pRg st="14" end="14"/>
+                                            </p:txEl>
+                                          </p:spTgt>
+                                        </p:tgtEl>
+                                        <p:attrNameLst>
+                                          <p:attrName>style.visibility</p:attrName>
+                                        </p:attrNameLst>
+                                      </p:cBhvr>
+                                      <p:to>
+                                        <p:strVal val="visible"/>
+                                      </p:to>
+                                    </p:set>
+                                  </p:childTnLst>
+                                </p:cTn>
+                              </p:par>
+                              <p:par>
+                                <p:cTn id="39" presetID="1" presetClass="entr" presetSubtype="0" fill="hold" nodeType="withEffect">
+                                  <p:stCondLst>
+                                    <p:cond delay="0"/>
+                                  </p:stCondLst>
+                                  <p:childTnLst>
+                                    <p:set>
+                                      <p:cBhvr>
+                                        <p:cTn id="40" dur="1" fill="hold">
+                                          <p:stCondLst>
+                                            <p:cond delay="0"/>
+                                          </p:stCondLst>
+                                        </p:cTn>
+                                        <p:tgtEl>
+                                          <p:spTgt spid="3">
+                                            <p:txEl>
+                                              <p:pRg st="15" end="15"/>
+                                            </p:txEl>
+                                          </p:spTgt>
+                                        </p:tgtEl>
+                                        <p:attrNameLst>
+                                          <p:attrName>style.visibility</p:attrName>
+                                        </p:attrNameLst>
+                                      </p:cBhvr>
+                                      <p:to>
+                                        <p:strVal val="visible"/>
+                                      </p:to>
+                                    </p:set>
+                                  </p:childTnLst>
+                                </p:cTn>
+                              </p:par>
+                              <p:par>
+                                <p:cTn id="41" presetID="1" presetClass="entr" presetSubtype="0" fill="hold" nodeType="withEffect">
+                                  <p:stCondLst>
+                                    <p:cond delay="0"/>
+                                  </p:stCondLst>
+                                  <p:childTnLst>
+                                    <p:set>
+                                      <p:cBhvr>
+                                        <p:cTn id="42" dur="1" fill="hold">
+                                          <p:stCondLst>
+                                            <p:cond delay="0"/>
+                                          </p:stCondLst>
+                                        </p:cTn>
+                                        <p:tgtEl>
+                                          <p:spTgt spid="3">
+                                            <p:txEl>
+                                              <p:pRg st="16" end="16"/>
+                                            </p:txEl>
+                                          </p:spTgt>
+                                        </p:tgtEl>
+                                        <p:attrNameLst>
+                                          <p:attrName>style.visibility</p:attrName>
+                                        </p:attrNameLst>
+                                      </p:cBhvr>
+                                      <p:to>
+                                        <p:strVal val="visible"/>
+                                      </p:to>
+                                    </p:set>
+                                  </p:childTnLst>
+                                </p:cTn>
+                              </p:par>
+                              <p:par>
+                                <p:cTn id="43" presetID="1" presetClass="entr" presetSubtype="0" fill="hold" nodeType="withEffect">
+                                  <p:stCondLst>
+                                    <p:cond delay="0"/>
+                                  </p:stCondLst>
+                                  <p:childTnLst>
+                                    <p:set>
+                                      <p:cBhvr>
+                                        <p:cTn id="44" dur="1" fill="hold">
+                                          <p:stCondLst>
+                                            <p:cond delay="0"/>
+                                          </p:stCondLst>
+                                        </p:cTn>
+                                        <p:tgtEl>
+                                          <p:spTgt spid="3">
+                                            <p:txEl>
+                                              <p:pRg st="17" end="17"/>
+                                            </p:txEl>
+                                          </p:spTgt>
+                                        </p:tgtEl>
+                                        <p:attrNameLst>
+                                          <p:attrName>style.visibility</p:attrName>
+                                        </p:attrNameLst>
+                                      </p:cBhvr>
+                                      <p:to>
+                                        <p:strVal val="visible"/>
+                                      </p:to>
+                                    </p:set>
+                                  </p:childTnLst>
+                                </p:cTn>
+                              </p:par>
+                              <p:par>
+                                <p:cTn id="45" presetID="1" presetClass="entr" presetSubtype="0" fill="hold" nodeType="withEffect">
+                                  <p:stCondLst>
+                                    <p:cond delay="0"/>
+                                  </p:stCondLst>
+                                  <p:childTnLst>
+                                    <p:set>
+                                      <p:cBhvr>
+                                        <p:cTn id="46" dur="1" fill="hold">
+                                          <p:stCondLst>
+                                            <p:cond delay="0"/>
+                                          </p:stCondLst>
+                                        </p:cTn>
+                                        <p:tgtEl>
+                                          <p:spTgt spid="3">
+                                            <p:txEl>
+                                              <p:pRg st="18" end="18"/>
+                                            </p:txEl>
+                                          </p:spTgt>
+                                        </p:tgtEl>
+                                        <p:attrNameLst>
+                                          <p:attrName>style.visibility</p:attrName>
+                                        </p:attrNameLst>
+                                      </p:cBhvr>
+                                      <p:to>
+                                        <p:strVal val="visible"/>
+                                      </p:to>
+                                    </p:set>
+                                  </p:childTnLst>
+                                </p:cTn>
+                              </p:par>
+                              <p:par>
+                                <p:cTn id="47" presetID="1" presetClass="entr" presetSubtype="0" fill="hold" nodeType="withEffect">
+                                  <p:stCondLst>
+                                    <p:cond delay="0"/>
+                                  </p:stCondLst>
+                                  <p:childTnLst>
+                                    <p:set>
+                                      <p:cBhvr>
+                                        <p:cTn id="48" dur="1" fill="hold">
+                                          <p:stCondLst>
+                                            <p:cond delay="0"/>
+                                          </p:stCondLst>
+                                        </p:cTn>
+                                        <p:tgtEl>
+                                          <p:spTgt spid="3">
+                                            <p:txEl>
+                                              <p:pRg st="19" end="19"/>
+                                            </p:txEl>
+                                          </p:spTgt>
+                                        </p:tgtEl>
+                                        <p:attrNameLst>
+                                          <p:attrName>style.visibility</p:attrName>
+                                        </p:attrNameLst>
+                                      </p:cBhvr>
+                                      <p:to>
+                                        <p:strVal val="visible"/>
+                                      </p:to>
+                                    </p:set>
+                                  </p:childTnLst>
+                                </p:cTn>
+                              </p:par>
+                              <p:par>
+                                <p:cTn id="49" presetID="1" presetClass="entr" presetSubtype="0" fill="hold" nodeType="withEffect">
+                                  <p:stCondLst>
+                                    <p:cond delay="0"/>
+                                  </p:stCondLst>
+                                  <p:childTnLst>
+                                    <p:set>
+                                      <p:cBhvr>
+                                        <p:cTn id="50" dur="1" fill="hold">
+                                          <p:stCondLst>
+                                            <p:cond delay="0"/>
+                                          </p:stCondLst>
+                                        </p:cTn>
+                                        <p:tgtEl>
+                                          <p:spTgt spid="3">
+                                            <p:txEl>
+                                              <p:pRg st="20" end="20"/>
+                                            </p:txEl>
+                                          </p:spTgt>
+                                        </p:tgtEl>
+                                        <p:attrNameLst>
+                                          <p:attrName>style.visibility</p:attrName>
+                                        </p:attrNameLst>
+                                      </p:cBhvr>
+                                      <p:to>
+                                        <p:strVal val="visible"/>
+                                      </p:to>
+                                    </p:set>
+                                  </p:childTnLst>
+                                </p:cTn>
+                              </p:par>
+                              <p:par>
+                                <p:cTn id="51" presetID="1" presetClass="entr" presetSubtype="0" fill="hold" nodeType="withEffect">
+                                  <p:stCondLst>
+                                    <p:cond delay="0"/>
+                                  </p:stCondLst>
+                                  <p:childTnLst>
+                                    <p:set>
+                                      <p:cBhvr>
+                                        <p:cTn id="52" dur="1" fill="hold">
+                                          <p:stCondLst>
+                                            <p:cond delay="0"/>
+                                          </p:stCondLst>
+                                        </p:cTn>
+                                        <p:tgtEl>
+                                          <p:spTgt spid="3">
+                                            <p:txEl>
+                                              <p:pRg st="21" end="21"/>
+                                            </p:txEl>
+                                          </p:spTgt>
+                                        </p:tgtEl>
+                                        <p:attrNameLst>
+                                          <p:attrName>style.visibility</p:attrName>
+                                        </p:attrNameLst>
+                                      </p:cBhvr>
+                                      <p:to>
+                                        <p:strVal val="visible"/>
+                                      </p:to>
+                                    </p:set>
+                                  </p:childTnLst>
+                                </p:cTn>
+                              </p:par>
+                              <p:par>
+                                <p:cTn id="53" presetID="1" presetClass="entr" presetSubtype="0" fill="hold" nodeType="withEffect">
+                                  <p:stCondLst>
+                                    <p:cond delay="0"/>
+                                  </p:stCondLst>
+                                  <p:childTnLst>
+                                    <p:set>
+                                      <p:cBhvr>
+                                        <p:cTn id="54" dur="1" fill="hold">
+                                          <p:stCondLst>
+                                            <p:cond delay="0"/>
+                                          </p:stCondLst>
+                                        </p:cTn>
+                                        <p:tgtEl>
+                                          <p:spTgt spid="3">
+                                            <p:txEl>
+                                              <p:pRg st="22" end="22"/>
+                                            </p:txEl>
+                                          </p:spTgt>
+                                        </p:tgtEl>
+                                        <p:attrNameLst>
+                                          <p:attrName>style.visibility</p:attrName>
+                                        </p:attrNameLst>
+                                      </p:cBhvr>
+                                      <p:to>
+                                        <p:strVal val="visible"/>
+                                      </p:to>
+                                    </p:set>
+                                  </p:childTnLst>
+                                </p:cTn>
+                              </p:par>
+                              <p:par>
+                                <p:cTn id="55" presetID="1" presetClass="entr" presetSubtype="0" fill="hold" nodeType="withEffect">
+                                  <p:stCondLst>
+                                    <p:cond delay="0"/>
+                                  </p:stCondLst>
+                                  <p:childTnLst>
+                                    <p:set>
+                                      <p:cBhvr>
+                                        <p:cTn id="56" dur="1" fill="hold">
+                                          <p:stCondLst>
+                                            <p:cond delay="0"/>
+                                          </p:stCondLst>
+                                        </p:cTn>
+                                        <p:tgtEl>
+                                          <p:spTgt spid="3">
+                                            <p:txEl>
+                                              <p:pRg st="23" end="23"/>
+                                            </p:txEl>
+                                          </p:spTgt>
+                                        </p:tgtEl>
+                                        <p:attrNameLst>
+                                          <p:attrName>style.visibility</p:attrName>
+                                        </p:attrNameLst>
+                                      </p:cBhvr>
+                                      <p:to>
+                                        <p:strVal val="visible"/>
+                                      </p:to>
+                                    </p:set>
+                                  </p:childTnLst>
+                                </p:cTn>
+                              </p:par>
+                              <p:par>
+                                <p:cTn id="57" presetID="1" presetClass="entr" presetSubtype="0" fill="hold" nodeType="withEffect">
+                                  <p:stCondLst>
+                                    <p:cond delay="0"/>
+                                  </p:stCondLst>
+                                  <p:childTnLst>
+                                    <p:set>
+                                      <p:cBhvr>
+                                        <p:cTn id="58" dur="1" fill="hold">
+                                          <p:stCondLst>
+                                            <p:cond delay="0"/>
+                                          </p:stCondLst>
+                                        </p:cTn>
+                                        <p:tgtEl>
+                                          <p:spTgt spid="3">
+                                            <p:txEl>
+                                              <p:pRg st="24" end="24"/>
+                                            </p:txEl>
+                                          </p:spTgt>
+                                        </p:tgtEl>
+                                        <p:attrNameLst>
+                                          <p:attrName>style.visibility</p:attrName>
+                                        </p:attrNameLst>
+                                      </p:cBhvr>
+                                      <p:to>
+                                        <p:strVal val="visible"/>
+                                      </p:to>
+                                    </p:set>
+                                  </p:childTnLst>
+                                </p:cTn>
+                              </p:par>
+                            </p:childTnLst>
+                          </p:cTn>
+                        </p:par>
+                      </p:childTnLst>
+                    </p:cTn>
+                  </p:par>
+                </p:childTnLst>
+              </p:cTn>
+              <p:prevCondLst>
+                <p:cond evt="onPrev" delay="0">
+                  <p:tgtEl>
+                    <p:sldTgt/>
+                  </p:tgtEl>
+                </p:cond>
+              </p:prevCondLst>
+              <p:nextCondLst>
+                <p:cond evt="onNext" delay="0">
+                  <p:tgtEl>
+                    <p:sldTgt/>
+                  </p:tgtEl>
+                </p:cond>
+              </p:nextCondLst>
+            </p:seq>
+          </p:childTnLst>
+        </p:cTn>
+      </p:par>
+    </p:tnLst>
+    <p:bldLst>
+      <p:bldP spid="3" grpId="0" animBg="1"/>
+    </p:bldLst>
+  </p:timing>
 </p:sld>
 </file>
 
@@ -8949,370 +11045,6 @@
   <p:cSld>
     <p:spTree>
       <p:nvGrpSpPr>
-        <p:cNvPr id="1" name=""/>
-        <p:cNvGrpSpPr/>
-        <p:nvPr/>
-      </p:nvGrpSpPr>
-      <p:grpSpPr>
-        <a:xfrm>
-          <a:off x="0" y="0"/>
-          <a:ext cx="0" cy="0"/>
-          <a:chOff x="0" y="0"/>
-          <a:chExt cx="0" cy="0"/>
-        </a:xfrm>
-      </p:grpSpPr>
-      <p:sp>
-        <p:nvSpPr>
-          <p:cNvPr id="2" name="Title 1">
-            <a:extLst>
-              <a:ext uri="{FF2B5EF4-FFF2-40B4-BE49-F238E27FC236}">
-                <a16:creationId xmlns:a16="http://schemas.microsoft.com/office/drawing/2014/main" id="{2D4111F7-1CA3-4B19-CDDE-D6C79482A43F}"/>
-              </a:ext>
-            </a:extLst>
-          </p:cNvPr>
-          <p:cNvSpPr>
-            <a:spLocks noGrp="1"/>
-          </p:cNvSpPr>
-          <p:nvPr>
-            <p:ph type="title"/>
-          </p:nvPr>
-        </p:nvSpPr>
-        <p:spPr>
-          <a:xfrm>
-            <a:off x="605117" y="208244"/>
-            <a:ext cx="10515600" cy="459628"/>
-          </a:xfrm>
-        </p:spPr>
-        <p:txBody>
-          <a:bodyPr>
-            <a:noAutofit/>
-          </a:bodyPr>
-          <a:lstStyle/>
-          <a:p>
-            <a:r>
-              <a:rPr lang="en-IN" sz="3600" dirty="0"/>
-              <a:t>Example Dependency Checks</a:t>
-            </a:r>
-          </a:p>
-        </p:txBody>
-      </p:sp>
-      <p:pic>
-        <p:nvPicPr>
-          <p:cNvPr id="4" name="Picture 3">
-            <a:extLst>
-              <a:ext uri="{FF2B5EF4-FFF2-40B4-BE49-F238E27FC236}">
-                <a16:creationId xmlns:a16="http://schemas.microsoft.com/office/drawing/2014/main" id="{C0EDC479-D8A8-35AA-A567-BCEA6D02DD24}"/>
-              </a:ext>
-            </a:extLst>
-          </p:cNvPr>
-          <p:cNvPicPr>
-            <a:picLocks noChangeAspect="1"/>
-          </p:cNvPicPr>
-          <p:nvPr/>
-        </p:nvPicPr>
-        <p:blipFill>
-          <a:blip r:embed="rId2"/>
-          <a:stretch>
-            <a:fillRect/>
-          </a:stretch>
-        </p:blipFill>
-        <p:spPr>
-          <a:xfrm>
-            <a:off x="448237" y="910365"/>
-            <a:ext cx="3213846" cy="1337089"/>
-          </a:xfrm>
-          <a:prstGeom prst="rect">
-            <a:avLst/>
-          </a:prstGeom>
-        </p:spPr>
-      </p:pic>
-      <p:pic>
-        <p:nvPicPr>
-          <p:cNvPr id="5" name="Picture 4">
-            <a:extLst>
-              <a:ext uri="{FF2B5EF4-FFF2-40B4-BE49-F238E27FC236}">
-                <a16:creationId xmlns:a16="http://schemas.microsoft.com/office/drawing/2014/main" id="{78F425FA-180F-7FBB-A08B-3C96A2D8F4A6}"/>
-              </a:ext>
-            </a:extLst>
-          </p:cNvPr>
-          <p:cNvPicPr>
-            <a:picLocks noChangeAspect="1"/>
-          </p:cNvPicPr>
-          <p:nvPr/>
-        </p:nvPicPr>
-        <p:blipFill>
-          <a:blip r:embed="rId3"/>
-          <a:stretch>
-            <a:fillRect/>
-          </a:stretch>
-        </p:blipFill>
-        <p:spPr>
-          <a:xfrm>
-            <a:off x="4397189" y="910365"/>
-            <a:ext cx="2398406" cy="2065917"/>
-          </a:xfrm>
-          <a:prstGeom prst="rect">
-            <a:avLst/>
-          </a:prstGeom>
-          <a:ln>
-            <a:solidFill>
-              <a:schemeClr val="accent1">
-                <a:shade val="15000"/>
-              </a:schemeClr>
-            </a:solidFill>
-          </a:ln>
-        </p:spPr>
-      </p:pic>
-      <p:pic>
-        <p:nvPicPr>
-          <p:cNvPr id="7" name="Picture 6">
-            <a:extLst>
-              <a:ext uri="{FF2B5EF4-FFF2-40B4-BE49-F238E27FC236}">
-                <a16:creationId xmlns:a16="http://schemas.microsoft.com/office/drawing/2014/main" id="{7B12F681-E557-0B7C-8D28-ABF2995CEC44}"/>
-              </a:ext>
-            </a:extLst>
-          </p:cNvPr>
-          <p:cNvPicPr>
-            <a:picLocks noChangeAspect="1"/>
-          </p:cNvPicPr>
-          <p:nvPr/>
-        </p:nvPicPr>
-        <p:blipFill>
-          <a:blip r:embed="rId4"/>
-          <a:stretch>
-            <a:fillRect/>
-          </a:stretch>
-        </p:blipFill>
-        <p:spPr>
-          <a:xfrm>
-            <a:off x="4397188" y="3428999"/>
-            <a:ext cx="2398405" cy="1979915"/>
-          </a:xfrm>
-          <a:prstGeom prst="rect">
-            <a:avLst/>
-          </a:prstGeom>
-          <a:ln>
-            <a:solidFill>
-              <a:schemeClr val="accent1">
-                <a:shade val="15000"/>
-              </a:schemeClr>
-            </a:solidFill>
-          </a:ln>
-        </p:spPr>
-      </p:pic>
-      <p:pic>
-        <p:nvPicPr>
-          <p:cNvPr id="9" name="Picture 8">
-            <a:extLst>
-              <a:ext uri="{FF2B5EF4-FFF2-40B4-BE49-F238E27FC236}">
-                <a16:creationId xmlns:a16="http://schemas.microsoft.com/office/drawing/2014/main" id="{727D5D4C-CA1B-AAB6-3EBA-BA7DC25CD661}"/>
-              </a:ext>
-            </a:extLst>
-          </p:cNvPr>
-          <p:cNvPicPr>
-            <a:picLocks noChangeAspect="1"/>
-          </p:cNvPicPr>
-          <p:nvPr/>
-        </p:nvPicPr>
-        <p:blipFill>
-          <a:blip r:embed="rId5"/>
-          <a:stretch>
-            <a:fillRect/>
-          </a:stretch>
-        </p:blipFill>
-        <p:spPr>
-          <a:xfrm>
-            <a:off x="448237" y="3428999"/>
-            <a:ext cx="3213846" cy="1330401"/>
-          </a:xfrm>
-          <a:prstGeom prst="rect">
-            <a:avLst/>
-          </a:prstGeom>
-        </p:spPr>
-      </p:pic>
-      <p:sp>
-        <p:nvSpPr>
-          <p:cNvPr id="10" name="Rectangle 9">
-            <a:extLst>
-              <a:ext uri="{FF2B5EF4-FFF2-40B4-BE49-F238E27FC236}">
-                <a16:creationId xmlns:a16="http://schemas.microsoft.com/office/drawing/2014/main" id="{8C437368-86CE-D513-6EB4-CE1E10D3766F}"/>
-              </a:ext>
-            </a:extLst>
-          </p:cNvPr>
-          <p:cNvSpPr/>
-          <p:nvPr/>
-        </p:nvSpPr>
-        <p:spPr>
-          <a:xfrm>
-            <a:off x="7721339" y="910365"/>
-            <a:ext cx="3054237" cy="389124"/>
-          </a:xfrm>
-          <a:prstGeom prst="rect">
-            <a:avLst/>
-          </a:prstGeom>
-        </p:spPr>
-        <p:style>
-          <a:lnRef idx="2">
-            <a:schemeClr val="accent1">
-              <a:shade val="15000"/>
-            </a:schemeClr>
-          </a:lnRef>
-          <a:fillRef idx="1">
-            <a:schemeClr val="accent1"/>
-          </a:fillRef>
-          <a:effectRef idx="0">
-            <a:schemeClr val="accent1"/>
-          </a:effectRef>
-          <a:fontRef idx="minor">
-            <a:schemeClr val="lt1"/>
-          </a:fontRef>
-        </p:style>
-        <p:txBody>
-          <a:bodyPr rtlCol="0" anchor="t"/>
-          <a:lstStyle/>
-          <a:p>
-            <a:pPr>
-              <a:lnSpc>
-                <a:spcPct val="150000"/>
-              </a:lnSpc>
-            </a:pPr>
-            <a:r>
-              <a:rPr lang="en-US" sz="1200" dirty="0"/>
-              <a:t>✅ Pass – No Unexpected Dependencies</a:t>
-            </a:r>
-          </a:p>
-        </p:txBody>
-      </p:sp>
-      <p:sp>
-        <p:nvSpPr>
-          <p:cNvPr id="11" name="Rectangle 10">
-            <a:extLst>
-              <a:ext uri="{FF2B5EF4-FFF2-40B4-BE49-F238E27FC236}">
-                <a16:creationId xmlns:a16="http://schemas.microsoft.com/office/drawing/2014/main" id="{75C904AF-37AA-AD3D-494D-9BD0E1CEE81F}"/>
-              </a:ext>
-            </a:extLst>
-          </p:cNvPr>
-          <p:cNvSpPr/>
-          <p:nvPr/>
-        </p:nvSpPr>
-        <p:spPr>
-          <a:xfrm>
-            <a:off x="7721340" y="3428999"/>
-            <a:ext cx="3054237" cy="1438836"/>
-          </a:xfrm>
-          <a:prstGeom prst="rect">
-            <a:avLst/>
-          </a:prstGeom>
-        </p:spPr>
-        <p:style>
-          <a:lnRef idx="2">
-            <a:schemeClr val="accent1">
-              <a:shade val="15000"/>
-            </a:schemeClr>
-          </a:lnRef>
-          <a:fillRef idx="1">
-            <a:schemeClr val="accent1"/>
-          </a:fillRef>
-          <a:effectRef idx="0">
-            <a:schemeClr val="accent1"/>
-          </a:effectRef>
-          <a:fontRef idx="minor">
-            <a:schemeClr val="lt1"/>
-          </a:fontRef>
-        </p:style>
-        <p:txBody>
-          <a:bodyPr rtlCol="0" anchor="t"/>
-          <a:lstStyle/>
-          <a:p>
-            <a:pPr>
-              <a:lnSpc>
-                <a:spcPct val="150000"/>
-              </a:lnSpc>
-            </a:pPr>
-            <a:r>
-              <a:rPr lang="en-IN" sz="1200" dirty="0"/>
-              <a:t>❌</a:t>
-            </a:r>
-            <a:r>
-              <a:rPr lang="en-US" sz="1200" dirty="0"/>
-              <a:t> 1 Unexpected Dependency Found</a:t>
-            </a:r>
-          </a:p>
-          <a:p>
-            <a:pPr>
-              <a:lnSpc>
-                <a:spcPct val="150000"/>
-              </a:lnSpc>
-            </a:pPr>
-            <a:r>
-              <a:rPr lang="en-US" sz="1200" dirty="0"/>
-              <a:t>       </a:t>
-            </a:r>
-            <a:r>
-              <a:rPr lang="en-US" sz="1200" dirty="0" err="1"/>
-              <a:t>ACComm.lvlib</a:t>
-            </a:r>
-            <a:endParaRPr lang="en-US" sz="1200" dirty="0"/>
-          </a:p>
-          <a:p>
-            <a:pPr>
-              <a:lnSpc>
-                <a:spcPct val="150000"/>
-              </a:lnSpc>
-            </a:pPr>
-            <a:r>
-              <a:rPr lang="en-IN" sz="1200" dirty="0"/>
-              <a:t>❌</a:t>
-            </a:r>
-            <a:r>
-              <a:rPr lang="en-US" sz="1200" dirty="0"/>
-              <a:t> 1 Expected Dependency Missing</a:t>
-            </a:r>
-          </a:p>
-          <a:p>
-            <a:pPr>
-              <a:lnSpc>
-                <a:spcPct val="150000"/>
-              </a:lnSpc>
-            </a:pPr>
-            <a:r>
-              <a:rPr lang="en-US" sz="1200" dirty="0"/>
-              <a:t>       </a:t>
-            </a:r>
-            <a:r>
-              <a:rPr lang="en-US" sz="1200" dirty="0" err="1"/>
-              <a:t>FileUtilities.lvlib</a:t>
-            </a:r>
-            <a:endParaRPr lang="en-US" sz="1200" dirty="0"/>
-          </a:p>
-          <a:p>
-            <a:pPr>
-              <a:lnSpc>
-                <a:spcPct val="150000"/>
-              </a:lnSpc>
-            </a:pPr>
-            <a:endParaRPr lang="en-US" sz="1200" dirty="0"/>
-          </a:p>
-        </p:txBody>
-      </p:sp>
-    </p:spTree>
-    <p:extLst>
-      <p:ext uri="{BB962C8B-B14F-4D97-AF65-F5344CB8AC3E}">
-        <p14:creationId xmlns:p14="http://schemas.microsoft.com/office/powerpoint/2010/main" val="4287171696"/>
-      </p:ext>
-    </p:extLst>
-  </p:cSld>
-  <p:clrMapOvr>
-    <a:masterClrMapping/>
-  </p:clrMapOvr>
-</p:sld>
-</file>
-
-<file path=ppt/slides/slide18.xml><?xml version="1.0" encoding="utf-8"?>
-<p:sld xmlns:a="http://schemas.openxmlformats.org/drawingml/2006/main" xmlns:r="http://schemas.openxmlformats.org/officeDocument/2006/relationships" xmlns:p="http://schemas.openxmlformats.org/presentationml/2006/main">
-  <p:cSld>
-    <p:spTree>
-      <p:nvGrpSpPr>
         <p:cNvPr id="1" name="">
           <a:extLst>
             <a:ext uri="{FF2B5EF4-FFF2-40B4-BE49-F238E27FC236}">
@@ -9384,13 +11116,13 @@
         </p:nvSpPr>
         <p:spPr>
           <a:xfrm>
-            <a:off x="838200" y="1184115"/>
-            <a:ext cx="10515600" cy="4992848"/>
+            <a:off x="836776" y="1010934"/>
+            <a:ext cx="10162309" cy="4032121"/>
           </a:xfrm>
         </p:spPr>
         <p:txBody>
           <a:bodyPr vert="horz" lIns="91440" tIns="45720" rIns="91440" bIns="45720" rtlCol="0" anchor="t">
-            <a:normAutofit fontScale="92500" lnSpcReduction="10000"/>
+            <a:normAutofit fontScale="62500" lnSpcReduction="20000"/>
           </a:bodyPr>
           <a:lstStyle/>
           <a:p>
@@ -9401,7 +11133,7 @@
             </a:pPr>
             <a:r>
               <a:rPr lang="en-US" dirty="0"/>
-              <a:t>Setting up expected dependencies (.deps) file</a:t>
+              <a:t>Setting up dependency monitoring files - expected dependencies (.deps) file and project files for each library.</a:t>
             </a:r>
           </a:p>
           <a:p>
@@ -9412,7 +11144,7 @@
             </a:pPr>
             <a:r>
               <a:rPr lang="en-US" dirty="0"/>
-              <a:t>List of Automated tools available to implement the checks in CI Pipeline and to assist in the initial setup.</a:t>
+              <a:t>List of tools used in CI Pipeline and CI Pipeline YAML walkthrough.</a:t>
             </a:r>
           </a:p>
           <a:p>
@@ -9423,7 +11155,7 @@
             </a:pPr>
             <a:r>
               <a:rPr lang="en-US" dirty="0"/>
-              <a:t>How to Manually trigger the dependencies check.</a:t>
+              <a:t>Manually running the dependencies check without CI Pipeline.</a:t>
             </a:r>
           </a:p>
           <a:p>
@@ -9434,7 +11166,18 @@
             </a:pPr>
             <a:r>
               <a:rPr lang="en-US" dirty="0"/>
-              <a:t>CI Pipeline YAML for Automated triggering of the dependencies check</a:t>
+              <a:t>Triggering the CI Pipeline for each Pull Request. </a:t>
+            </a:r>
+          </a:p>
+          <a:p>
+            <a:pPr>
+              <a:lnSpc>
+                <a:spcPct val="150000"/>
+              </a:lnSpc>
+            </a:pPr>
+            <a:r>
+              <a:rPr lang="en-US" dirty="0"/>
+              <a:t>Everyday Scheduled Automated Check on whole repository.</a:t>
             </a:r>
           </a:p>
           <a:p>
@@ -9475,6 +11218,81 @@
               <a:t>For performing the circular dependencies check.</a:t>
             </a:r>
             <a:endParaRPr lang="en-US" sz="2800" dirty="0"/>
+          </a:p>
+        </p:txBody>
+      </p:sp>
+      <p:sp>
+        <p:nvSpPr>
+          <p:cNvPr id="3" name="TextBox 2">
+            <a:extLst>
+              <a:ext uri="{FF2B5EF4-FFF2-40B4-BE49-F238E27FC236}">
+                <a16:creationId xmlns:a16="http://schemas.microsoft.com/office/drawing/2014/main" id="{6C6B05A9-DEBA-3667-EED6-02A60B6451FB}"/>
+              </a:ext>
+            </a:extLst>
+          </p:cNvPr>
+          <p:cNvSpPr txBox="1"/>
+          <p:nvPr/>
+        </p:nvSpPr>
+        <p:spPr>
+          <a:xfrm>
+            <a:off x="922750" y="5043055"/>
+            <a:ext cx="10432474" cy="1615827"/>
+          </a:xfrm>
+          <a:prstGeom prst="rect">
+            <a:avLst/>
+          </a:prstGeom>
+          <a:noFill/>
+        </p:spPr>
+        <p:txBody>
+          <a:bodyPr wrap="square" rtlCol="0">
+            <a:spAutoFit/>
+          </a:bodyPr>
+          <a:lstStyle/>
+          <a:p>
+            <a:pPr>
+              <a:lnSpc>
+                <a:spcPct val="150000"/>
+              </a:lnSpc>
+            </a:pPr>
+            <a:r>
+              <a:rPr lang="en-IN" b="1" dirty="0"/>
+              <a:t>Reference Links</a:t>
+            </a:r>
+          </a:p>
+          <a:p>
+            <a:pPr marL="342900" indent="-342900">
+              <a:lnSpc>
+                <a:spcPct val="150000"/>
+              </a:lnSpc>
+              <a:buFont typeface="Arial" panose="020B0604020202020204" pitchFamily="34" charset="0"/>
+              <a:buChar char="•"/>
+            </a:pPr>
+            <a:r>
+              <a:rPr lang="en-IN" dirty="0"/>
+              <a:t>Repository with the Dependency monitoring setup</a:t>
+            </a:r>
+          </a:p>
+          <a:p>
+            <a:pPr marL="800100" lvl="1" indent="-342900">
+              <a:lnSpc>
+                <a:spcPct val="150000"/>
+              </a:lnSpc>
+              <a:buFont typeface="Courier New" panose="02070309020205020404" pitchFamily="49" charset="0"/>
+              <a:buChar char="o"/>
+            </a:pPr>
+            <a:r>
+              <a:rPr lang="en-IN" dirty="0">
+                <a:hlinkClick r:id="rId2"/>
+              </a:rPr>
+              <a:t>https://github.com/karthickshanmugarao/sw-deps-monitor</a:t>
+            </a:r>
+            <a:endParaRPr lang="en-IN" dirty="0"/>
+          </a:p>
+          <a:p>
+            <a:pPr marL="342900" indent="-342900">
+              <a:buAutoNum type="arabicPeriod"/>
+            </a:pPr>
+            <a:endParaRPr lang="en-IN" dirty="0"/>
           </a:p>
         </p:txBody>
       </p:sp>
@@ -9491,7 +11309,1921 @@
 </p:sld>
 </file>
 
+<file path=ppt/slides/slide18.xml><?xml version="1.0" encoding="utf-8"?>
+<p:sld xmlns:a="http://schemas.openxmlformats.org/drawingml/2006/main" xmlns:r="http://schemas.openxmlformats.org/officeDocument/2006/relationships" xmlns:p="http://schemas.openxmlformats.org/presentationml/2006/main">
+  <p:cSld>
+    <p:spTree>
+      <p:nvGrpSpPr>
+        <p:cNvPr id="1" name="">
+          <a:extLst>
+            <a:ext uri="{FF2B5EF4-FFF2-40B4-BE49-F238E27FC236}">
+              <a16:creationId xmlns:a16="http://schemas.microsoft.com/office/drawing/2014/main" id="{A64E0593-1281-D250-4D5A-EC11F924A9F4}"/>
+            </a:ext>
+          </a:extLst>
+        </p:cNvPr>
+        <p:cNvGrpSpPr/>
+        <p:nvPr/>
+      </p:nvGrpSpPr>
+      <p:grpSpPr>
+        <a:xfrm>
+          <a:off x="0" y="0"/>
+          <a:ext cx="0" cy="0"/>
+          <a:chOff x="0" y="0"/>
+          <a:chExt cx="0" cy="0"/>
+        </a:xfrm>
+      </p:grpSpPr>
+      <p:sp>
+        <p:nvSpPr>
+          <p:cNvPr id="2" name="Title 1">
+            <a:extLst>
+              <a:ext uri="{FF2B5EF4-FFF2-40B4-BE49-F238E27FC236}">
+                <a16:creationId xmlns:a16="http://schemas.microsoft.com/office/drawing/2014/main" id="{8710C6B8-B221-B5BF-9AF0-26E6F520D168}"/>
+              </a:ext>
+            </a:extLst>
+          </p:cNvPr>
+          <p:cNvSpPr>
+            <a:spLocks noGrp="1"/>
+          </p:cNvSpPr>
+          <p:nvPr>
+            <p:ph type="title"/>
+          </p:nvPr>
+        </p:nvSpPr>
+        <p:spPr>
+          <a:xfrm>
+            <a:off x="660131" y="332361"/>
+            <a:ext cx="10515600" cy="942257"/>
+          </a:xfrm>
+        </p:spPr>
+        <p:txBody>
+          <a:bodyPr>
+            <a:normAutofit/>
+          </a:bodyPr>
+          <a:lstStyle/>
+          <a:p>
+            <a:r>
+              <a:rPr lang="en-IN" dirty="0"/>
+              <a:t>Demonstration – Initial Setup</a:t>
+            </a:r>
+          </a:p>
+        </p:txBody>
+      </p:sp>
+      <p:sp>
+        <p:nvSpPr>
+          <p:cNvPr id="4" name="Content Placeholder 3">
+            <a:extLst>
+              <a:ext uri="{FF2B5EF4-FFF2-40B4-BE49-F238E27FC236}">
+                <a16:creationId xmlns:a16="http://schemas.microsoft.com/office/drawing/2014/main" id="{8988B3B8-5B8A-EF8A-D21A-E355ECA0B539}"/>
+              </a:ext>
+            </a:extLst>
+          </p:cNvPr>
+          <p:cNvSpPr>
+            <a:spLocks noGrp="1"/>
+          </p:cNvSpPr>
+          <p:nvPr>
+            <p:ph idx="1"/>
+          </p:nvPr>
+        </p:nvSpPr>
+        <p:spPr>
+          <a:xfrm>
+            <a:off x="836776" y="1496291"/>
+            <a:ext cx="10162309" cy="4620491"/>
+          </a:xfrm>
+        </p:spPr>
+        <p:txBody>
+          <a:bodyPr vert="horz" lIns="91440" tIns="45720" rIns="91440" bIns="45720" rtlCol="0" anchor="t">
+            <a:normAutofit fontScale="92500" lnSpcReduction="10000"/>
+          </a:bodyPr>
+          <a:lstStyle/>
+          <a:p>
+            <a:pPr marL="800100" lvl="1" indent="-342900">
+              <a:lnSpc>
+                <a:spcPct val="150000"/>
+              </a:lnSpc>
+              <a:buAutoNum type="arabicPeriod"/>
+            </a:pPr>
+            <a:r>
+              <a:rPr lang="en-US" dirty="0"/>
+              <a:t>Prerequisites</a:t>
+            </a:r>
+          </a:p>
+          <a:p>
+            <a:pPr marL="1257300" lvl="2" indent="-342900">
+              <a:lnSpc>
+                <a:spcPct val="150000"/>
+              </a:lnSpc>
+              <a:buFont typeface="+mj-lt"/>
+              <a:buAutoNum type="alphaLcPeriod"/>
+            </a:pPr>
+            <a:r>
+              <a:rPr lang="en-US" sz="1800" dirty="0"/>
+              <a:t>LabVIEW 2023 Q3 or higher</a:t>
+            </a:r>
+          </a:p>
+          <a:p>
+            <a:pPr marL="1257300" lvl="2" indent="-342900">
+              <a:lnSpc>
+                <a:spcPct val="150000"/>
+              </a:lnSpc>
+              <a:buFont typeface="+mj-lt"/>
+              <a:buAutoNum type="alphaLcPeriod"/>
+            </a:pPr>
+            <a:r>
+              <a:rPr lang="en-US" sz="1800" dirty="0"/>
+              <a:t>Install the VIPM package dependencies by applying the VIPC available in the repository</a:t>
+            </a:r>
+          </a:p>
+          <a:p>
+            <a:pPr marL="1771650" lvl="3" indent="-400050">
+              <a:lnSpc>
+                <a:spcPct val="150000"/>
+              </a:lnSpc>
+              <a:buFont typeface="+mj-lt"/>
+              <a:buAutoNum type="romanLcPeriod"/>
+            </a:pPr>
+            <a:r>
+              <a:rPr lang="en-US" sz="1600" dirty="0" err="1"/>
+              <a:t>sw</a:t>
+            </a:r>
+            <a:r>
+              <a:rPr lang="en-US" sz="1600" dirty="0"/>
+              <a:t>-deps-monitor\CICD/VIPC</a:t>
+            </a:r>
+          </a:p>
+          <a:p>
+            <a:pPr marL="1257300" lvl="2" indent="-342900">
+              <a:lnSpc>
+                <a:spcPct val="150000"/>
+              </a:lnSpc>
+              <a:buFont typeface="+mj-lt"/>
+              <a:buAutoNum type="alphaLcPeriod"/>
+            </a:pPr>
+            <a:r>
+              <a:rPr lang="en-US" sz="1800" dirty="0" err="1"/>
+              <a:t>uv</a:t>
+            </a:r>
+            <a:r>
+              <a:rPr lang="en-US" sz="1800" dirty="0"/>
+              <a:t> for python</a:t>
+            </a:r>
+          </a:p>
+          <a:p>
+            <a:pPr marL="800100" lvl="1" indent="-342900">
+              <a:lnSpc>
+                <a:spcPct val="150000"/>
+              </a:lnSpc>
+              <a:buFont typeface="+mj-lt"/>
+              <a:buAutoNum type="arabicPeriod"/>
+            </a:pPr>
+            <a:r>
+              <a:rPr lang="en-US" sz="2200" dirty="0"/>
+              <a:t>Setting up the dependency monitoring files</a:t>
+            </a:r>
+          </a:p>
+          <a:p>
+            <a:pPr marL="1257300" lvl="2" indent="-342900">
+              <a:lnSpc>
+                <a:spcPct val="150000"/>
+              </a:lnSpc>
+              <a:buFont typeface="+mj-lt"/>
+              <a:buAutoNum type="alphaLcPeriod"/>
+            </a:pPr>
+            <a:r>
+              <a:rPr lang="en-US" sz="1800" dirty="0"/>
+              <a:t>Create .lvproj for each .</a:t>
+            </a:r>
+            <a:r>
+              <a:rPr lang="en-US" sz="1800" dirty="0" err="1"/>
+              <a:t>lvlib</a:t>
+            </a:r>
+            <a:endParaRPr lang="en-US" sz="1800" dirty="0"/>
+          </a:p>
+          <a:p>
+            <a:pPr marL="1257300" lvl="2" indent="-342900">
+              <a:lnSpc>
+                <a:spcPct val="150000"/>
+              </a:lnSpc>
+              <a:buFont typeface="+mj-lt"/>
+              <a:buAutoNum type="alphaLcPeriod"/>
+            </a:pPr>
+            <a:r>
+              <a:rPr lang="en-US" sz="1800" dirty="0"/>
+              <a:t>Create .deps file with expected dependencies defined for each .</a:t>
+            </a:r>
+            <a:r>
+              <a:rPr lang="en-US" sz="1800" dirty="0" err="1"/>
+              <a:t>lvlib</a:t>
+            </a:r>
+            <a:endParaRPr lang="en-US" sz="1800" dirty="0"/>
+          </a:p>
+          <a:p>
+            <a:pPr marL="1257300" lvl="2" indent="-342900">
+              <a:lnSpc>
+                <a:spcPct val="150000"/>
+              </a:lnSpc>
+              <a:buFont typeface="+mj-lt"/>
+              <a:buAutoNum type="alphaLcPeriod"/>
+            </a:pPr>
+            <a:r>
+              <a:rPr lang="en-US" sz="1800" dirty="0"/>
+              <a:t>Helper Tools available at </a:t>
+            </a:r>
+          </a:p>
+          <a:p>
+            <a:pPr marL="1771650" lvl="3" indent="-400050">
+              <a:lnSpc>
+                <a:spcPct val="150000"/>
+              </a:lnSpc>
+              <a:buFont typeface="+mj-lt"/>
+              <a:buAutoNum type="romanLcPeriod"/>
+            </a:pPr>
+            <a:r>
+              <a:rPr lang="en-US" sz="1600" dirty="0" err="1"/>
+              <a:t>sw</a:t>
+            </a:r>
+            <a:r>
+              <a:rPr lang="en-US" sz="1600" dirty="0"/>
+              <a:t>-deps-monitor/CICD/</a:t>
+            </a:r>
+            <a:r>
+              <a:rPr lang="en-US" sz="1600" dirty="0" err="1"/>
+              <a:t>DevTools</a:t>
+            </a:r>
+            <a:endParaRPr lang="en-US" sz="1600" dirty="0"/>
+          </a:p>
+          <a:p>
+            <a:pPr marL="1714500" lvl="3" indent="-342900">
+              <a:lnSpc>
+                <a:spcPct val="150000"/>
+              </a:lnSpc>
+              <a:buFont typeface="+mj-lt"/>
+              <a:buAutoNum type="romanLcPeriod"/>
+            </a:pPr>
+            <a:endParaRPr lang="en-US" sz="1600" dirty="0"/>
+          </a:p>
+        </p:txBody>
+      </p:sp>
+    </p:spTree>
+    <p:extLst>
+      <p:ext uri="{BB962C8B-B14F-4D97-AF65-F5344CB8AC3E}">
+        <p14:creationId xmlns:p14="http://schemas.microsoft.com/office/powerpoint/2010/main" val="2329298434"/>
+      </p:ext>
+    </p:extLst>
+  </p:cSld>
+  <p:clrMapOvr>
+    <a:masterClrMapping/>
+  </p:clrMapOvr>
+  <p:timing>
+    <p:tnLst>
+      <p:par>
+        <p:cTn id="1" dur="indefinite" restart="never" nodeType="tmRoot">
+          <p:childTnLst>
+            <p:seq concurrent="1" nextAc="seek">
+              <p:cTn id="2" dur="indefinite" nodeType="mainSeq">
+                <p:childTnLst>
+                  <p:par>
+                    <p:cTn id="3" fill="hold">
+                      <p:stCondLst>
+                        <p:cond delay="indefinite"/>
+                      </p:stCondLst>
+                      <p:childTnLst>
+                        <p:par>
+                          <p:cTn id="4" fill="hold">
+                            <p:stCondLst>
+                              <p:cond delay="0"/>
+                            </p:stCondLst>
+                            <p:childTnLst>
+                              <p:par>
+                                <p:cTn id="5" presetID="1" presetClass="entr" presetSubtype="0" fill="hold" nodeType="clickEffect">
+                                  <p:stCondLst>
+                                    <p:cond delay="0"/>
+                                  </p:stCondLst>
+                                  <p:childTnLst>
+                                    <p:set>
+                                      <p:cBhvr>
+                                        <p:cTn id="6" dur="1" fill="hold">
+                                          <p:stCondLst>
+                                            <p:cond delay="0"/>
+                                          </p:stCondLst>
+                                        </p:cTn>
+                                        <p:tgtEl>
+                                          <p:spTgt spid="4">
+                                            <p:txEl>
+                                              <p:pRg st="0" end="0"/>
+                                            </p:txEl>
+                                          </p:spTgt>
+                                        </p:tgtEl>
+                                        <p:attrNameLst>
+                                          <p:attrName>style.visibility</p:attrName>
+                                        </p:attrNameLst>
+                                      </p:cBhvr>
+                                      <p:to>
+                                        <p:strVal val="visible"/>
+                                      </p:to>
+                                    </p:set>
+                                  </p:childTnLst>
+                                </p:cTn>
+                              </p:par>
+                              <p:par>
+                                <p:cTn id="7" presetID="1" presetClass="entr" presetSubtype="0" fill="hold" nodeType="withEffect">
+                                  <p:stCondLst>
+                                    <p:cond delay="0"/>
+                                  </p:stCondLst>
+                                  <p:childTnLst>
+                                    <p:set>
+                                      <p:cBhvr>
+                                        <p:cTn id="8" dur="1" fill="hold">
+                                          <p:stCondLst>
+                                            <p:cond delay="0"/>
+                                          </p:stCondLst>
+                                        </p:cTn>
+                                        <p:tgtEl>
+                                          <p:spTgt spid="4">
+                                            <p:txEl>
+                                              <p:pRg st="1" end="1"/>
+                                            </p:txEl>
+                                          </p:spTgt>
+                                        </p:tgtEl>
+                                        <p:attrNameLst>
+                                          <p:attrName>style.visibility</p:attrName>
+                                        </p:attrNameLst>
+                                      </p:cBhvr>
+                                      <p:to>
+                                        <p:strVal val="visible"/>
+                                      </p:to>
+                                    </p:set>
+                                  </p:childTnLst>
+                                </p:cTn>
+                              </p:par>
+                              <p:par>
+                                <p:cTn id="9" presetID="1" presetClass="entr" presetSubtype="0" fill="hold" nodeType="withEffect">
+                                  <p:stCondLst>
+                                    <p:cond delay="0"/>
+                                  </p:stCondLst>
+                                  <p:childTnLst>
+                                    <p:set>
+                                      <p:cBhvr>
+                                        <p:cTn id="10" dur="1" fill="hold">
+                                          <p:stCondLst>
+                                            <p:cond delay="0"/>
+                                          </p:stCondLst>
+                                        </p:cTn>
+                                        <p:tgtEl>
+                                          <p:spTgt spid="4">
+                                            <p:txEl>
+                                              <p:pRg st="2" end="2"/>
+                                            </p:txEl>
+                                          </p:spTgt>
+                                        </p:tgtEl>
+                                        <p:attrNameLst>
+                                          <p:attrName>style.visibility</p:attrName>
+                                        </p:attrNameLst>
+                                      </p:cBhvr>
+                                      <p:to>
+                                        <p:strVal val="visible"/>
+                                      </p:to>
+                                    </p:set>
+                                  </p:childTnLst>
+                                </p:cTn>
+                              </p:par>
+                              <p:par>
+                                <p:cTn id="11" presetID="1" presetClass="entr" presetSubtype="0" fill="hold" nodeType="withEffect">
+                                  <p:stCondLst>
+                                    <p:cond delay="0"/>
+                                  </p:stCondLst>
+                                  <p:childTnLst>
+                                    <p:set>
+                                      <p:cBhvr>
+                                        <p:cTn id="12" dur="1" fill="hold">
+                                          <p:stCondLst>
+                                            <p:cond delay="0"/>
+                                          </p:stCondLst>
+                                        </p:cTn>
+                                        <p:tgtEl>
+                                          <p:spTgt spid="4">
+                                            <p:txEl>
+                                              <p:pRg st="3" end="3"/>
+                                            </p:txEl>
+                                          </p:spTgt>
+                                        </p:tgtEl>
+                                        <p:attrNameLst>
+                                          <p:attrName>style.visibility</p:attrName>
+                                        </p:attrNameLst>
+                                      </p:cBhvr>
+                                      <p:to>
+                                        <p:strVal val="visible"/>
+                                      </p:to>
+                                    </p:set>
+                                  </p:childTnLst>
+                                </p:cTn>
+                              </p:par>
+                              <p:par>
+                                <p:cTn id="13" presetID="1" presetClass="entr" presetSubtype="0" fill="hold" nodeType="withEffect">
+                                  <p:stCondLst>
+                                    <p:cond delay="0"/>
+                                  </p:stCondLst>
+                                  <p:childTnLst>
+                                    <p:set>
+                                      <p:cBhvr>
+                                        <p:cTn id="14" dur="1" fill="hold">
+                                          <p:stCondLst>
+                                            <p:cond delay="0"/>
+                                          </p:stCondLst>
+                                        </p:cTn>
+                                        <p:tgtEl>
+                                          <p:spTgt spid="4">
+                                            <p:txEl>
+                                              <p:pRg st="4" end="4"/>
+                                            </p:txEl>
+                                          </p:spTgt>
+                                        </p:tgtEl>
+                                        <p:attrNameLst>
+                                          <p:attrName>style.visibility</p:attrName>
+                                        </p:attrNameLst>
+                                      </p:cBhvr>
+                                      <p:to>
+                                        <p:strVal val="visible"/>
+                                      </p:to>
+                                    </p:set>
+                                  </p:childTnLst>
+                                </p:cTn>
+                              </p:par>
+                            </p:childTnLst>
+                          </p:cTn>
+                        </p:par>
+                      </p:childTnLst>
+                    </p:cTn>
+                  </p:par>
+                  <p:par>
+                    <p:cTn id="15" fill="hold">
+                      <p:stCondLst>
+                        <p:cond delay="indefinite"/>
+                      </p:stCondLst>
+                      <p:childTnLst>
+                        <p:par>
+                          <p:cTn id="16" fill="hold">
+                            <p:stCondLst>
+                              <p:cond delay="0"/>
+                            </p:stCondLst>
+                            <p:childTnLst>
+                              <p:par>
+                                <p:cTn id="17" presetID="1" presetClass="entr" presetSubtype="0" fill="hold" nodeType="clickEffect">
+                                  <p:stCondLst>
+                                    <p:cond delay="0"/>
+                                  </p:stCondLst>
+                                  <p:childTnLst>
+                                    <p:set>
+                                      <p:cBhvr>
+                                        <p:cTn id="18" dur="1" fill="hold">
+                                          <p:stCondLst>
+                                            <p:cond delay="0"/>
+                                          </p:stCondLst>
+                                        </p:cTn>
+                                        <p:tgtEl>
+                                          <p:spTgt spid="4">
+                                            <p:txEl>
+                                              <p:pRg st="5" end="5"/>
+                                            </p:txEl>
+                                          </p:spTgt>
+                                        </p:tgtEl>
+                                        <p:attrNameLst>
+                                          <p:attrName>style.visibility</p:attrName>
+                                        </p:attrNameLst>
+                                      </p:cBhvr>
+                                      <p:to>
+                                        <p:strVal val="visible"/>
+                                      </p:to>
+                                    </p:set>
+                                  </p:childTnLst>
+                                </p:cTn>
+                              </p:par>
+                              <p:par>
+                                <p:cTn id="19" presetID="1" presetClass="entr" presetSubtype="0" fill="hold" nodeType="withEffect">
+                                  <p:stCondLst>
+                                    <p:cond delay="0"/>
+                                  </p:stCondLst>
+                                  <p:childTnLst>
+                                    <p:set>
+                                      <p:cBhvr>
+                                        <p:cTn id="20" dur="1" fill="hold">
+                                          <p:stCondLst>
+                                            <p:cond delay="0"/>
+                                          </p:stCondLst>
+                                        </p:cTn>
+                                        <p:tgtEl>
+                                          <p:spTgt spid="4">
+                                            <p:txEl>
+                                              <p:pRg st="6" end="6"/>
+                                            </p:txEl>
+                                          </p:spTgt>
+                                        </p:tgtEl>
+                                        <p:attrNameLst>
+                                          <p:attrName>style.visibility</p:attrName>
+                                        </p:attrNameLst>
+                                      </p:cBhvr>
+                                      <p:to>
+                                        <p:strVal val="visible"/>
+                                      </p:to>
+                                    </p:set>
+                                  </p:childTnLst>
+                                </p:cTn>
+                              </p:par>
+                              <p:par>
+                                <p:cTn id="21" presetID="1" presetClass="entr" presetSubtype="0" fill="hold" nodeType="withEffect">
+                                  <p:stCondLst>
+                                    <p:cond delay="0"/>
+                                  </p:stCondLst>
+                                  <p:childTnLst>
+                                    <p:set>
+                                      <p:cBhvr>
+                                        <p:cTn id="22" dur="1" fill="hold">
+                                          <p:stCondLst>
+                                            <p:cond delay="0"/>
+                                          </p:stCondLst>
+                                        </p:cTn>
+                                        <p:tgtEl>
+                                          <p:spTgt spid="4">
+                                            <p:txEl>
+                                              <p:pRg st="7" end="7"/>
+                                            </p:txEl>
+                                          </p:spTgt>
+                                        </p:tgtEl>
+                                        <p:attrNameLst>
+                                          <p:attrName>style.visibility</p:attrName>
+                                        </p:attrNameLst>
+                                      </p:cBhvr>
+                                      <p:to>
+                                        <p:strVal val="visible"/>
+                                      </p:to>
+                                    </p:set>
+                                  </p:childTnLst>
+                                </p:cTn>
+                              </p:par>
+                              <p:par>
+                                <p:cTn id="23" presetID="1" presetClass="entr" presetSubtype="0" fill="hold" nodeType="withEffect">
+                                  <p:stCondLst>
+                                    <p:cond delay="0"/>
+                                  </p:stCondLst>
+                                  <p:childTnLst>
+                                    <p:set>
+                                      <p:cBhvr>
+                                        <p:cTn id="24" dur="1" fill="hold">
+                                          <p:stCondLst>
+                                            <p:cond delay="0"/>
+                                          </p:stCondLst>
+                                        </p:cTn>
+                                        <p:tgtEl>
+                                          <p:spTgt spid="4">
+                                            <p:txEl>
+                                              <p:pRg st="8" end="8"/>
+                                            </p:txEl>
+                                          </p:spTgt>
+                                        </p:tgtEl>
+                                        <p:attrNameLst>
+                                          <p:attrName>style.visibility</p:attrName>
+                                        </p:attrNameLst>
+                                      </p:cBhvr>
+                                      <p:to>
+                                        <p:strVal val="visible"/>
+                                      </p:to>
+                                    </p:set>
+                                  </p:childTnLst>
+                                </p:cTn>
+                              </p:par>
+                              <p:par>
+                                <p:cTn id="25" presetID="1" presetClass="entr" presetSubtype="0" fill="hold" nodeType="withEffect">
+                                  <p:stCondLst>
+                                    <p:cond delay="0"/>
+                                  </p:stCondLst>
+                                  <p:childTnLst>
+                                    <p:set>
+                                      <p:cBhvr>
+                                        <p:cTn id="26" dur="1" fill="hold">
+                                          <p:stCondLst>
+                                            <p:cond delay="0"/>
+                                          </p:stCondLst>
+                                        </p:cTn>
+                                        <p:tgtEl>
+                                          <p:spTgt spid="4">
+                                            <p:txEl>
+                                              <p:pRg st="9" end="9"/>
+                                            </p:txEl>
+                                          </p:spTgt>
+                                        </p:tgtEl>
+                                        <p:attrNameLst>
+                                          <p:attrName>style.visibility</p:attrName>
+                                        </p:attrNameLst>
+                                      </p:cBhvr>
+                                      <p:to>
+                                        <p:strVal val="visible"/>
+                                      </p:to>
+                                    </p:set>
+                                  </p:childTnLst>
+                                </p:cTn>
+                              </p:par>
+                            </p:childTnLst>
+                          </p:cTn>
+                        </p:par>
+                      </p:childTnLst>
+                    </p:cTn>
+                  </p:par>
+                </p:childTnLst>
+              </p:cTn>
+              <p:prevCondLst>
+                <p:cond evt="onPrev" delay="0">
+                  <p:tgtEl>
+                    <p:sldTgt/>
+                  </p:tgtEl>
+                </p:cond>
+              </p:prevCondLst>
+              <p:nextCondLst>
+                <p:cond evt="onNext" delay="0">
+                  <p:tgtEl>
+                    <p:sldTgt/>
+                  </p:tgtEl>
+                </p:cond>
+              </p:nextCondLst>
+            </p:seq>
+          </p:childTnLst>
+        </p:cTn>
+      </p:par>
+    </p:tnLst>
+  </p:timing>
+</p:sld>
+</file>
+
 <file path=ppt/slides/slide19.xml><?xml version="1.0" encoding="utf-8"?>
+<p:sld xmlns:a="http://schemas.openxmlformats.org/drawingml/2006/main" xmlns:r="http://schemas.openxmlformats.org/officeDocument/2006/relationships" xmlns:p="http://schemas.openxmlformats.org/presentationml/2006/main">
+  <p:cSld>
+    <p:spTree>
+      <p:nvGrpSpPr>
+        <p:cNvPr id="1" name="">
+          <a:extLst>
+            <a:ext uri="{FF2B5EF4-FFF2-40B4-BE49-F238E27FC236}">
+              <a16:creationId xmlns:a16="http://schemas.microsoft.com/office/drawing/2014/main" id="{E0C95B40-A48A-8F43-9B60-928351BC9618}"/>
+            </a:ext>
+          </a:extLst>
+        </p:cNvPr>
+        <p:cNvGrpSpPr/>
+        <p:nvPr/>
+      </p:nvGrpSpPr>
+      <p:grpSpPr>
+        <a:xfrm>
+          <a:off x="0" y="0"/>
+          <a:ext cx="0" cy="0"/>
+          <a:chOff x="0" y="0"/>
+          <a:chExt cx="0" cy="0"/>
+        </a:xfrm>
+      </p:grpSpPr>
+      <p:sp>
+        <p:nvSpPr>
+          <p:cNvPr id="2" name="Title 1">
+            <a:extLst>
+              <a:ext uri="{FF2B5EF4-FFF2-40B4-BE49-F238E27FC236}">
+                <a16:creationId xmlns:a16="http://schemas.microsoft.com/office/drawing/2014/main" id="{1973813D-DEED-A43D-9900-855BF4CDB87F}"/>
+              </a:ext>
+            </a:extLst>
+          </p:cNvPr>
+          <p:cNvSpPr>
+            <a:spLocks noGrp="1"/>
+          </p:cNvSpPr>
+          <p:nvPr>
+            <p:ph type="title"/>
+          </p:nvPr>
+        </p:nvSpPr>
+        <p:spPr>
+          <a:xfrm>
+            <a:off x="660131" y="332361"/>
+            <a:ext cx="10515600" cy="942257"/>
+          </a:xfrm>
+        </p:spPr>
+        <p:txBody>
+          <a:bodyPr>
+            <a:normAutofit/>
+          </a:bodyPr>
+          <a:lstStyle/>
+          <a:p>
+            <a:r>
+              <a:rPr lang="en-IN" dirty="0"/>
+              <a:t>Demonstration</a:t>
+            </a:r>
+          </a:p>
+        </p:txBody>
+      </p:sp>
+      <p:sp>
+        <p:nvSpPr>
+          <p:cNvPr id="4" name="Content Placeholder 3">
+            <a:extLst>
+              <a:ext uri="{FF2B5EF4-FFF2-40B4-BE49-F238E27FC236}">
+                <a16:creationId xmlns:a16="http://schemas.microsoft.com/office/drawing/2014/main" id="{72421547-AB10-F0A3-F8C0-EC15674B7A4B}"/>
+              </a:ext>
+            </a:extLst>
+          </p:cNvPr>
+          <p:cNvSpPr>
+            <a:spLocks noGrp="1"/>
+          </p:cNvSpPr>
+          <p:nvPr>
+            <p:ph idx="1"/>
+          </p:nvPr>
+        </p:nvSpPr>
+        <p:spPr>
+          <a:xfrm>
+            <a:off x="836776" y="1496291"/>
+            <a:ext cx="10162309" cy="3650673"/>
+          </a:xfrm>
+        </p:spPr>
+        <p:txBody>
+          <a:bodyPr vert="horz" lIns="91440" tIns="45720" rIns="91440" bIns="45720" rtlCol="0" anchor="t">
+            <a:normAutofit/>
+          </a:bodyPr>
+          <a:lstStyle/>
+          <a:p>
+            <a:pPr>
+              <a:lnSpc>
+                <a:spcPct val="150000"/>
+              </a:lnSpc>
+            </a:pPr>
+            <a:r>
+              <a:rPr lang="en-US" sz="2000" dirty="0"/>
+              <a:t>Manually running dependency check without CI Pipeline.</a:t>
+            </a:r>
+          </a:p>
+          <a:p>
+            <a:pPr lvl="1">
+              <a:lnSpc>
+                <a:spcPct val="150000"/>
+              </a:lnSpc>
+            </a:pPr>
+            <a:r>
+              <a:rPr lang="en-US" sz="1800" dirty="0"/>
+              <a:t>g-cli -v --lv-</a:t>
+            </a:r>
+            <a:r>
+              <a:rPr lang="en-US" sz="1800" dirty="0" err="1"/>
+              <a:t>ver</a:t>
+            </a:r>
+            <a:r>
+              <a:rPr lang="en-US" sz="1800" dirty="0"/>
+              <a:t> 2023 --arch 32 "C:\sw-deps-monitor\CICD\AutomatedChecks\UnexpectedDepsCheck.vi" -- "C:\sw-deps-monitor" "False“</a:t>
+            </a:r>
+          </a:p>
+          <a:p>
+            <a:pPr>
+              <a:lnSpc>
+                <a:spcPct val="150000"/>
+              </a:lnSpc>
+            </a:pPr>
+            <a:r>
+              <a:rPr lang="en-US" sz="2000" dirty="0"/>
+              <a:t>Triggering the CI Pipeline for each PR</a:t>
+            </a:r>
+          </a:p>
+          <a:p>
+            <a:pPr lvl="1">
+              <a:lnSpc>
+                <a:spcPct val="150000"/>
+              </a:lnSpc>
+            </a:pPr>
+            <a:r>
+              <a:rPr lang="en-US" sz="1600" dirty="0"/>
+              <a:t>Add a label ‘RunCI’ in the PR to trigger the CI Pipeline.</a:t>
+            </a:r>
+          </a:p>
+          <a:p>
+            <a:pPr lvl="1">
+              <a:lnSpc>
+                <a:spcPct val="150000"/>
+              </a:lnSpc>
+            </a:pPr>
+            <a:r>
+              <a:rPr lang="en-US" sz="1600" dirty="0"/>
+              <a:t>This helps avoid unnecessary runs on every commit or push.</a:t>
+            </a:r>
+          </a:p>
+          <a:p>
+            <a:pPr lvl="1">
+              <a:lnSpc>
+                <a:spcPct val="150000"/>
+              </a:lnSpc>
+            </a:pPr>
+            <a:endParaRPr lang="en-US" sz="1600" dirty="0"/>
+          </a:p>
+        </p:txBody>
+      </p:sp>
+      <p:pic>
+        <p:nvPicPr>
+          <p:cNvPr id="6" name="Picture 5">
+            <a:extLst>
+              <a:ext uri="{FF2B5EF4-FFF2-40B4-BE49-F238E27FC236}">
+                <a16:creationId xmlns:a16="http://schemas.microsoft.com/office/drawing/2014/main" id="{244549E6-D3BC-6FE5-DF41-292C850D6505}"/>
+              </a:ext>
+            </a:extLst>
+          </p:cNvPr>
+          <p:cNvPicPr>
+            <a:picLocks noChangeAspect="1"/>
+          </p:cNvPicPr>
+          <p:nvPr/>
+        </p:nvPicPr>
+        <p:blipFill>
+          <a:blip r:embed="rId2"/>
+          <a:stretch>
+            <a:fillRect/>
+          </a:stretch>
+        </p:blipFill>
+        <p:spPr>
+          <a:xfrm>
+            <a:off x="1621684" y="4406716"/>
+            <a:ext cx="2977321" cy="740248"/>
+          </a:xfrm>
+          <a:prstGeom prst="rect">
+            <a:avLst/>
+          </a:prstGeom>
+        </p:spPr>
+      </p:pic>
+    </p:spTree>
+    <p:extLst>
+      <p:ext uri="{BB962C8B-B14F-4D97-AF65-F5344CB8AC3E}">
+        <p14:creationId xmlns:p14="http://schemas.microsoft.com/office/powerpoint/2010/main" val="228789965"/>
+      </p:ext>
+    </p:extLst>
+  </p:cSld>
+  <p:clrMapOvr>
+    <a:masterClrMapping/>
+  </p:clrMapOvr>
+  <p:timing>
+    <p:tnLst>
+      <p:par>
+        <p:cTn id="1" dur="indefinite" restart="never" nodeType="tmRoot">
+          <p:childTnLst>
+            <p:seq concurrent="1" nextAc="seek">
+              <p:cTn id="2" dur="indefinite" nodeType="mainSeq">
+                <p:childTnLst>
+                  <p:par>
+                    <p:cTn id="3" fill="hold">
+                      <p:stCondLst>
+                        <p:cond delay="indefinite"/>
+                      </p:stCondLst>
+                      <p:childTnLst>
+                        <p:par>
+                          <p:cTn id="4" fill="hold">
+                            <p:stCondLst>
+                              <p:cond delay="0"/>
+                            </p:stCondLst>
+                            <p:childTnLst>
+                              <p:par>
+                                <p:cTn id="5" presetID="1" presetClass="entr" presetSubtype="0" fill="hold" nodeType="clickEffect">
+                                  <p:stCondLst>
+                                    <p:cond delay="0"/>
+                                  </p:stCondLst>
+                                  <p:childTnLst>
+                                    <p:set>
+                                      <p:cBhvr>
+                                        <p:cTn id="6" dur="1" fill="hold">
+                                          <p:stCondLst>
+                                            <p:cond delay="0"/>
+                                          </p:stCondLst>
+                                        </p:cTn>
+                                        <p:tgtEl>
+                                          <p:spTgt spid="4">
+                                            <p:txEl>
+                                              <p:pRg st="0" end="0"/>
+                                            </p:txEl>
+                                          </p:spTgt>
+                                        </p:tgtEl>
+                                        <p:attrNameLst>
+                                          <p:attrName>style.visibility</p:attrName>
+                                        </p:attrNameLst>
+                                      </p:cBhvr>
+                                      <p:to>
+                                        <p:strVal val="visible"/>
+                                      </p:to>
+                                    </p:set>
+                                  </p:childTnLst>
+                                </p:cTn>
+                              </p:par>
+                              <p:par>
+                                <p:cTn id="7" presetID="1" presetClass="entr" presetSubtype="0" fill="hold" nodeType="withEffect">
+                                  <p:stCondLst>
+                                    <p:cond delay="0"/>
+                                  </p:stCondLst>
+                                  <p:childTnLst>
+                                    <p:set>
+                                      <p:cBhvr>
+                                        <p:cTn id="8" dur="1" fill="hold">
+                                          <p:stCondLst>
+                                            <p:cond delay="0"/>
+                                          </p:stCondLst>
+                                        </p:cTn>
+                                        <p:tgtEl>
+                                          <p:spTgt spid="4">
+                                            <p:txEl>
+                                              <p:pRg st="1" end="1"/>
+                                            </p:txEl>
+                                          </p:spTgt>
+                                        </p:tgtEl>
+                                        <p:attrNameLst>
+                                          <p:attrName>style.visibility</p:attrName>
+                                        </p:attrNameLst>
+                                      </p:cBhvr>
+                                      <p:to>
+                                        <p:strVal val="visible"/>
+                                      </p:to>
+                                    </p:set>
+                                  </p:childTnLst>
+                                </p:cTn>
+                              </p:par>
+                            </p:childTnLst>
+                          </p:cTn>
+                        </p:par>
+                      </p:childTnLst>
+                    </p:cTn>
+                  </p:par>
+                  <p:par>
+                    <p:cTn id="9" fill="hold">
+                      <p:stCondLst>
+                        <p:cond delay="indefinite"/>
+                      </p:stCondLst>
+                      <p:childTnLst>
+                        <p:par>
+                          <p:cTn id="10" fill="hold">
+                            <p:stCondLst>
+                              <p:cond delay="0"/>
+                            </p:stCondLst>
+                            <p:childTnLst>
+                              <p:par>
+                                <p:cTn id="11" presetID="1" presetClass="entr" presetSubtype="0" fill="hold" nodeType="clickEffect">
+                                  <p:stCondLst>
+                                    <p:cond delay="0"/>
+                                  </p:stCondLst>
+                                  <p:childTnLst>
+                                    <p:set>
+                                      <p:cBhvr>
+                                        <p:cTn id="12" dur="1" fill="hold">
+                                          <p:stCondLst>
+                                            <p:cond delay="0"/>
+                                          </p:stCondLst>
+                                        </p:cTn>
+                                        <p:tgtEl>
+                                          <p:spTgt spid="4">
+                                            <p:txEl>
+                                              <p:pRg st="2" end="2"/>
+                                            </p:txEl>
+                                          </p:spTgt>
+                                        </p:tgtEl>
+                                        <p:attrNameLst>
+                                          <p:attrName>style.visibility</p:attrName>
+                                        </p:attrNameLst>
+                                      </p:cBhvr>
+                                      <p:to>
+                                        <p:strVal val="visible"/>
+                                      </p:to>
+                                    </p:set>
+                                  </p:childTnLst>
+                                </p:cTn>
+                              </p:par>
+                              <p:par>
+                                <p:cTn id="13" presetID="1" presetClass="entr" presetSubtype="0" fill="hold" nodeType="withEffect">
+                                  <p:stCondLst>
+                                    <p:cond delay="0"/>
+                                  </p:stCondLst>
+                                  <p:childTnLst>
+                                    <p:set>
+                                      <p:cBhvr>
+                                        <p:cTn id="14" dur="1" fill="hold">
+                                          <p:stCondLst>
+                                            <p:cond delay="0"/>
+                                          </p:stCondLst>
+                                        </p:cTn>
+                                        <p:tgtEl>
+                                          <p:spTgt spid="4">
+                                            <p:txEl>
+                                              <p:pRg st="3" end="3"/>
+                                            </p:txEl>
+                                          </p:spTgt>
+                                        </p:tgtEl>
+                                        <p:attrNameLst>
+                                          <p:attrName>style.visibility</p:attrName>
+                                        </p:attrNameLst>
+                                      </p:cBhvr>
+                                      <p:to>
+                                        <p:strVal val="visible"/>
+                                      </p:to>
+                                    </p:set>
+                                  </p:childTnLst>
+                                </p:cTn>
+                              </p:par>
+                              <p:par>
+                                <p:cTn id="15" presetID="1" presetClass="entr" presetSubtype="0" fill="hold" nodeType="withEffect">
+                                  <p:stCondLst>
+                                    <p:cond delay="0"/>
+                                  </p:stCondLst>
+                                  <p:childTnLst>
+                                    <p:set>
+                                      <p:cBhvr>
+                                        <p:cTn id="16" dur="1" fill="hold">
+                                          <p:stCondLst>
+                                            <p:cond delay="0"/>
+                                          </p:stCondLst>
+                                        </p:cTn>
+                                        <p:tgtEl>
+                                          <p:spTgt spid="4">
+                                            <p:txEl>
+                                              <p:pRg st="4" end="4"/>
+                                            </p:txEl>
+                                          </p:spTgt>
+                                        </p:tgtEl>
+                                        <p:attrNameLst>
+                                          <p:attrName>style.visibility</p:attrName>
+                                        </p:attrNameLst>
+                                      </p:cBhvr>
+                                      <p:to>
+                                        <p:strVal val="visible"/>
+                                      </p:to>
+                                    </p:set>
+                                  </p:childTnLst>
+                                </p:cTn>
+                              </p:par>
+                              <p:par>
+                                <p:cTn id="17" presetID="1" presetClass="entr" presetSubtype="0" fill="hold" nodeType="withEffect">
+                                  <p:stCondLst>
+                                    <p:cond delay="0"/>
+                                  </p:stCondLst>
+                                  <p:childTnLst>
+                                    <p:set>
+                                      <p:cBhvr>
+                                        <p:cTn id="18" dur="1" fill="hold">
+                                          <p:stCondLst>
+                                            <p:cond delay="0"/>
+                                          </p:stCondLst>
+                                        </p:cTn>
+                                        <p:tgtEl>
+                                          <p:spTgt spid="6"/>
+                                        </p:tgtEl>
+                                        <p:attrNameLst>
+                                          <p:attrName>style.visibility</p:attrName>
+                                        </p:attrNameLst>
+                                      </p:cBhvr>
+                                      <p:to>
+                                        <p:strVal val="visible"/>
+                                      </p:to>
+                                    </p:set>
+                                  </p:childTnLst>
+                                </p:cTn>
+                              </p:par>
+                            </p:childTnLst>
+                          </p:cTn>
+                        </p:par>
+                      </p:childTnLst>
+                    </p:cTn>
+                  </p:par>
+                </p:childTnLst>
+              </p:cTn>
+              <p:prevCondLst>
+                <p:cond evt="onPrev" delay="0">
+                  <p:tgtEl>
+                    <p:sldTgt/>
+                  </p:tgtEl>
+                </p:cond>
+              </p:prevCondLst>
+              <p:nextCondLst>
+                <p:cond evt="onNext" delay="0">
+                  <p:tgtEl>
+                    <p:sldTgt/>
+                  </p:tgtEl>
+                </p:cond>
+              </p:nextCondLst>
+            </p:seq>
+          </p:childTnLst>
+        </p:cTn>
+      </p:par>
+    </p:tnLst>
+  </p:timing>
+</p:sld>
+</file>
+
+<file path=ppt/slides/slide2.xml><?xml version="1.0" encoding="utf-8"?>
+<p:sld xmlns:a="http://schemas.openxmlformats.org/drawingml/2006/main" xmlns:r="http://schemas.openxmlformats.org/officeDocument/2006/relationships" xmlns:p="http://schemas.openxmlformats.org/presentationml/2006/main">
+  <p:cSld>
+    <p:spTree>
+      <p:nvGrpSpPr>
+        <p:cNvPr id="1" name=""/>
+        <p:cNvGrpSpPr/>
+        <p:nvPr/>
+      </p:nvGrpSpPr>
+      <p:grpSpPr>
+        <a:xfrm>
+          <a:off x="0" y="0"/>
+          <a:ext cx="0" cy="0"/>
+          <a:chOff x="0" y="0"/>
+          <a:chExt cx="0" cy="0"/>
+        </a:xfrm>
+      </p:grpSpPr>
+      <p:sp>
+        <p:nvSpPr>
+          <p:cNvPr id="2" name="Title 1">
+            <a:extLst>
+              <a:ext uri="{FF2B5EF4-FFF2-40B4-BE49-F238E27FC236}">
+                <a16:creationId xmlns:a16="http://schemas.microsoft.com/office/drawing/2014/main" id="{852F5C42-3A30-439B-D003-7F54CAAE6B30}"/>
+              </a:ext>
+            </a:extLst>
+          </p:cNvPr>
+          <p:cNvSpPr>
+            <a:spLocks noGrp="1"/>
+          </p:cNvSpPr>
+          <p:nvPr>
+            <p:ph type="title"/>
+          </p:nvPr>
+        </p:nvSpPr>
+        <p:spPr>
+          <a:xfrm>
+            <a:off x="838200" y="365125"/>
+            <a:ext cx="10515600" cy="608481"/>
+          </a:xfrm>
+        </p:spPr>
+        <p:txBody>
+          <a:bodyPr>
+            <a:noAutofit/>
+          </a:bodyPr>
+          <a:lstStyle/>
+          <a:p>
+            <a:r>
+              <a:rPr lang="en-IN" dirty="0"/>
+              <a:t>Agenda</a:t>
+            </a:r>
+          </a:p>
+        </p:txBody>
+      </p:sp>
+      <p:sp>
+        <p:nvSpPr>
+          <p:cNvPr id="3" name="Content Placeholder 2">
+            <a:extLst>
+              <a:ext uri="{FF2B5EF4-FFF2-40B4-BE49-F238E27FC236}">
+                <a16:creationId xmlns:a16="http://schemas.microsoft.com/office/drawing/2014/main" id="{82A3A5A5-34DD-2D68-2A7C-4CFA255198AD}"/>
+              </a:ext>
+            </a:extLst>
+          </p:cNvPr>
+          <p:cNvSpPr>
+            <a:spLocks noGrp="1"/>
+          </p:cNvSpPr>
+          <p:nvPr>
+            <p:ph idx="1"/>
+          </p:nvPr>
+        </p:nvSpPr>
+        <p:spPr>
+          <a:xfrm>
+            <a:off x="838200" y="1157801"/>
+            <a:ext cx="10515600" cy="5249926"/>
+          </a:xfrm>
+        </p:spPr>
+        <p:txBody>
+          <a:bodyPr>
+            <a:normAutofit fontScale="47500" lnSpcReduction="20000"/>
+          </a:bodyPr>
+          <a:lstStyle/>
+          <a:p>
+            <a:pPr>
+              <a:lnSpc>
+                <a:spcPct val="170000"/>
+              </a:lnSpc>
+            </a:pPr>
+            <a:r>
+              <a:rPr lang="en-IN" sz="2900" dirty="0"/>
+              <a:t>Problem Statement, based on real project experiences</a:t>
+            </a:r>
+          </a:p>
+          <a:p>
+            <a:pPr>
+              <a:lnSpc>
+                <a:spcPct val="170000"/>
+              </a:lnSpc>
+            </a:pPr>
+            <a:r>
+              <a:rPr lang="en-IN" sz="2900" dirty="0"/>
+              <a:t>Solution Approach</a:t>
+            </a:r>
+          </a:p>
+          <a:p>
+            <a:pPr>
+              <a:lnSpc>
+                <a:spcPct val="170000"/>
+              </a:lnSpc>
+            </a:pPr>
+            <a:r>
+              <a:rPr lang="en-IN" sz="2900" dirty="0"/>
+              <a:t>The Development Workflow with CI Pipeline Checks Implemented</a:t>
+            </a:r>
+          </a:p>
+          <a:p>
+            <a:pPr>
+              <a:lnSpc>
+                <a:spcPct val="170000"/>
+              </a:lnSpc>
+            </a:pPr>
+            <a:r>
+              <a:rPr lang="en-IN" sz="2900" dirty="0"/>
+              <a:t>Demonstration</a:t>
+            </a:r>
+          </a:p>
+          <a:p>
+            <a:pPr lvl="1">
+              <a:lnSpc>
+                <a:spcPct val="170000"/>
+              </a:lnSpc>
+            </a:pPr>
+            <a:r>
+              <a:rPr lang="en-IN" sz="2300" dirty="0"/>
+              <a:t>Example Code base for Demo</a:t>
+            </a:r>
+          </a:p>
+          <a:p>
+            <a:pPr lvl="1">
+              <a:lnSpc>
+                <a:spcPct val="170000"/>
+              </a:lnSpc>
+            </a:pPr>
+            <a:r>
+              <a:rPr lang="en-IN" sz="2300" dirty="0"/>
+              <a:t>Setting up files in repo for dependency monitoring</a:t>
+            </a:r>
+          </a:p>
+          <a:p>
+            <a:pPr lvl="1">
+              <a:lnSpc>
+                <a:spcPct val="170000"/>
+              </a:lnSpc>
+            </a:pPr>
+            <a:r>
+              <a:rPr lang="en-IN" sz="2300" dirty="0"/>
+              <a:t>Triggering the Checks</a:t>
+            </a:r>
+          </a:p>
+          <a:p>
+            <a:pPr>
+              <a:lnSpc>
+                <a:spcPct val="170000"/>
+              </a:lnSpc>
+            </a:pPr>
+            <a:r>
+              <a:rPr lang="en-IN" sz="2900" dirty="0"/>
+              <a:t>Tools available in the </a:t>
+            </a:r>
+            <a:r>
+              <a:rPr lang="en-IN" sz="2900" b="1" i="1" dirty="0" err="1"/>
+              <a:t>sw</a:t>
+            </a:r>
+            <a:r>
+              <a:rPr lang="en-IN" sz="2900" b="1" i="1" dirty="0"/>
+              <a:t>-deps-monitor</a:t>
+            </a:r>
+            <a:r>
+              <a:rPr lang="en-IN" sz="2900" dirty="0"/>
+              <a:t> repo</a:t>
+            </a:r>
+          </a:p>
+          <a:p>
+            <a:pPr lvl="1">
+              <a:lnSpc>
+                <a:spcPct val="170000"/>
+              </a:lnSpc>
+            </a:pPr>
+            <a:r>
+              <a:rPr lang="en-IN" sz="2300" dirty="0"/>
+              <a:t>List of tools used in the CI Pipeline</a:t>
+            </a:r>
+          </a:p>
+          <a:p>
+            <a:pPr lvl="1">
+              <a:lnSpc>
+                <a:spcPct val="170000"/>
+              </a:lnSpc>
+            </a:pPr>
+            <a:r>
+              <a:rPr lang="en-IN" sz="2300" dirty="0"/>
+              <a:t>Additional tools like dependency visualization</a:t>
+            </a:r>
+          </a:p>
+          <a:p>
+            <a:pPr>
+              <a:lnSpc>
+                <a:spcPct val="170000"/>
+              </a:lnSpc>
+            </a:pPr>
+            <a:r>
+              <a:rPr lang="en-IN" sz="2900" dirty="0"/>
+              <a:t>Introduction to Software Coupling Metrics for analysing maintainability</a:t>
+            </a:r>
+          </a:p>
+          <a:p>
+            <a:pPr lvl="1">
+              <a:lnSpc>
+                <a:spcPct val="170000"/>
+              </a:lnSpc>
+            </a:pPr>
+            <a:r>
+              <a:rPr lang="en-IN" sz="2300" dirty="0"/>
+              <a:t>Utility to generate a coupling metrics report</a:t>
+            </a:r>
+          </a:p>
+          <a:p>
+            <a:pPr>
+              <a:lnSpc>
+                <a:spcPct val="170000"/>
+              </a:lnSpc>
+            </a:pPr>
+            <a:r>
+              <a:rPr lang="en-IN" sz="2900" dirty="0"/>
+              <a:t>Summary</a:t>
+            </a:r>
+            <a:endParaRPr lang="en-IN" sz="2500" dirty="0"/>
+          </a:p>
+          <a:p>
+            <a:pPr lvl="1"/>
+            <a:endParaRPr lang="en-IN" dirty="0"/>
+          </a:p>
+          <a:p>
+            <a:pPr lvl="1"/>
+            <a:endParaRPr lang="en-IN" dirty="0"/>
+          </a:p>
+          <a:p>
+            <a:endParaRPr lang="en-IN" dirty="0"/>
+          </a:p>
+          <a:p>
+            <a:endParaRPr lang="en-IN" dirty="0"/>
+          </a:p>
+        </p:txBody>
+      </p:sp>
+    </p:spTree>
+    <p:extLst>
+      <p:ext uri="{BB962C8B-B14F-4D97-AF65-F5344CB8AC3E}">
+        <p14:creationId xmlns:p14="http://schemas.microsoft.com/office/powerpoint/2010/main" val="3608631070"/>
+      </p:ext>
+    </p:extLst>
+  </p:cSld>
+  <p:clrMapOvr>
+    <a:masterClrMapping/>
+  </p:clrMapOvr>
+  <p:timing>
+    <p:tnLst>
+      <p:par>
+        <p:cTn id="1" dur="indefinite" restart="never" nodeType="tmRoot">
+          <p:childTnLst>
+            <p:seq concurrent="1" nextAc="seek">
+              <p:cTn id="2" dur="indefinite" nodeType="mainSeq">
+                <p:childTnLst>
+                  <p:par>
+                    <p:cTn id="3" fill="hold">
+                      <p:stCondLst>
+                        <p:cond delay="indefinite"/>
+                      </p:stCondLst>
+                      <p:childTnLst>
+                        <p:par>
+                          <p:cTn id="4" fill="hold">
+                            <p:stCondLst>
+                              <p:cond delay="0"/>
+                            </p:stCondLst>
+                            <p:childTnLst>
+                              <p:par>
+                                <p:cTn id="5" presetID="1" presetClass="entr" presetSubtype="0" fill="hold" nodeType="clickEffect">
+                                  <p:stCondLst>
+                                    <p:cond delay="0"/>
+                                  </p:stCondLst>
+                                  <p:childTnLst>
+                                    <p:set>
+                                      <p:cBhvr>
+                                        <p:cTn id="6" dur="1" fill="hold">
+                                          <p:stCondLst>
+                                            <p:cond delay="0"/>
+                                          </p:stCondLst>
+                                        </p:cTn>
+                                        <p:tgtEl>
+                                          <p:spTgt spid="3">
+                                            <p:txEl>
+                                              <p:pRg st="0" end="0"/>
+                                            </p:txEl>
+                                          </p:spTgt>
+                                        </p:tgtEl>
+                                        <p:attrNameLst>
+                                          <p:attrName>style.visibility</p:attrName>
+                                        </p:attrNameLst>
+                                      </p:cBhvr>
+                                      <p:to>
+                                        <p:strVal val="visible"/>
+                                      </p:to>
+                                    </p:set>
+                                  </p:childTnLst>
+                                </p:cTn>
+                              </p:par>
+                            </p:childTnLst>
+                          </p:cTn>
+                        </p:par>
+                      </p:childTnLst>
+                    </p:cTn>
+                  </p:par>
+                  <p:par>
+                    <p:cTn id="7" fill="hold">
+                      <p:stCondLst>
+                        <p:cond delay="indefinite"/>
+                      </p:stCondLst>
+                      <p:childTnLst>
+                        <p:par>
+                          <p:cTn id="8" fill="hold">
+                            <p:stCondLst>
+                              <p:cond delay="0"/>
+                            </p:stCondLst>
+                            <p:childTnLst>
+                              <p:par>
+                                <p:cTn id="9" presetID="1" presetClass="entr" presetSubtype="0" fill="hold" nodeType="clickEffect">
+                                  <p:stCondLst>
+                                    <p:cond delay="0"/>
+                                  </p:stCondLst>
+                                  <p:childTnLst>
+                                    <p:set>
+                                      <p:cBhvr>
+                                        <p:cTn id="10" dur="1" fill="hold">
+                                          <p:stCondLst>
+                                            <p:cond delay="0"/>
+                                          </p:stCondLst>
+                                        </p:cTn>
+                                        <p:tgtEl>
+                                          <p:spTgt spid="3">
+                                            <p:txEl>
+                                              <p:pRg st="1" end="1"/>
+                                            </p:txEl>
+                                          </p:spTgt>
+                                        </p:tgtEl>
+                                        <p:attrNameLst>
+                                          <p:attrName>style.visibility</p:attrName>
+                                        </p:attrNameLst>
+                                      </p:cBhvr>
+                                      <p:to>
+                                        <p:strVal val="visible"/>
+                                      </p:to>
+                                    </p:set>
+                                  </p:childTnLst>
+                                </p:cTn>
+                              </p:par>
+                            </p:childTnLst>
+                          </p:cTn>
+                        </p:par>
+                      </p:childTnLst>
+                    </p:cTn>
+                  </p:par>
+                  <p:par>
+                    <p:cTn id="11" fill="hold">
+                      <p:stCondLst>
+                        <p:cond delay="indefinite"/>
+                      </p:stCondLst>
+                      <p:childTnLst>
+                        <p:par>
+                          <p:cTn id="12" fill="hold">
+                            <p:stCondLst>
+                              <p:cond delay="0"/>
+                            </p:stCondLst>
+                            <p:childTnLst>
+                              <p:par>
+                                <p:cTn id="13" presetID="1" presetClass="entr" presetSubtype="0" fill="hold" nodeType="clickEffect">
+                                  <p:stCondLst>
+                                    <p:cond delay="0"/>
+                                  </p:stCondLst>
+                                  <p:childTnLst>
+                                    <p:set>
+                                      <p:cBhvr>
+                                        <p:cTn id="14" dur="1" fill="hold">
+                                          <p:stCondLst>
+                                            <p:cond delay="0"/>
+                                          </p:stCondLst>
+                                        </p:cTn>
+                                        <p:tgtEl>
+                                          <p:spTgt spid="3">
+                                            <p:txEl>
+                                              <p:pRg st="2" end="2"/>
+                                            </p:txEl>
+                                          </p:spTgt>
+                                        </p:tgtEl>
+                                        <p:attrNameLst>
+                                          <p:attrName>style.visibility</p:attrName>
+                                        </p:attrNameLst>
+                                      </p:cBhvr>
+                                      <p:to>
+                                        <p:strVal val="visible"/>
+                                      </p:to>
+                                    </p:set>
+                                  </p:childTnLst>
+                                </p:cTn>
+                              </p:par>
+                            </p:childTnLst>
+                          </p:cTn>
+                        </p:par>
+                      </p:childTnLst>
+                    </p:cTn>
+                  </p:par>
+                  <p:par>
+                    <p:cTn id="15" fill="hold">
+                      <p:stCondLst>
+                        <p:cond delay="indefinite"/>
+                      </p:stCondLst>
+                      <p:childTnLst>
+                        <p:par>
+                          <p:cTn id="16" fill="hold">
+                            <p:stCondLst>
+                              <p:cond delay="0"/>
+                            </p:stCondLst>
+                            <p:childTnLst>
+                              <p:par>
+                                <p:cTn id="17" presetID="1" presetClass="entr" presetSubtype="0" fill="hold" nodeType="clickEffect">
+                                  <p:stCondLst>
+                                    <p:cond delay="0"/>
+                                  </p:stCondLst>
+                                  <p:childTnLst>
+                                    <p:set>
+                                      <p:cBhvr>
+                                        <p:cTn id="18" dur="1" fill="hold">
+                                          <p:stCondLst>
+                                            <p:cond delay="0"/>
+                                          </p:stCondLst>
+                                        </p:cTn>
+                                        <p:tgtEl>
+                                          <p:spTgt spid="3">
+                                            <p:txEl>
+                                              <p:pRg st="3" end="3"/>
+                                            </p:txEl>
+                                          </p:spTgt>
+                                        </p:tgtEl>
+                                        <p:attrNameLst>
+                                          <p:attrName>style.visibility</p:attrName>
+                                        </p:attrNameLst>
+                                      </p:cBhvr>
+                                      <p:to>
+                                        <p:strVal val="visible"/>
+                                      </p:to>
+                                    </p:set>
+                                  </p:childTnLst>
+                                </p:cTn>
+                              </p:par>
+                              <p:par>
+                                <p:cTn id="19" presetID="1" presetClass="entr" presetSubtype="0" fill="hold" nodeType="withEffect">
+                                  <p:stCondLst>
+                                    <p:cond delay="0"/>
+                                  </p:stCondLst>
+                                  <p:childTnLst>
+                                    <p:set>
+                                      <p:cBhvr>
+                                        <p:cTn id="20" dur="1" fill="hold">
+                                          <p:stCondLst>
+                                            <p:cond delay="0"/>
+                                          </p:stCondLst>
+                                        </p:cTn>
+                                        <p:tgtEl>
+                                          <p:spTgt spid="3">
+                                            <p:txEl>
+                                              <p:pRg st="4" end="4"/>
+                                            </p:txEl>
+                                          </p:spTgt>
+                                        </p:tgtEl>
+                                        <p:attrNameLst>
+                                          <p:attrName>style.visibility</p:attrName>
+                                        </p:attrNameLst>
+                                      </p:cBhvr>
+                                      <p:to>
+                                        <p:strVal val="visible"/>
+                                      </p:to>
+                                    </p:set>
+                                  </p:childTnLst>
+                                </p:cTn>
+                              </p:par>
+                              <p:par>
+                                <p:cTn id="21" presetID="1" presetClass="entr" presetSubtype="0" fill="hold" nodeType="withEffect">
+                                  <p:stCondLst>
+                                    <p:cond delay="0"/>
+                                  </p:stCondLst>
+                                  <p:childTnLst>
+                                    <p:set>
+                                      <p:cBhvr>
+                                        <p:cTn id="22" dur="1" fill="hold">
+                                          <p:stCondLst>
+                                            <p:cond delay="0"/>
+                                          </p:stCondLst>
+                                        </p:cTn>
+                                        <p:tgtEl>
+                                          <p:spTgt spid="3">
+                                            <p:txEl>
+                                              <p:pRg st="5" end="5"/>
+                                            </p:txEl>
+                                          </p:spTgt>
+                                        </p:tgtEl>
+                                        <p:attrNameLst>
+                                          <p:attrName>style.visibility</p:attrName>
+                                        </p:attrNameLst>
+                                      </p:cBhvr>
+                                      <p:to>
+                                        <p:strVal val="visible"/>
+                                      </p:to>
+                                    </p:set>
+                                  </p:childTnLst>
+                                </p:cTn>
+                              </p:par>
+                              <p:par>
+                                <p:cTn id="23" presetID="1" presetClass="entr" presetSubtype="0" fill="hold" nodeType="withEffect">
+                                  <p:stCondLst>
+                                    <p:cond delay="0"/>
+                                  </p:stCondLst>
+                                  <p:childTnLst>
+                                    <p:set>
+                                      <p:cBhvr>
+                                        <p:cTn id="24" dur="1" fill="hold">
+                                          <p:stCondLst>
+                                            <p:cond delay="0"/>
+                                          </p:stCondLst>
+                                        </p:cTn>
+                                        <p:tgtEl>
+                                          <p:spTgt spid="3">
+                                            <p:txEl>
+                                              <p:pRg st="6" end="6"/>
+                                            </p:txEl>
+                                          </p:spTgt>
+                                        </p:tgtEl>
+                                        <p:attrNameLst>
+                                          <p:attrName>style.visibility</p:attrName>
+                                        </p:attrNameLst>
+                                      </p:cBhvr>
+                                      <p:to>
+                                        <p:strVal val="visible"/>
+                                      </p:to>
+                                    </p:set>
+                                  </p:childTnLst>
+                                </p:cTn>
+                              </p:par>
+                            </p:childTnLst>
+                          </p:cTn>
+                        </p:par>
+                      </p:childTnLst>
+                    </p:cTn>
+                  </p:par>
+                  <p:par>
+                    <p:cTn id="25" fill="hold">
+                      <p:stCondLst>
+                        <p:cond delay="indefinite"/>
+                      </p:stCondLst>
+                      <p:childTnLst>
+                        <p:par>
+                          <p:cTn id="26" fill="hold">
+                            <p:stCondLst>
+                              <p:cond delay="0"/>
+                            </p:stCondLst>
+                            <p:childTnLst>
+                              <p:par>
+                                <p:cTn id="27" presetID="1" presetClass="entr" presetSubtype="0" fill="hold" nodeType="clickEffect">
+                                  <p:stCondLst>
+                                    <p:cond delay="0"/>
+                                  </p:stCondLst>
+                                  <p:childTnLst>
+                                    <p:set>
+                                      <p:cBhvr>
+                                        <p:cTn id="28" dur="1" fill="hold">
+                                          <p:stCondLst>
+                                            <p:cond delay="0"/>
+                                          </p:stCondLst>
+                                        </p:cTn>
+                                        <p:tgtEl>
+                                          <p:spTgt spid="3">
+                                            <p:txEl>
+                                              <p:pRg st="7" end="7"/>
+                                            </p:txEl>
+                                          </p:spTgt>
+                                        </p:tgtEl>
+                                        <p:attrNameLst>
+                                          <p:attrName>style.visibility</p:attrName>
+                                        </p:attrNameLst>
+                                      </p:cBhvr>
+                                      <p:to>
+                                        <p:strVal val="visible"/>
+                                      </p:to>
+                                    </p:set>
+                                  </p:childTnLst>
+                                </p:cTn>
+                              </p:par>
+                              <p:par>
+                                <p:cTn id="29" presetID="1" presetClass="entr" presetSubtype="0" fill="hold" nodeType="withEffect">
+                                  <p:stCondLst>
+                                    <p:cond delay="0"/>
+                                  </p:stCondLst>
+                                  <p:childTnLst>
+                                    <p:set>
+                                      <p:cBhvr>
+                                        <p:cTn id="30" dur="1" fill="hold">
+                                          <p:stCondLst>
+                                            <p:cond delay="0"/>
+                                          </p:stCondLst>
+                                        </p:cTn>
+                                        <p:tgtEl>
+                                          <p:spTgt spid="3">
+                                            <p:txEl>
+                                              <p:pRg st="8" end="8"/>
+                                            </p:txEl>
+                                          </p:spTgt>
+                                        </p:tgtEl>
+                                        <p:attrNameLst>
+                                          <p:attrName>style.visibility</p:attrName>
+                                        </p:attrNameLst>
+                                      </p:cBhvr>
+                                      <p:to>
+                                        <p:strVal val="visible"/>
+                                      </p:to>
+                                    </p:set>
+                                  </p:childTnLst>
+                                </p:cTn>
+                              </p:par>
+                              <p:par>
+                                <p:cTn id="31" presetID="1" presetClass="entr" presetSubtype="0" fill="hold" nodeType="withEffect">
+                                  <p:stCondLst>
+                                    <p:cond delay="0"/>
+                                  </p:stCondLst>
+                                  <p:childTnLst>
+                                    <p:set>
+                                      <p:cBhvr>
+                                        <p:cTn id="32" dur="1" fill="hold">
+                                          <p:stCondLst>
+                                            <p:cond delay="0"/>
+                                          </p:stCondLst>
+                                        </p:cTn>
+                                        <p:tgtEl>
+                                          <p:spTgt spid="3">
+                                            <p:txEl>
+                                              <p:pRg st="9" end="9"/>
+                                            </p:txEl>
+                                          </p:spTgt>
+                                        </p:tgtEl>
+                                        <p:attrNameLst>
+                                          <p:attrName>style.visibility</p:attrName>
+                                        </p:attrNameLst>
+                                      </p:cBhvr>
+                                      <p:to>
+                                        <p:strVal val="visible"/>
+                                      </p:to>
+                                    </p:set>
+                                  </p:childTnLst>
+                                </p:cTn>
+                              </p:par>
+                            </p:childTnLst>
+                          </p:cTn>
+                        </p:par>
+                      </p:childTnLst>
+                    </p:cTn>
+                  </p:par>
+                  <p:par>
+                    <p:cTn id="33" fill="hold">
+                      <p:stCondLst>
+                        <p:cond delay="indefinite"/>
+                      </p:stCondLst>
+                      <p:childTnLst>
+                        <p:par>
+                          <p:cTn id="34" fill="hold">
+                            <p:stCondLst>
+                              <p:cond delay="0"/>
+                            </p:stCondLst>
+                            <p:childTnLst>
+                              <p:par>
+                                <p:cTn id="35" presetID="1" presetClass="entr" presetSubtype="0" fill="hold" nodeType="clickEffect">
+                                  <p:stCondLst>
+                                    <p:cond delay="0"/>
+                                  </p:stCondLst>
+                                  <p:childTnLst>
+                                    <p:set>
+                                      <p:cBhvr>
+                                        <p:cTn id="36" dur="1" fill="hold">
+                                          <p:stCondLst>
+                                            <p:cond delay="0"/>
+                                          </p:stCondLst>
+                                        </p:cTn>
+                                        <p:tgtEl>
+                                          <p:spTgt spid="3">
+                                            <p:txEl>
+                                              <p:pRg st="10" end="10"/>
+                                            </p:txEl>
+                                          </p:spTgt>
+                                        </p:tgtEl>
+                                        <p:attrNameLst>
+                                          <p:attrName>style.visibility</p:attrName>
+                                        </p:attrNameLst>
+                                      </p:cBhvr>
+                                      <p:to>
+                                        <p:strVal val="visible"/>
+                                      </p:to>
+                                    </p:set>
+                                  </p:childTnLst>
+                                </p:cTn>
+                              </p:par>
+                              <p:par>
+                                <p:cTn id="37" presetID="1" presetClass="entr" presetSubtype="0" fill="hold" nodeType="withEffect">
+                                  <p:stCondLst>
+                                    <p:cond delay="0"/>
+                                  </p:stCondLst>
+                                  <p:childTnLst>
+                                    <p:set>
+                                      <p:cBhvr>
+                                        <p:cTn id="38" dur="1" fill="hold">
+                                          <p:stCondLst>
+                                            <p:cond delay="0"/>
+                                          </p:stCondLst>
+                                        </p:cTn>
+                                        <p:tgtEl>
+                                          <p:spTgt spid="3">
+                                            <p:txEl>
+                                              <p:pRg st="11" end="11"/>
+                                            </p:txEl>
+                                          </p:spTgt>
+                                        </p:tgtEl>
+                                        <p:attrNameLst>
+                                          <p:attrName>style.visibility</p:attrName>
+                                        </p:attrNameLst>
+                                      </p:cBhvr>
+                                      <p:to>
+                                        <p:strVal val="visible"/>
+                                      </p:to>
+                                    </p:set>
+                                  </p:childTnLst>
+                                </p:cTn>
+                              </p:par>
+                            </p:childTnLst>
+                          </p:cTn>
+                        </p:par>
+                      </p:childTnLst>
+                    </p:cTn>
+                  </p:par>
+                  <p:par>
+                    <p:cTn id="39" fill="hold">
+                      <p:stCondLst>
+                        <p:cond delay="indefinite"/>
+                      </p:stCondLst>
+                      <p:childTnLst>
+                        <p:par>
+                          <p:cTn id="40" fill="hold">
+                            <p:stCondLst>
+                              <p:cond delay="0"/>
+                            </p:stCondLst>
+                            <p:childTnLst>
+                              <p:par>
+                                <p:cTn id="41" presetID="1" presetClass="entr" presetSubtype="0" fill="hold" nodeType="clickEffect">
+                                  <p:stCondLst>
+                                    <p:cond delay="0"/>
+                                  </p:stCondLst>
+                                  <p:childTnLst>
+                                    <p:set>
+                                      <p:cBhvr>
+                                        <p:cTn id="42" dur="1" fill="hold">
+                                          <p:stCondLst>
+                                            <p:cond delay="0"/>
+                                          </p:stCondLst>
+                                        </p:cTn>
+                                        <p:tgtEl>
+                                          <p:spTgt spid="3">
+                                            <p:txEl>
+                                              <p:pRg st="12" end="12"/>
+                                            </p:txEl>
+                                          </p:spTgt>
+                                        </p:tgtEl>
+                                        <p:attrNameLst>
+                                          <p:attrName>style.visibility</p:attrName>
+                                        </p:attrNameLst>
+                                      </p:cBhvr>
+                                      <p:to>
+                                        <p:strVal val="visible"/>
+                                      </p:to>
+                                    </p:set>
+                                  </p:childTnLst>
+                                </p:cTn>
+                              </p:par>
+                            </p:childTnLst>
+                          </p:cTn>
+                        </p:par>
+                      </p:childTnLst>
+                    </p:cTn>
+                  </p:par>
+                </p:childTnLst>
+              </p:cTn>
+              <p:prevCondLst>
+                <p:cond evt="onPrev" delay="0">
+                  <p:tgtEl>
+                    <p:sldTgt/>
+                  </p:tgtEl>
+                </p:cond>
+              </p:prevCondLst>
+              <p:nextCondLst>
+                <p:cond evt="onNext" delay="0">
+                  <p:tgtEl>
+                    <p:sldTgt/>
+                  </p:tgtEl>
+                </p:cond>
+              </p:nextCondLst>
+            </p:seq>
+          </p:childTnLst>
+        </p:cTn>
+      </p:par>
+    </p:tnLst>
+  </p:timing>
+</p:sld>
+</file>
+
+<file path=ppt/slides/slide20.xml><?xml version="1.0" encoding="utf-8"?>
 <p:sld xmlns:a="http://schemas.openxmlformats.org/drawingml/2006/main" xmlns:r="http://schemas.openxmlformats.org/officeDocument/2006/relationships" xmlns:p="http://schemas.openxmlformats.org/presentationml/2006/main">
   <p:cSld>
     <p:spTree>
@@ -9538,7 +13270,7 @@
           <a:p>
             <a:r>
               <a:rPr lang="en-IN" dirty="0"/>
-              <a:t>Demonstration – Screenshot for reference</a:t>
+              <a:t>Demonstration – Sample Failure in CI Pipeline</a:t>
             </a:r>
           </a:p>
         </p:txBody>
@@ -9709,971 +13441,7 @@
 </p:sld>
 </file>
 
-<file path=ppt/slides/slide2.xml><?xml version="1.0" encoding="utf-8"?>
-<p:sld xmlns:a="http://schemas.openxmlformats.org/drawingml/2006/main" xmlns:r="http://schemas.openxmlformats.org/officeDocument/2006/relationships" xmlns:p="http://schemas.openxmlformats.org/presentationml/2006/main">
-  <p:cSld>
-    <p:spTree>
-      <p:nvGrpSpPr>
-        <p:cNvPr id="1" name=""/>
-        <p:cNvGrpSpPr/>
-        <p:nvPr/>
-      </p:nvGrpSpPr>
-      <p:grpSpPr>
-        <a:xfrm>
-          <a:off x="0" y="0"/>
-          <a:ext cx="0" cy="0"/>
-          <a:chOff x="0" y="0"/>
-          <a:chExt cx="0" cy="0"/>
-        </a:xfrm>
-      </p:grpSpPr>
-      <p:sp>
-        <p:nvSpPr>
-          <p:cNvPr id="2" name="Title 1">
-            <a:extLst>
-              <a:ext uri="{FF2B5EF4-FFF2-40B4-BE49-F238E27FC236}">
-                <a16:creationId xmlns:a16="http://schemas.microsoft.com/office/drawing/2014/main" id="{852F5C42-3A30-439B-D003-7F54CAAE6B30}"/>
-              </a:ext>
-            </a:extLst>
-          </p:cNvPr>
-          <p:cNvSpPr>
-            <a:spLocks noGrp="1"/>
-          </p:cNvSpPr>
-          <p:nvPr>
-            <p:ph type="title"/>
-          </p:nvPr>
-        </p:nvSpPr>
-        <p:spPr>
-          <a:xfrm>
-            <a:off x="838200" y="365125"/>
-            <a:ext cx="10515600" cy="608481"/>
-          </a:xfrm>
-        </p:spPr>
-        <p:txBody>
-          <a:bodyPr>
-            <a:noAutofit/>
-          </a:bodyPr>
-          <a:lstStyle/>
-          <a:p>
-            <a:r>
-              <a:rPr lang="en-IN" sz="3200" dirty="0"/>
-              <a:t>Agenda</a:t>
-            </a:r>
-          </a:p>
-        </p:txBody>
-      </p:sp>
-      <p:sp>
-        <p:nvSpPr>
-          <p:cNvPr id="3" name="Content Placeholder 2">
-            <a:extLst>
-              <a:ext uri="{FF2B5EF4-FFF2-40B4-BE49-F238E27FC236}">
-                <a16:creationId xmlns:a16="http://schemas.microsoft.com/office/drawing/2014/main" id="{82A3A5A5-34DD-2D68-2A7C-4CFA255198AD}"/>
-              </a:ext>
-            </a:extLst>
-          </p:cNvPr>
-          <p:cNvSpPr>
-            <a:spLocks noGrp="1"/>
-          </p:cNvSpPr>
-          <p:nvPr>
-            <p:ph idx="1"/>
-          </p:nvPr>
-        </p:nvSpPr>
-        <p:spPr>
-          <a:xfrm>
-            <a:off x="838200" y="1124909"/>
-            <a:ext cx="10515600" cy="5052054"/>
-          </a:xfrm>
-        </p:spPr>
-        <p:txBody>
-          <a:bodyPr>
-            <a:normAutofit fontScale="40000" lnSpcReduction="20000"/>
-          </a:bodyPr>
-          <a:lstStyle/>
-          <a:p>
-            <a:pPr>
-              <a:lnSpc>
-                <a:spcPct val="160000"/>
-              </a:lnSpc>
-            </a:pPr>
-            <a:r>
-              <a:rPr lang="en-IN" sz="2900" dirty="0"/>
-              <a:t>Problem Statement, based on real project experiences</a:t>
-            </a:r>
-          </a:p>
-          <a:p>
-            <a:pPr>
-              <a:lnSpc>
-                <a:spcPct val="160000"/>
-              </a:lnSpc>
-            </a:pPr>
-            <a:r>
-              <a:rPr lang="en-IN" sz="2900" dirty="0"/>
-              <a:t>Solution Approach</a:t>
-            </a:r>
-          </a:p>
-          <a:p>
-            <a:pPr lvl="1">
-              <a:lnSpc>
-                <a:spcPct val="160000"/>
-              </a:lnSpc>
-            </a:pPr>
-            <a:r>
-              <a:rPr lang="en-IN" sz="2300" dirty="0"/>
-              <a:t>Expected Dependencies Vs Actual dependencies</a:t>
-            </a:r>
-          </a:p>
-          <a:p>
-            <a:pPr lvl="1">
-              <a:lnSpc>
-                <a:spcPct val="160000"/>
-              </a:lnSpc>
-            </a:pPr>
-            <a:r>
-              <a:rPr lang="en-IN" sz="2300" dirty="0"/>
-              <a:t>Automating Unexpected Dependencies Check</a:t>
-            </a:r>
-          </a:p>
-          <a:p>
-            <a:pPr>
-              <a:lnSpc>
-                <a:spcPct val="160000"/>
-              </a:lnSpc>
-            </a:pPr>
-            <a:r>
-              <a:rPr lang="en-IN" sz="2900" dirty="0"/>
-              <a:t>The Development Workflow with CI Pipeline Checks Implemented</a:t>
-            </a:r>
-          </a:p>
-          <a:p>
-            <a:pPr>
-              <a:lnSpc>
-                <a:spcPct val="160000"/>
-              </a:lnSpc>
-            </a:pPr>
-            <a:r>
-              <a:rPr lang="en-IN" sz="2900" dirty="0"/>
-              <a:t>Demonstration</a:t>
-            </a:r>
-          </a:p>
-          <a:p>
-            <a:pPr lvl="1">
-              <a:lnSpc>
-                <a:spcPct val="160000"/>
-              </a:lnSpc>
-            </a:pPr>
-            <a:r>
-              <a:rPr lang="en-IN" sz="2300" dirty="0"/>
-              <a:t>Example Code base for Demo</a:t>
-            </a:r>
-          </a:p>
-          <a:p>
-            <a:pPr lvl="1">
-              <a:lnSpc>
-                <a:spcPct val="160000"/>
-              </a:lnSpc>
-            </a:pPr>
-            <a:r>
-              <a:rPr lang="en-IN" sz="2300" dirty="0"/>
-              <a:t>Setting up files in repo for dependency monitoring</a:t>
-            </a:r>
-          </a:p>
-          <a:p>
-            <a:pPr lvl="1">
-              <a:lnSpc>
-                <a:spcPct val="160000"/>
-              </a:lnSpc>
-            </a:pPr>
-            <a:r>
-              <a:rPr lang="en-IN" sz="2300" dirty="0"/>
-              <a:t>Triggering the Checks</a:t>
-            </a:r>
-          </a:p>
-          <a:p>
-            <a:pPr>
-              <a:lnSpc>
-                <a:spcPct val="160000"/>
-              </a:lnSpc>
-            </a:pPr>
-            <a:r>
-              <a:rPr lang="en-IN" sz="2900" dirty="0"/>
-              <a:t>Available Tools in </a:t>
-            </a:r>
-            <a:r>
-              <a:rPr lang="en-IN" sz="2900" b="1" i="1" dirty="0" err="1"/>
-              <a:t>sw</a:t>
-            </a:r>
-            <a:r>
-              <a:rPr lang="en-IN" sz="2900" b="1" i="1" dirty="0"/>
-              <a:t>-deps-monitor</a:t>
-            </a:r>
-            <a:r>
-              <a:rPr lang="en-IN" sz="2900" dirty="0"/>
-              <a:t> repo</a:t>
-            </a:r>
-          </a:p>
-          <a:p>
-            <a:pPr lvl="1">
-              <a:lnSpc>
-                <a:spcPct val="160000"/>
-              </a:lnSpc>
-            </a:pPr>
-            <a:r>
-              <a:rPr lang="en-IN" sz="2500" dirty="0"/>
-              <a:t>List of tools used in the CI Pipeline</a:t>
-            </a:r>
-          </a:p>
-          <a:p>
-            <a:pPr lvl="1">
-              <a:lnSpc>
-                <a:spcPct val="160000"/>
-              </a:lnSpc>
-            </a:pPr>
-            <a:r>
-              <a:rPr lang="en-IN" sz="2500" dirty="0"/>
-              <a:t>Additional Helper tools, like dependency visualization</a:t>
-            </a:r>
-          </a:p>
-          <a:p>
-            <a:pPr>
-              <a:lnSpc>
-                <a:spcPct val="160000"/>
-              </a:lnSpc>
-            </a:pPr>
-            <a:r>
-              <a:rPr lang="en-IN" sz="2900" dirty="0"/>
-              <a:t>Introduction to Coupling Metrics for analysing maintainability</a:t>
-            </a:r>
-          </a:p>
-          <a:p>
-            <a:pPr lvl="1">
-              <a:lnSpc>
-                <a:spcPct val="160000"/>
-              </a:lnSpc>
-            </a:pPr>
-            <a:r>
-              <a:rPr lang="en-IN" sz="2500" dirty="0"/>
-              <a:t>Utility to generate a coupling metrics report</a:t>
-            </a:r>
-          </a:p>
-          <a:p>
-            <a:pPr>
-              <a:lnSpc>
-                <a:spcPct val="160000"/>
-              </a:lnSpc>
-            </a:pPr>
-            <a:r>
-              <a:rPr lang="en-IN" sz="2900" dirty="0"/>
-              <a:t>Summary</a:t>
-            </a:r>
-          </a:p>
-          <a:p>
-            <a:pPr lvl="1"/>
-            <a:endParaRPr lang="en-IN" dirty="0"/>
-          </a:p>
-          <a:p>
-            <a:pPr lvl="1"/>
-            <a:endParaRPr lang="en-IN" dirty="0"/>
-          </a:p>
-          <a:p>
-            <a:pPr lvl="1"/>
-            <a:endParaRPr lang="en-IN" dirty="0"/>
-          </a:p>
-          <a:p>
-            <a:endParaRPr lang="en-IN" dirty="0"/>
-          </a:p>
-          <a:p>
-            <a:endParaRPr lang="en-IN" dirty="0"/>
-          </a:p>
-        </p:txBody>
-      </p:sp>
-    </p:spTree>
-    <p:extLst>
-      <p:ext uri="{BB962C8B-B14F-4D97-AF65-F5344CB8AC3E}">
-        <p14:creationId xmlns:p14="http://schemas.microsoft.com/office/powerpoint/2010/main" val="3608631070"/>
-      </p:ext>
-    </p:extLst>
-  </p:cSld>
-  <p:clrMapOvr>
-    <a:masterClrMapping/>
-  </p:clrMapOvr>
-  <p:timing>
-    <p:tnLst>
-      <p:par>
-        <p:cTn id="1" dur="indefinite" restart="never" nodeType="tmRoot">
-          <p:childTnLst>
-            <p:seq concurrent="1" nextAc="seek">
-              <p:cTn id="2" dur="indefinite" nodeType="mainSeq">
-                <p:childTnLst>
-                  <p:par>
-                    <p:cTn id="3" fill="hold">
-                      <p:stCondLst>
-                        <p:cond delay="indefinite"/>
-                      </p:stCondLst>
-                      <p:childTnLst>
-                        <p:par>
-                          <p:cTn id="4" fill="hold">
-                            <p:stCondLst>
-                              <p:cond delay="0"/>
-                            </p:stCondLst>
-                            <p:childTnLst>
-                              <p:par>
-                                <p:cTn id="5" presetID="1" presetClass="entr" presetSubtype="0" fill="hold" nodeType="clickEffect">
-                                  <p:stCondLst>
-                                    <p:cond delay="0"/>
-                                  </p:stCondLst>
-                                  <p:childTnLst>
-                                    <p:set>
-                                      <p:cBhvr>
-                                        <p:cTn id="6" dur="1" fill="hold">
-                                          <p:stCondLst>
-                                            <p:cond delay="0"/>
-                                          </p:stCondLst>
-                                        </p:cTn>
-                                        <p:tgtEl>
-                                          <p:spTgt spid="3">
-                                            <p:txEl>
-                                              <p:pRg st="0" end="0"/>
-                                            </p:txEl>
-                                          </p:spTgt>
-                                        </p:tgtEl>
-                                        <p:attrNameLst>
-                                          <p:attrName>style.visibility</p:attrName>
-                                        </p:attrNameLst>
-                                      </p:cBhvr>
-                                      <p:to>
-                                        <p:strVal val="visible"/>
-                                      </p:to>
-                                    </p:set>
-                                  </p:childTnLst>
-                                </p:cTn>
-                              </p:par>
-                            </p:childTnLst>
-                          </p:cTn>
-                        </p:par>
-                      </p:childTnLst>
-                    </p:cTn>
-                  </p:par>
-                  <p:par>
-                    <p:cTn id="7" fill="hold">
-                      <p:stCondLst>
-                        <p:cond delay="indefinite"/>
-                      </p:stCondLst>
-                      <p:childTnLst>
-                        <p:par>
-                          <p:cTn id="8" fill="hold">
-                            <p:stCondLst>
-                              <p:cond delay="0"/>
-                            </p:stCondLst>
-                            <p:childTnLst>
-                              <p:par>
-                                <p:cTn id="9" presetID="1" presetClass="entr" presetSubtype="0" fill="hold" nodeType="clickEffect">
-                                  <p:stCondLst>
-                                    <p:cond delay="0"/>
-                                  </p:stCondLst>
-                                  <p:childTnLst>
-                                    <p:set>
-                                      <p:cBhvr>
-                                        <p:cTn id="10" dur="1" fill="hold">
-                                          <p:stCondLst>
-                                            <p:cond delay="0"/>
-                                          </p:stCondLst>
-                                        </p:cTn>
-                                        <p:tgtEl>
-                                          <p:spTgt spid="3">
-                                            <p:txEl>
-                                              <p:pRg st="1" end="1"/>
-                                            </p:txEl>
-                                          </p:spTgt>
-                                        </p:tgtEl>
-                                        <p:attrNameLst>
-                                          <p:attrName>style.visibility</p:attrName>
-                                        </p:attrNameLst>
-                                      </p:cBhvr>
-                                      <p:to>
-                                        <p:strVal val="visible"/>
-                                      </p:to>
-                                    </p:set>
-                                  </p:childTnLst>
-                                </p:cTn>
-                              </p:par>
-                              <p:par>
-                                <p:cTn id="11" presetID="1" presetClass="entr" presetSubtype="0" fill="hold" nodeType="withEffect">
-                                  <p:stCondLst>
-                                    <p:cond delay="0"/>
-                                  </p:stCondLst>
-                                  <p:childTnLst>
-                                    <p:set>
-                                      <p:cBhvr>
-                                        <p:cTn id="12" dur="1" fill="hold">
-                                          <p:stCondLst>
-                                            <p:cond delay="0"/>
-                                          </p:stCondLst>
-                                        </p:cTn>
-                                        <p:tgtEl>
-                                          <p:spTgt spid="3">
-                                            <p:txEl>
-                                              <p:pRg st="2" end="2"/>
-                                            </p:txEl>
-                                          </p:spTgt>
-                                        </p:tgtEl>
-                                        <p:attrNameLst>
-                                          <p:attrName>style.visibility</p:attrName>
-                                        </p:attrNameLst>
-                                      </p:cBhvr>
-                                      <p:to>
-                                        <p:strVal val="visible"/>
-                                      </p:to>
-                                    </p:set>
-                                  </p:childTnLst>
-                                </p:cTn>
-                              </p:par>
-                              <p:par>
-                                <p:cTn id="13" presetID="1" presetClass="entr" presetSubtype="0" fill="hold" nodeType="withEffect">
-                                  <p:stCondLst>
-                                    <p:cond delay="0"/>
-                                  </p:stCondLst>
-                                  <p:childTnLst>
-                                    <p:set>
-                                      <p:cBhvr>
-                                        <p:cTn id="14" dur="1" fill="hold">
-                                          <p:stCondLst>
-                                            <p:cond delay="0"/>
-                                          </p:stCondLst>
-                                        </p:cTn>
-                                        <p:tgtEl>
-                                          <p:spTgt spid="3">
-                                            <p:txEl>
-                                              <p:pRg st="3" end="3"/>
-                                            </p:txEl>
-                                          </p:spTgt>
-                                        </p:tgtEl>
-                                        <p:attrNameLst>
-                                          <p:attrName>style.visibility</p:attrName>
-                                        </p:attrNameLst>
-                                      </p:cBhvr>
-                                      <p:to>
-                                        <p:strVal val="visible"/>
-                                      </p:to>
-                                    </p:set>
-                                  </p:childTnLst>
-                                </p:cTn>
-                              </p:par>
-                            </p:childTnLst>
-                          </p:cTn>
-                        </p:par>
-                      </p:childTnLst>
-                    </p:cTn>
-                  </p:par>
-                  <p:par>
-                    <p:cTn id="15" fill="hold">
-                      <p:stCondLst>
-                        <p:cond delay="indefinite"/>
-                      </p:stCondLst>
-                      <p:childTnLst>
-                        <p:par>
-                          <p:cTn id="16" fill="hold">
-                            <p:stCondLst>
-                              <p:cond delay="0"/>
-                            </p:stCondLst>
-                            <p:childTnLst>
-                              <p:par>
-                                <p:cTn id="17" presetID="1" presetClass="entr" presetSubtype="0" fill="hold" nodeType="clickEffect">
-                                  <p:stCondLst>
-                                    <p:cond delay="0"/>
-                                  </p:stCondLst>
-                                  <p:childTnLst>
-                                    <p:set>
-                                      <p:cBhvr>
-                                        <p:cTn id="18" dur="1" fill="hold">
-                                          <p:stCondLst>
-                                            <p:cond delay="0"/>
-                                          </p:stCondLst>
-                                        </p:cTn>
-                                        <p:tgtEl>
-                                          <p:spTgt spid="3">
-                                            <p:txEl>
-                                              <p:pRg st="4" end="4"/>
-                                            </p:txEl>
-                                          </p:spTgt>
-                                        </p:tgtEl>
-                                        <p:attrNameLst>
-                                          <p:attrName>style.visibility</p:attrName>
-                                        </p:attrNameLst>
-                                      </p:cBhvr>
-                                      <p:to>
-                                        <p:strVal val="visible"/>
-                                      </p:to>
-                                    </p:set>
-                                  </p:childTnLst>
-                                </p:cTn>
-                              </p:par>
-                            </p:childTnLst>
-                          </p:cTn>
-                        </p:par>
-                      </p:childTnLst>
-                    </p:cTn>
-                  </p:par>
-                  <p:par>
-                    <p:cTn id="19" fill="hold">
-                      <p:stCondLst>
-                        <p:cond delay="indefinite"/>
-                      </p:stCondLst>
-                      <p:childTnLst>
-                        <p:par>
-                          <p:cTn id="20" fill="hold">
-                            <p:stCondLst>
-                              <p:cond delay="0"/>
-                            </p:stCondLst>
-                            <p:childTnLst>
-                              <p:par>
-                                <p:cTn id="21" presetID="1" presetClass="entr" presetSubtype="0" fill="hold" nodeType="clickEffect">
-                                  <p:stCondLst>
-                                    <p:cond delay="0"/>
-                                  </p:stCondLst>
-                                  <p:childTnLst>
-                                    <p:set>
-                                      <p:cBhvr>
-                                        <p:cTn id="22" dur="1" fill="hold">
-                                          <p:stCondLst>
-                                            <p:cond delay="0"/>
-                                          </p:stCondLst>
-                                        </p:cTn>
-                                        <p:tgtEl>
-                                          <p:spTgt spid="3">
-                                            <p:txEl>
-                                              <p:pRg st="5" end="5"/>
-                                            </p:txEl>
-                                          </p:spTgt>
-                                        </p:tgtEl>
-                                        <p:attrNameLst>
-                                          <p:attrName>style.visibility</p:attrName>
-                                        </p:attrNameLst>
-                                      </p:cBhvr>
-                                      <p:to>
-                                        <p:strVal val="visible"/>
-                                      </p:to>
-                                    </p:set>
-                                  </p:childTnLst>
-                                </p:cTn>
-                              </p:par>
-                              <p:par>
-                                <p:cTn id="23" presetID="1" presetClass="entr" presetSubtype="0" fill="hold" nodeType="withEffect">
-                                  <p:stCondLst>
-                                    <p:cond delay="0"/>
-                                  </p:stCondLst>
-                                  <p:childTnLst>
-                                    <p:set>
-                                      <p:cBhvr>
-                                        <p:cTn id="24" dur="1" fill="hold">
-                                          <p:stCondLst>
-                                            <p:cond delay="0"/>
-                                          </p:stCondLst>
-                                        </p:cTn>
-                                        <p:tgtEl>
-                                          <p:spTgt spid="3">
-                                            <p:txEl>
-                                              <p:pRg st="6" end="6"/>
-                                            </p:txEl>
-                                          </p:spTgt>
-                                        </p:tgtEl>
-                                        <p:attrNameLst>
-                                          <p:attrName>style.visibility</p:attrName>
-                                        </p:attrNameLst>
-                                      </p:cBhvr>
-                                      <p:to>
-                                        <p:strVal val="visible"/>
-                                      </p:to>
-                                    </p:set>
-                                  </p:childTnLst>
-                                </p:cTn>
-                              </p:par>
-                              <p:par>
-                                <p:cTn id="25" presetID="1" presetClass="entr" presetSubtype="0" fill="hold" nodeType="withEffect">
-                                  <p:stCondLst>
-                                    <p:cond delay="0"/>
-                                  </p:stCondLst>
-                                  <p:childTnLst>
-                                    <p:set>
-                                      <p:cBhvr>
-                                        <p:cTn id="26" dur="1" fill="hold">
-                                          <p:stCondLst>
-                                            <p:cond delay="0"/>
-                                          </p:stCondLst>
-                                        </p:cTn>
-                                        <p:tgtEl>
-                                          <p:spTgt spid="3">
-                                            <p:txEl>
-                                              <p:pRg st="7" end="7"/>
-                                            </p:txEl>
-                                          </p:spTgt>
-                                        </p:tgtEl>
-                                        <p:attrNameLst>
-                                          <p:attrName>style.visibility</p:attrName>
-                                        </p:attrNameLst>
-                                      </p:cBhvr>
-                                      <p:to>
-                                        <p:strVal val="visible"/>
-                                      </p:to>
-                                    </p:set>
-                                  </p:childTnLst>
-                                </p:cTn>
-                              </p:par>
-                              <p:par>
-                                <p:cTn id="27" presetID="1" presetClass="entr" presetSubtype="0" fill="hold" nodeType="withEffect">
-                                  <p:stCondLst>
-                                    <p:cond delay="0"/>
-                                  </p:stCondLst>
-                                  <p:childTnLst>
-                                    <p:set>
-                                      <p:cBhvr>
-                                        <p:cTn id="28" dur="1" fill="hold">
-                                          <p:stCondLst>
-                                            <p:cond delay="0"/>
-                                          </p:stCondLst>
-                                        </p:cTn>
-                                        <p:tgtEl>
-                                          <p:spTgt spid="3">
-                                            <p:txEl>
-                                              <p:pRg st="8" end="8"/>
-                                            </p:txEl>
-                                          </p:spTgt>
-                                        </p:tgtEl>
-                                        <p:attrNameLst>
-                                          <p:attrName>style.visibility</p:attrName>
-                                        </p:attrNameLst>
-                                      </p:cBhvr>
-                                      <p:to>
-                                        <p:strVal val="visible"/>
-                                      </p:to>
-                                    </p:set>
-                                  </p:childTnLst>
-                                </p:cTn>
-                              </p:par>
-                            </p:childTnLst>
-                          </p:cTn>
-                        </p:par>
-                      </p:childTnLst>
-                    </p:cTn>
-                  </p:par>
-                  <p:par>
-                    <p:cTn id="29" fill="hold">
-                      <p:stCondLst>
-                        <p:cond delay="indefinite"/>
-                      </p:stCondLst>
-                      <p:childTnLst>
-                        <p:par>
-                          <p:cTn id="30" fill="hold">
-                            <p:stCondLst>
-                              <p:cond delay="0"/>
-                            </p:stCondLst>
-                            <p:childTnLst>
-                              <p:par>
-                                <p:cTn id="31" presetID="1" presetClass="entr" presetSubtype="0" fill="hold" nodeType="clickEffect">
-                                  <p:stCondLst>
-                                    <p:cond delay="0"/>
-                                  </p:stCondLst>
-                                  <p:childTnLst>
-                                    <p:set>
-                                      <p:cBhvr>
-                                        <p:cTn id="32" dur="1" fill="hold">
-                                          <p:stCondLst>
-                                            <p:cond delay="0"/>
-                                          </p:stCondLst>
-                                        </p:cTn>
-                                        <p:tgtEl>
-                                          <p:spTgt spid="3">
-                                            <p:txEl>
-                                              <p:pRg st="9" end="9"/>
-                                            </p:txEl>
-                                          </p:spTgt>
-                                        </p:tgtEl>
-                                        <p:attrNameLst>
-                                          <p:attrName>style.visibility</p:attrName>
-                                        </p:attrNameLst>
-                                      </p:cBhvr>
-                                      <p:to>
-                                        <p:strVal val="visible"/>
-                                      </p:to>
-                                    </p:set>
-                                  </p:childTnLst>
-                                </p:cTn>
-                              </p:par>
-                            </p:childTnLst>
-                          </p:cTn>
-                        </p:par>
-                      </p:childTnLst>
-                    </p:cTn>
-                  </p:par>
-                  <p:par>
-                    <p:cTn id="33" fill="hold">
-                      <p:stCondLst>
-                        <p:cond delay="indefinite"/>
-                      </p:stCondLst>
-                      <p:childTnLst>
-                        <p:par>
-                          <p:cTn id="34" fill="hold">
-                            <p:stCondLst>
-                              <p:cond delay="0"/>
-                            </p:stCondLst>
-                            <p:childTnLst>
-                              <p:par>
-                                <p:cTn id="35" presetID="1" presetClass="entr" presetSubtype="0" fill="hold" nodeType="clickEffect">
-                                  <p:stCondLst>
-                                    <p:cond delay="0"/>
-                                  </p:stCondLst>
-                                  <p:childTnLst>
-                                    <p:set>
-                                      <p:cBhvr>
-                                        <p:cTn id="36" dur="1" fill="hold">
-                                          <p:stCondLst>
-                                            <p:cond delay="0"/>
-                                          </p:stCondLst>
-                                        </p:cTn>
-                                        <p:tgtEl>
-                                          <p:spTgt spid="3">
-                                            <p:txEl>
-                                              <p:pRg st="10" end="10"/>
-                                            </p:txEl>
-                                          </p:spTgt>
-                                        </p:tgtEl>
-                                        <p:attrNameLst>
-                                          <p:attrName>style.visibility</p:attrName>
-                                        </p:attrNameLst>
-                                      </p:cBhvr>
-                                      <p:to>
-                                        <p:strVal val="visible"/>
-                                      </p:to>
-                                    </p:set>
-                                  </p:childTnLst>
-                                </p:cTn>
-                              </p:par>
-                            </p:childTnLst>
-                          </p:cTn>
-                        </p:par>
-                      </p:childTnLst>
-                    </p:cTn>
-                  </p:par>
-                  <p:par>
-                    <p:cTn id="37" fill="hold">
-                      <p:stCondLst>
-                        <p:cond delay="indefinite"/>
-                      </p:stCondLst>
-                      <p:childTnLst>
-                        <p:par>
-                          <p:cTn id="38" fill="hold">
-                            <p:stCondLst>
-                              <p:cond delay="0"/>
-                            </p:stCondLst>
-                            <p:childTnLst>
-                              <p:par>
-                                <p:cTn id="39" presetID="1" presetClass="entr" presetSubtype="0" fill="hold" nodeType="clickEffect">
-                                  <p:stCondLst>
-                                    <p:cond delay="0"/>
-                                  </p:stCondLst>
-                                  <p:childTnLst>
-                                    <p:set>
-                                      <p:cBhvr>
-                                        <p:cTn id="40" dur="1" fill="hold">
-                                          <p:stCondLst>
-                                            <p:cond delay="0"/>
-                                          </p:stCondLst>
-                                        </p:cTn>
-                                        <p:tgtEl>
-                                          <p:spTgt spid="3">
-                                            <p:txEl>
-                                              <p:pRg st="11" end="11"/>
-                                            </p:txEl>
-                                          </p:spTgt>
-                                        </p:tgtEl>
-                                        <p:attrNameLst>
-                                          <p:attrName>style.visibility</p:attrName>
-                                        </p:attrNameLst>
-                                      </p:cBhvr>
-                                      <p:to>
-                                        <p:strVal val="visible"/>
-                                      </p:to>
-                                    </p:set>
-                                  </p:childTnLst>
-                                </p:cTn>
-                              </p:par>
-                            </p:childTnLst>
-                          </p:cTn>
-                        </p:par>
-                      </p:childTnLst>
-                    </p:cTn>
-                  </p:par>
-                  <p:par>
-                    <p:cTn id="41" fill="hold">
-                      <p:stCondLst>
-                        <p:cond delay="indefinite"/>
-                      </p:stCondLst>
-                      <p:childTnLst>
-                        <p:par>
-                          <p:cTn id="42" fill="hold">
-                            <p:stCondLst>
-                              <p:cond delay="0"/>
-                            </p:stCondLst>
-                            <p:childTnLst>
-                              <p:par>
-                                <p:cTn id="43" presetID="1" presetClass="entr" presetSubtype="0" fill="hold" nodeType="clickEffect">
-                                  <p:stCondLst>
-                                    <p:cond delay="0"/>
-                                  </p:stCondLst>
-                                  <p:childTnLst>
-                                    <p:set>
-                                      <p:cBhvr>
-                                        <p:cTn id="44" dur="1" fill="hold">
-                                          <p:stCondLst>
-                                            <p:cond delay="0"/>
-                                          </p:stCondLst>
-                                        </p:cTn>
-                                        <p:tgtEl>
-                                          <p:spTgt spid="3">
-                                            <p:txEl>
-                                              <p:pRg st="12" end="12"/>
-                                            </p:txEl>
-                                          </p:spTgt>
-                                        </p:tgtEl>
-                                        <p:attrNameLst>
-                                          <p:attrName>style.visibility</p:attrName>
-                                        </p:attrNameLst>
-                                      </p:cBhvr>
-                                      <p:to>
-                                        <p:strVal val="visible"/>
-                                      </p:to>
-                                    </p:set>
-                                  </p:childTnLst>
-                                </p:cTn>
-                              </p:par>
-                            </p:childTnLst>
-                          </p:cTn>
-                        </p:par>
-                      </p:childTnLst>
-                    </p:cTn>
-                  </p:par>
-                  <p:par>
-                    <p:cTn id="45" fill="hold">
-                      <p:stCondLst>
-                        <p:cond delay="indefinite"/>
-                      </p:stCondLst>
-                      <p:childTnLst>
-                        <p:par>
-                          <p:cTn id="46" fill="hold">
-                            <p:stCondLst>
-                              <p:cond delay="0"/>
-                            </p:stCondLst>
-                            <p:childTnLst>
-                              <p:par>
-                                <p:cTn id="47" presetID="1" presetClass="entr" presetSubtype="0" fill="hold" nodeType="clickEffect">
-                                  <p:stCondLst>
-                                    <p:cond delay="0"/>
-                                  </p:stCondLst>
-                                  <p:childTnLst>
-                                    <p:set>
-                                      <p:cBhvr>
-                                        <p:cTn id="48" dur="1" fill="hold">
-                                          <p:stCondLst>
-                                            <p:cond delay="0"/>
-                                          </p:stCondLst>
-                                        </p:cTn>
-                                        <p:tgtEl>
-                                          <p:spTgt spid="3">
-                                            <p:txEl>
-                                              <p:pRg st="13" end="13"/>
-                                            </p:txEl>
-                                          </p:spTgt>
-                                        </p:tgtEl>
-                                        <p:attrNameLst>
-                                          <p:attrName>style.visibility</p:attrName>
-                                        </p:attrNameLst>
-                                      </p:cBhvr>
-                                      <p:to>
-                                        <p:strVal val="visible"/>
-                                      </p:to>
-                                    </p:set>
-                                  </p:childTnLst>
-                                </p:cTn>
-                              </p:par>
-                            </p:childTnLst>
-                          </p:cTn>
-                        </p:par>
-                      </p:childTnLst>
-                    </p:cTn>
-                  </p:par>
-                  <p:par>
-                    <p:cTn id="49" fill="hold">
-                      <p:stCondLst>
-                        <p:cond delay="indefinite"/>
-                      </p:stCondLst>
-                      <p:childTnLst>
-                        <p:par>
-                          <p:cTn id="50" fill="hold">
-                            <p:stCondLst>
-                              <p:cond delay="0"/>
-                            </p:stCondLst>
-                            <p:childTnLst>
-                              <p:par>
-                                <p:cTn id="51" presetID="1" presetClass="entr" presetSubtype="0" fill="hold" nodeType="clickEffect">
-                                  <p:stCondLst>
-                                    <p:cond delay="0"/>
-                                  </p:stCondLst>
-                                  <p:childTnLst>
-                                    <p:set>
-                                      <p:cBhvr>
-                                        <p:cTn id="52" dur="1" fill="hold">
-                                          <p:stCondLst>
-                                            <p:cond delay="0"/>
-                                          </p:stCondLst>
-                                        </p:cTn>
-                                        <p:tgtEl>
-                                          <p:spTgt spid="3">
-                                            <p:txEl>
-                                              <p:pRg st="14" end="14"/>
-                                            </p:txEl>
-                                          </p:spTgt>
-                                        </p:tgtEl>
-                                        <p:attrNameLst>
-                                          <p:attrName>style.visibility</p:attrName>
-                                        </p:attrNameLst>
-                                      </p:cBhvr>
-                                      <p:to>
-                                        <p:strVal val="visible"/>
-                                      </p:to>
-                                    </p:set>
-                                  </p:childTnLst>
-                                </p:cTn>
-                              </p:par>
-                            </p:childTnLst>
-                          </p:cTn>
-                        </p:par>
-                      </p:childTnLst>
-                    </p:cTn>
-                  </p:par>
-                </p:childTnLst>
-              </p:cTn>
-              <p:prevCondLst>
-                <p:cond evt="onPrev" delay="0">
-                  <p:tgtEl>
-                    <p:sldTgt/>
-                  </p:tgtEl>
-                </p:cond>
-              </p:prevCondLst>
-              <p:nextCondLst>
-                <p:cond evt="onNext" delay="0">
-                  <p:tgtEl>
-                    <p:sldTgt/>
-                  </p:tgtEl>
-                </p:cond>
-              </p:nextCondLst>
-            </p:seq>
-          </p:childTnLst>
-        </p:cTn>
-      </p:par>
-    </p:tnLst>
-  </p:timing>
-</p:sld>
-</file>
-
-<file path=ppt/slides/slide20.xml><?xml version="1.0" encoding="utf-8"?>
+<file path=ppt/slides/slide21.xml><?xml version="1.0" encoding="utf-8"?>
 <p:sld xmlns:a="http://schemas.openxmlformats.org/drawingml/2006/main" xmlns:r="http://schemas.openxmlformats.org/officeDocument/2006/relationships" xmlns:p="http://schemas.openxmlformats.org/presentationml/2006/main">
   <p:cSld>
     <p:spTree>
@@ -10726,17 +13494,17 @@
           <a:p>
             <a:r>
               <a:rPr lang="en-IN" dirty="0"/>
-              <a:t>Demonstration – Screenshot for reference</a:t>
+              <a:t>Demonstration – Merge Blocked by CI Pipeline</a:t>
             </a:r>
           </a:p>
         </p:txBody>
       </p:sp>
       <p:pic>
         <p:nvPicPr>
-          <p:cNvPr id="10" name="Picture 9">
+          <p:cNvPr id="6" name="Picture 5">
             <a:extLst>
               <a:ext uri="{FF2B5EF4-FFF2-40B4-BE49-F238E27FC236}">
-                <a16:creationId xmlns:a16="http://schemas.microsoft.com/office/drawing/2014/main" id="{7450B9C4-E70B-CAF2-0D85-2AB2A07576D8}"/>
+                <a16:creationId xmlns:a16="http://schemas.microsoft.com/office/drawing/2014/main" id="{EA69DFD6-332A-5FF9-8CDA-274998E4D9BB}"/>
               </a:ext>
             </a:extLst>
           </p:cNvPr>
@@ -10753,8 +13521,8 @@
         </p:blipFill>
         <p:spPr>
           <a:xfrm>
-            <a:off x="690282" y="966789"/>
-            <a:ext cx="10150900" cy="5337203"/>
+            <a:off x="737884" y="899485"/>
+            <a:ext cx="9285879" cy="5583962"/>
           </a:xfrm>
           <a:prstGeom prst="rect">
             <a:avLst/>
@@ -10774,7 +13542,425 @@
 </p:sld>
 </file>
 
-<file path=ppt/slides/slide21.xml><?xml version="1.0" encoding="utf-8"?>
+<file path=ppt/slides/slide22.xml><?xml version="1.0" encoding="utf-8"?>
+<p:sld xmlns:a="http://schemas.openxmlformats.org/drawingml/2006/main" xmlns:r="http://schemas.openxmlformats.org/officeDocument/2006/relationships" xmlns:p="http://schemas.openxmlformats.org/presentationml/2006/main">
+  <p:cSld>
+    <p:spTree>
+      <p:nvGrpSpPr>
+        <p:cNvPr id="1" name="">
+          <a:extLst>
+            <a:ext uri="{FF2B5EF4-FFF2-40B4-BE49-F238E27FC236}">
+              <a16:creationId xmlns:a16="http://schemas.microsoft.com/office/drawing/2014/main" id="{265A1CA0-21CD-BAC7-9DAB-A3CDA60439D8}"/>
+            </a:ext>
+          </a:extLst>
+        </p:cNvPr>
+        <p:cNvGrpSpPr/>
+        <p:nvPr/>
+      </p:nvGrpSpPr>
+      <p:grpSpPr>
+        <a:xfrm>
+          <a:off x="0" y="0"/>
+          <a:ext cx="0" cy="0"/>
+          <a:chOff x="0" y="0"/>
+          <a:chExt cx="0" cy="0"/>
+        </a:xfrm>
+      </p:grpSpPr>
+      <p:sp>
+        <p:nvSpPr>
+          <p:cNvPr id="2" name="Title 1">
+            <a:extLst>
+              <a:ext uri="{FF2B5EF4-FFF2-40B4-BE49-F238E27FC236}">
+                <a16:creationId xmlns:a16="http://schemas.microsoft.com/office/drawing/2014/main" id="{7CA5768D-3B64-E0EB-AE3D-8A99EA6C84A9}"/>
+              </a:ext>
+            </a:extLst>
+          </p:cNvPr>
+          <p:cNvSpPr>
+            <a:spLocks noGrp="1"/>
+          </p:cNvSpPr>
+          <p:nvPr>
+            <p:ph type="title"/>
+          </p:nvPr>
+        </p:nvSpPr>
+        <p:spPr>
+          <a:xfrm>
+            <a:off x="627743" y="238785"/>
+            <a:ext cx="10515600" cy="512989"/>
+          </a:xfrm>
+        </p:spPr>
+        <p:txBody>
+          <a:bodyPr>
+            <a:normAutofit fontScale="90000"/>
+          </a:bodyPr>
+          <a:lstStyle/>
+          <a:p>
+            <a:r>
+              <a:rPr lang="en-IN" dirty="0"/>
+              <a:t>List of Available YMLs</a:t>
+            </a:r>
+          </a:p>
+        </p:txBody>
+      </p:sp>
+      <p:graphicFrame>
+        <p:nvGraphicFramePr>
+          <p:cNvPr id="6" name="Content Placeholder 5">
+            <a:extLst>
+              <a:ext uri="{FF2B5EF4-FFF2-40B4-BE49-F238E27FC236}">
+                <a16:creationId xmlns:a16="http://schemas.microsoft.com/office/drawing/2014/main" id="{38220C76-8BC1-9235-6F66-0AB3C5CBB94E}"/>
+              </a:ext>
+            </a:extLst>
+          </p:cNvPr>
+          <p:cNvGraphicFramePr>
+            <a:graphicFrameLocks noGrp="1"/>
+          </p:cNvGraphicFramePr>
+          <p:nvPr>
+            <p:ph idx="1"/>
+            <p:extLst>
+              <p:ext uri="{D42A27DB-BD31-4B8C-83A1-F6EECF244321}">
+                <p14:modId xmlns:p14="http://schemas.microsoft.com/office/powerpoint/2010/main" val="3471445008"/>
+              </p:ext>
+            </p:extLst>
+          </p:nvPr>
+        </p:nvGraphicFramePr>
+        <p:xfrm>
+          <a:off x="627746" y="867682"/>
+          <a:ext cx="10515597" cy="3937000"/>
+        </p:xfrm>
+        <a:graphic>
+          <a:graphicData uri="http://schemas.openxmlformats.org/drawingml/2006/table">
+            <a:tbl>
+              <a:tblPr firstRow="1" bandRow="1">
+                <a:tableStyleId>{5C22544A-7EE6-4342-B048-85BDC9FD1C3A}</a:tableStyleId>
+              </a:tblPr>
+              <a:tblGrid>
+                <a:gridCol w="852714">
+                  <a:extLst>
+                    <a:ext uri="{9D8B030D-6E8A-4147-A177-3AD203B41FA5}">
+                      <a16:colId xmlns:a16="http://schemas.microsoft.com/office/drawing/2014/main" val="327423408"/>
+                    </a:ext>
+                  </a:extLst>
+                </a:gridCol>
+                <a:gridCol w="2336797">
+                  <a:extLst>
+                    <a:ext uri="{9D8B030D-6E8A-4147-A177-3AD203B41FA5}">
+                      <a16:colId xmlns:a16="http://schemas.microsoft.com/office/drawing/2014/main" val="1623581070"/>
+                    </a:ext>
+                  </a:extLst>
+                </a:gridCol>
+                <a:gridCol w="7326086">
+                  <a:extLst>
+                    <a:ext uri="{9D8B030D-6E8A-4147-A177-3AD203B41FA5}">
+                      <a16:colId xmlns:a16="http://schemas.microsoft.com/office/drawing/2014/main" val="2351187834"/>
+                    </a:ext>
+                  </a:extLst>
+                </a:gridCol>
+              </a:tblGrid>
+              <a:tr h="370840">
+                <a:tc>
+                  <a:txBody>
+                    <a:bodyPr/>
+                    <a:lstStyle/>
+                    <a:p>
+                      <a:r>
+                        <a:rPr lang="en-IN" dirty="0"/>
+                        <a:t>S. No.</a:t>
+                      </a:r>
+                    </a:p>
+                  </a:txBody>
+                  <a:tcPr/>
+                </a:tc>
+                <a:tc>
+                  <a:txBody>
+                    <a:bodyPr/>
+                    <a:lstStyle/>
+                    <a:p>
+                      <a:r>
+                        <a:rPr lang="en-IN" dirty="0"/>
+                        <a:t>Name</a:t>
+                      </a:r>
+                    </a:p>
+                  </a:txBody>
+                  <a:tcPr/>
+                </a:tc>
+                <a:tc>
+                  <a:txBody>
+                    <a:bodyPr/>
+                    <a:lstStyle/>
+                    <a:p>
+                      <a:r>
+                        <a:rPr lang="en-IN" dirty="0"/>
+                        <a:t>Description</a:t>
+                      </a:r>
+                    </a:p>
+                  </a:txBody>
+                  <a:tcPr/>
+                </a:tc>
+                <a:extLst>
+                  <a:ext uri="{0D108BD9-81ED-4DB2-BD59-A6C34878D82A}">
+                    <a16:rowId xmlns:a16="http://schemas.microsoft.com/office/drawing/2014/main" val="1747284999"/>
+                  </a:ext>
+                </a:extLst>
+              </a:tr>
+              <a:tr h="370840">
+                <a:tc>
+                  <a:txBody>
+                    <a:bodyPr/>
+                    <a:lstStyle/>
+                    <a:p>
+                      <a:r>
+                        <a:rPr lang="en-IN" dirty="0"/>
+                        <a:t>1.</a:t>
+                      </a:r>
+                    </a:p>
+                  </a:txBody>
+                  <a:tcPr/>
+                </a:tc>
+                <a:tc>
+                  <a:txBody>
+                    <a:bodyPr/>
+                    <a:lstStyle/>
+                    <a:p>
+                      <a:r>
+                        <a:rPr lang="en-US" sz="1800" b="0" kern="1200" dirty="0">
+                          <a:solidFill>
+                            <a:schemeClr val="tx1"/>
+                          </a:solidFill>
+                          <a:effectLst/>
+                          <a:latin typeface="+mn-lt"/>
+                          <a:ea typeface="+mn-ea"/>
+                          <a:cs typeface="+mn-cs"/>
+                        </a:rPr>
+                        <a:t>DependenciesCheckModifiedLibraries.yml</a:t>
+                      </a:r>
+                      <a:endParaRPr lang="en-IN" dirty="0"/>
+                    </a:p>
+                  </a:txBody>
+                  <a:tcPr/>
+                </a:tc>
+                <a:tc>
+                  <a:txBody>
+                    <a:bodyPr/>
+                    <a:lstStyle/>
+                    <a:p>
+                      <a:r>
+                        <a:rPr lang="en-US" sz="1800" b="0" kern="1200" dirty="0">
+                          <a:solidFill>
+                            <a:schemeClr val="tx1"/>
+                          </a:solidFill>
+                          <a:effectLst/>
+                          <a:latin typeface="+mn-lt"/>
+                          <a:ea typeface="+mn-ea"/>
+                          <a:cs typeface="+mn-cs"/>
+                        </a:rPr>
+                        <a:t>Implements Automated Dependency Checks on libraries that are modified in the current PR.</a:t>
+                      </a:r>
+                      <a:endParaRPr lang="en-IN" dirty="0"/>
+                    </a:p>
+                  </a:txBody>
+                  <a:tcPr/>
+                </a:tc>
+                <a:extLst>
+                  <a:ext uri="{0D108BD9-81ED-4DB2-BD59-A6C34878D82A}">
+                    <a16:rowId xmlns:a16="http://schemas.microsoft.com/office/drawing/2014/main" val="1395820696"/>
+                  </a:ext>
+                </a:extLst>
+              </a:tr>
+              <a:tr h="370840">
+                <a:tc>
+                  <a:txBody>
+                    <a:bodyPr/>
+                    <a:lstStyle/>
+                    <a:p>
+                      <a:r>
+                        <a:rPr lang="en-IN" dirty="0"/>
+                        <a:t>2. </a:t>
+                      </a:r>
+                    </a:p>
+                  </a:txBody>
+                  <a:tcPr/>
+                </a:tc>
+                <a:tc>
+                  <a:txBody>
+                    <a:bodyPr/>
+                    <a:lstStyle/>
+                    <a:p>
+                      <a:r>
+                        <a:rPr lang="en-US" sz="1800" b="0" kern="1200" dirty="0">
+                          <a:solidFill>
+                            <a:schemeClr val="tx1"/>
+                          </a:solidFill>
+                          <a:effectLst/>
+                          <a:latin typeface="+mn-lt"/>
+                          <a:ea typeface="+mn-ea"/>
+                          <a:cs typeface="+mn-cs"/>
+                        </a:rPr>
+                        <a:t>DependenciesCheckAllLibraries.yml</a:t>
+                      </a:r>
+                      <a:endParaRPr lang="en-IN" dirty="0"/>
+                    </a:p>
+                  </a:txBody>
+                  <a:tcPr/>
+                </a:tc>
+                <a:tc>
+                  <a:txBody>
+                    <a:bodyPr/>
+                    <a:lstStyle/>
+                    <a:p>
+                      <a:r>
+                        <a:rPr lang="en-US" sz="1800" b="0" kern="1200" dirty="0">
+                          <a:solidFill>
+                            <a:schemeClr val="tx1"/>
+                          </a:solidFill>
+                          <a:effectLst/>
+                          <a:latin typeface="+mn-lt"/>
+                          <a:ea typeface="+mn-ea"/>
+                          <a:cs typeface="+mn-cs"/>
+                        </a:rPr>
+                        <a:t>Implements a scheduled Automated Dependency check on all the libraries in the repository.</a:t>
+                      </a:r>
+                    </a:p>
+                    <a:p>
+                      <a:r>
+                        <a:rPr lang="en-US" sz="1800" b="0" kern="1200" dirty="0">
+                          <a:solidFill>
+                            <a:schemeClr val="tx1"/>
+                          </a:solidFill>
+                          <a:effectLst/>
+                          <a:latin typeface="+mn-lt"/>
+                          <a:ea typeface="+mn-ea"/>
+                          <a:cs typeface="+mn-cs"/>
+                        </a:rPr>
+                        <a:t>Regenerates the Consolidated Actual Dependencies List (adeps) file and creates a PR automatically if there are new changes observed in the adeps file.</a:t>
+                      </a:r>
+                    </a:p>
+                    <a:p>
+                      <a:r>
+                        <a:rPr lang="en-US" sz="1800" b="0" kern="1200" dirty="0">
+                          <a:solidFill>
+                            <a:schemeClr val="tx1"/>
+                          </a:solidFill>
+                          <a:effectLst/>
+                          <a:latin typeface="+mn-lt"/>
+                          <a:ea typeface="+mn-ea"/>
+                          <a:cs typeface="+mn-cs"/>
+                        </a:rPr>
+                        <a:t>This helps report any changes that were not covered in any PRs. Example: If a library is modified, only its section is updated in the previous </a:t>
+                      </a:r>
+                      <a:r>
+                        <a:rPr lang="en-US" sz="1800" b="0" kern="1200" dirty="0" err="1">
+                          <a:solidFill>
+                            <a:schemeClr val="tx1"/>
+                          </a:solidFill>
+                          <a:effectLst/>
+                          <a:latin typeface="+mn-lt"/>
+                          <a:ea typeface="+mn-ea"/>
+                          <a:cs typeface="+mn-cs"/>
+                        </a:rPr>
+                        <a:t>yml</a:t>
+                      </a:r>
+                      <a:r>
+                        <a:rPr lang="en-US" sz="1800" b="0" kern="1200" dirty="0">
+                          <a:solidFill>
+                            <a:schemeClr val="tx1"/>
+                          </a:solidFill>
+                          <a:effectLst/>
+                          <a:latin typeface="+mn-lt"/>
+                          <a:ea typeface="+mn-ea"/>
+                          <a:cs typeface="+mn-cs"/>
+                        </a:rPr>
+                        <a:t>, other affected changes can also be observed here.</a:t>
+                      </a:r>
+                      <a:endParaRPr lang="en-IN" dirty="0"/>
+                    </a:p>
+                  </a:txBody>
+                  <a:tcPr/>
+                </a:tc>
+                <a:extLst>
+                  <a:ext uri="{0D108BD9-81ED-4DB2-BD59-A6C34878D82A}">
+                    <a16:rowId xmlns:a16="http://schemas.microsoft.com/office/drawing/2014/main" val="104046521"/>
+                  </a:ext>
+                </a:extLst>
+              </a:tr>
+              <a:tr h="370840">
+                <a:tc>
+                  <a:txBody>
+                    <a:bodyPr/>
+                    <a:lstStyle/>
+                    <a:p>
+                      <a:r>
+                        <a:rPr lang="en-IN" dirty="0"/>
+                        <a:t>3. </a:t>
+                      </a:r>
+                    </a:p>
+                  </a:txBody>
+                  <a:tcPr/>
+                </a:tc>
+                <a:tc>
+                  <a:txBody>
+                    <a:bodyPr/>
+                    <a:lstStyle/>
+                    <a:p>
+                      <a:r>
+                        <a:rPr lang="en-US" sz="1800" b="0" kern="1200" dirty="0">
+                          <a:solidFill>
+                            <a:schemeClr val="tx1"/>
+                          </a:solidFill>
+                          <a:effectLst/>
+                          <a:latin typeface="+mn-lt"/>
+                          <a:ea typeface="+mn-ea"/>
+                          <a:cs typeface="+mn-cs"/>
+                        </a:rPr>
+                        <a:t>PRBaseBranchSyncCheck.yml</a:t>
+                      </a:r>
+                      <a:endParaRPr lang="en-IN" dirty="0"/>
+                    </a:p>
+                  </a:txBody>
+                  <a:tcPr/>
+                </a:tc>
+                <a:tc>
+                  <a:txBody>
+                    <a:bodyPr/>
+                    <a:lstStyle/>
+                    <a:p>
+                      <a:r>
+                        <a:rPr lang="en-US" sz="1800" b="0" kern="1200" dirty="0">
+                          <a:solidFill>
+                            <a:schemeClr val="tx1"/>
+                          </a:solidFill>
+                          <a:effectLst/>
+                          <a:latin typeface="+mn-lt"/>
+                          <a:ea typeface="+mn-ea"/>
+                          <a:cs typeface="+mn-cs"/>
+                        </a:rPr>
+                        <a:t>Checks if the base branch is in sync with the head branch in the PR.</a:t>
+                      </a:r>
+                    </a:p>
+                  </a:txBody>
+                  <a:tcPr/>
+                </a:tc>
+                <a:extLst>
+                  <a:ext uri="{0D108BD9-81ED-4DB2-BD59-A6C34878D82A}">
+                    <a16:rowId xmlns:a16="http://schemas.microsoft.com/office/drawing/2014/main" val="1819082634"/>
+                  </a:ext>
+                </a:extLst>
+              </a:tr>
+            </a:tbl>
+          </a:graphicData>
+        </a:graphic>
+      </p:graphicFrame>
+    </p:spTree>
+    <p:extLst>
+      <p:ext uri="{BB962C8B-B14F-4D97-AF65-F5344CB8AC3E}">
+        <p14:creationId xmlns:p14="http://schemas.microsoft.com/office/powerpoint/2010/main" val="181779165"/>
+      </p:ext>
+    </p:extLst>
+  </p:cSld>
+  <p:clrMapOvr>
+    <a:masterClrMapping/>
+  </p:clrMapOvr>
+</p:sld>
+</file>
+
+<file path=ppt/slides/slide23.xml><?xml version="1.0" encoding="utf-8"?>
 <p:sld xmlns:a="http://schemas.openxmlformats.org/drawingml/2006/main" xmlns:r="http://schemas.openxmlformats.org/officeDocument/2006/relationships" xmlns:p="http://schemas.openxmlformats.org/presentationml/2006/main">
   <p:cSld>
     <p:spTree>
@@ -11355,7 +14541,7 @@
 </p:sld>
 </file>
 
-<file path=ppt/slides/slide22.xml><?xml version="1.0" encoding="utf-8"?>
+<file path=ppt/slides/slide24.xml><?xml version="1.0" encoding="utf-8"?>
 <p:sld xmlns:a="http://schemas.openxmlformats.org/drawingml/2006/main" xmlns:r="http://schemas.openxmlformats.org/officeDocument/2006/relationships" xmlns:p="http://schemas.openxmlformats.org/presentationml/2006/main">
   <p:cSld>
     <p:spTree>
@@ -11783,7 +14969,159 @@
 </p:sld>
 </file>
 
-<file path=ppt/slides/slide23.xml><?xml version="1.0" encoding="utf-8"?>
+<file path=ppt/slides/slide25.xml><?xml version="1.0" encoding="utf-8"?>
+<p:sld xmlns:a="http://schemas.openxmlformats.org/drawingml/2006/main" xmlns:r="http://schemas.openxmlformats.org/officeDocument/2006/relationships" xmlns:p="http://schemas.openxmlformats.org/presentationml/2006/main">
+  <p:cSld>
+    <p:spTree>
+      <p:nvGrpSpPr>
+        <p:cNvPr id="1" name=""/>
+        <p:cNvGrpSpPr/>
+        <p:nvPr/>
+      </p:nvGrpSpPr>
+      <p:grpSpPr>
+        <a:xfrm>
+          <a:off x="0" y="0"/>
+          <a:ext cx="0" cy="0"/>
+          <a:chOff x="0" y="0"/>
+          <a:chExt cx="0" cy="0"/>
+        </a:xfrm>
+      </p:grpSpPr>
+      <p:sp>
+        <p:nvSpPr>
+          <p:cNvPr id="2" name="Title 1">
+            <a:extLst>
+              <a:ext uri="{FF2B5EF4-FFF2-40B4-BE49-F238E27FC236}">
+                <a16:creationId xmlns:a16="http://schemas.microsoft.com/office/drawing/2014/main" id="{66D9FEC2-1084-062E-AE2A-37254D8DFC24}"/>
+              </a:ext>
+            </a:extLst>
+          </p:cNvPr>
+          <p:cNvSpPr>
+            <a:spLocks noGrp="1"/>
+          </p:cNvSpPr>
+          <p:nvPr>
+            <p:ph type="title"/>
+          </p:nvPr>
+        </p:nvSpPr>
+        <p:spPr>
+          <a:xfrm>
+            <a:off x="838200" y="246715"/>
+            <a:ext cx="10515600" cy="634794"/>
+          </a:xfrm>
+        </p:spPr>
+        <p:txBody>
+          <a:bodyPr>
+            <a:normAutofit fontScale="90000"/>
+          </a:bodyPr>
+          <a:lstStyle/>
+          <a:p>
+            <a:r>
+              <a:rPr lang="en-IN" dirty="0"/>
+              <a:t>Dependency Visualization Tools</a:t>
+            </a:r>
+          </a:p>
+        </p:txBody>
+      </p:sp>
+      <p:sp>
+        <p:nvSpPr>
+          <p:cNvPr id="3" name="Content Placeholder 2">
+            <a:extLst>
+              <a:ext uri="{FF2B5EF4-FFF2-40B4-BE49-F238E27FC236}">
+                <a16:creationId xmlns:a16="http://schemas.microsoft.com/office/drawing/2014/main" id="{48393F16-ABB0-7569-8D8D-7EDE66D508D6}"/>
+              </a:ext>
+            </a:extLst>
+          </p:cNvPr>
+          <p:cNvSpPr>
+            <a:spLocks noGrp="1"/>
+          </p:cNvSpPr>
+          <p:nvPr>
+            <p:ph idx="1"/>
+          </p:nvPr>
+        </p:nvSpPr>
+        <p:spPr>
+          <a:xfrm>
+            <a:off x="7117848" y="1532770"/>
+            <a:ext cx="4400961" cy="3124749"/>
+          </a:xfrm>
+        </p:spPr>
+        <p:txBody>
+          <a:bodyPr>
+            <a:normAutofit fontScale="92500" lnSpcReduction="10000"/>
+          </a:bodyPr>
+          <a:lstStyle/>
+          <a:p>
+            <a:pPr>
+              <a:lnSpc>
+                <a:spcPct val="150000"/>
+              </a:lnSpc>
+            </a:pPr>
+            <a:r>
+              <a:rPr lang="en-US" dirty="0"/>
+              <a:t>generate_full_dependency_graph.py</a:t>
+            </a:r>
+          </a:p>
+          <a:p>
+            <a:pPr lvl="1">
+              <a:lnSpc>
+                <a:spcPct val="150000"/>
+              </a:lnSpc>
+            </a:pPr>
+            <a:r>
+              <a:rPr lang="en-US" dirty="0"/>
+              <a:t>Script to generate a visualization for all the libraries and its dependencies.</a:t>
+            </a:r>
+          </a:p>
+        </p:txBody>
+      </p:sp>
+      <p:pic>
+        <p:nvPicPr>
+          <p:cNvPr id="5" name="Picture 4">
+            <a:extLst>
+              <a:ext uri="{FF2B5EF4-FFF2-40B4-BE49-F238E27FC236}">
+                <a16:creationId xmlns:a16="http://schemas.microsoft.com/office/drawing/2014/main" id="{C27821DB-5EFD-4961-0045-3445E5319AEE}"/>
+              </a:ext>
+            </a:extLst>
+          </p:cNvPr>
+          <p:cNvPicPr>
+            <a:picLocks noChangeAspect="1"/>
+          </p:cNvPicPr>
+          <p:nvPr/>
+        </p:nvPicPr>
+        <p:blipFill>
+          <a:blip r:embed="rId2">
+            <a:extLst>
+              <a:ext uri="{28A0092B-C50C-407E-A947-70E740481C1C}">
+                <a14:useLocalDpi xmlns:a14="http://schemas.microsoft.com/office/drawing/2010/main" val="0"/>
+              </a:ext>
+            </a:extLst>
+          </a:blip>
+          <a:stretch>
+            <a:fillRect/>
+          </a:stretch>
+        </p:blipFill>
+        <p:spPr>
+          <a:xfrm>
+            <a:off x="361128" y="1124909"/>
+            <a:ext cx="6667500" cy="4762500"/>
+          </a:xfrm>
+          <a:prstGeom prst="rect">
+            <a:avLst/>
+          </a:prstGeom>
+        </p:spPr>
+      </p:pic>
+    </p:spTree>
+    <p:extLst>
+      <p:ext uri="{BB962C8B-B14F-4D97-AF65-F5344CB8AC3E}">
+        <p14:creationId xmlns:p14="http://schemas.microsoft.com/office/powerpoint/2010/main" val="2815105258"/>
+      </p:ext>
+    </p:extLst>
+  </p:cSld>
+  <p:clrMapOvr>
+    <a:masterClrMapping/>
+  </p:clrMapOvr>
+</p:sld>
+</file>
+
+<file path=ppt/slides/slide26.xml><?xml version="1.0" encoding="utf-8"?>
 <p:sld xmlns:a="http://schemas.openxmlformats.org/drawingml/2006/main" xmlns:r="http://schemas.openxmlformats.org/officeDocument/2006/relationships" xmlns:p="http://schemas.openxmlformats.org/presentationml/2006/main">
   <p:cSld>
     <p:spTree>
@@ -11791,7 +15129,7 @@
         <p:cNvPr id="1" name="">
           <a:extLst>
             <a:ext uri="{FF2B5EF4-FFF2-40B4-BE49-F238E27FC236}">
-              <a16:creationId xmlns:a16="http://schemas.microsoft.com/office/drawing/2014/main" id="{265A1CA0-21CD-BAC7-9DAB-A3CDA60439D8}"/>
+              <a16:creationId xmlns:a16="http://schemas.microsoft.com/office/drawing/2014/main" id="{34DB26C9-7193-ACE9-F376-68A8B452788A}"/>
             </a:ext>
           </a:extLst>
         </p:cNvPr>
@@ -11811,7 +15149,7 @@
           <p:cNvPr id="2" name="Title 1">
             <a:extLst>
               <a:ext uri="{FF2B5EF4-FFF2-40B4-BE49-F238E27FC236}">
-                <a16:creationId xmlns:a16="http://schemas.microsoft.com/office/drawing/2014/main" id="{7CA5768D-3B64-E0EB-AE3D-8A99EA6C84A9}"/>
+                <a16:creationId xmlns:a16="http://schemas.microsoft.com/office/drawing/2014/main" id="{99202D96-D278-67A4-B53B-04DEDDBD00F1}"/>
               </a:ext>
             </a:extLst>
           </p:cNvPr>
@@ -11824,8 +15162,8 @@
         </p:nvSpPr>
         <p:spPr>
           <a:xfrm>
-            <a:off x="627743" y="238785"/>
-            <a:ext cx="10515600" cy="512989"/>
+            <a:off x="838200" y="246715"/>
+            <a:ext cx="10515600" cy="634794"/>
           </a:xfrm>
         </p:spPr>
         <p:txBody>
@@ -11836,362 +15174,228 @@
           <a:p>
             <a:r>
               <a:rPr lang="en-IN" dirty="0"/>
-              <a:t>List of Available YMLs</a:t>
+              <a:t>Dependency Visualization Tools</a:t>
             </a:r>
           </a:p>
         </p:txBody>
       </p:sp>
-      <p:graphicFrame>
-        <p:nvGraphicFramePr>
-          <p:cNvPr id="6" name="Content Placeholder 5">
+      <p:sp>
+        <p:nvSpPr>
+          <p:cNvPr id="3" name="Content Placeholder 2">
             <a:extLst>
               <a:ext uri="{FF2B5EF4-FFF2-40B4-BE49-F238E27FC236}">
-                <a16:creationId xmlns:a16="http://schemas.microsoft.com/office/drawing/2014/main" id="{38220C76-8BC1-9235-6F66-0AB3C5CBB94E}"/>
+                <a16:creationId xmlns:a16="http://schemas.microsoft.com/office/drawing/2014/main" id="{70B932A9-53FA-766C-2B8B-869C85D0A9BF}"/>
               </a:ext>
             </a:extLst>
           </p:cNvPr>
-          <p:cNvGraphicFramePr>
-            <a:graphicFrameLocks noGrp="1"/>
-          </p:cNvGraphicFramePr>
+          <p:cNvSpPr>
+            <a:spLocks noGrp="1"/>
+          </p:cNvSpPr>
           <p:nvPr>
             <p:ph idx="1"/>
-            <p:extLst>
-              <p:ext uri="{D42A27DB-BD31-4B8C-83A1-F6EECF244321}">
-                <p14:modId xmlns:p14="http://schemas.microsoft.com/office/powerpoint/2010/main" val="3471445008"/>
-              </p:ext>
-            </p:extLst>
           </p:nvPr>
-        </p:nvGraphicFramePr>
-        <p:xfrm>
-          <a:off x="627746" y="867682"/>
-          <a:ext cx="10515597" cy="3937000"/>
-        </p:xfrm>
-        <a:graphic>
-          <a:graphicData uri="http://schemas.openxmlformats.org/drawingml/2006/table">
-            <a:tbl>
-              <a:tblPr firstRow="1" bandRow="1">
-                <a:tableStyleId>{5C22544A-7EE6-4342-B048-85BDC9FD1C3A}</a:tableStyleId>
-              </a:tblPr>
-              <a:tblGrid>
-                <a:gridCol w="852714">
-                  <a:extLst>
-                    <a:ext uri="{9D8B030D-6E8A-4147-A177-3AD203B41FA5}">
-                      <a16:colId xmlns:a16="http://schemas.microsoft.com/office/drawing/2014/main" val="327423408"/>
-                    </a:ext>
-                  </a:extLst>
-                </a:gridCol>
-                <a:gridCol w="2336797">
-                  <a:extLst>
-                    <a:ext uri="{9D8B030D-6E8A-4147-A177-3AD203B41FA5}">
-                      <a16:colId xmlns:a16="http://schemas.microsoft.com/office/drawing/2014/main" val="1623581070"/>
-                    </a:ext>
-                  </a:extLst>
-                </a:gridCol>
-                <a:gridCol w="7326086">
-                  <a:extLst>
-                    <a:ext uri="{9D8B030D-6E8A-4147-A177-3AD203B41FA5}">
-                      <a16:colId xmlns:a16="http://schemas.microsoft.com/office/drawing/2014/main" val="2351187834"/>
-                    </a:ext>
-                  </a:extLst>
-                </a:gridCol>
-              </a:tblGrid>
-              <a:tr h="370840">
-                <a:tc>
-                  <a:txBody>
-                    <a:bodyPr/>
-                    <a:lstStyle/>
-                    <a:p>
-                      <a:r>
-                        <a:rPr lang="en-IN" dirty="0"/>
-                        <a:t>S. No.</a:t>
-                      </a:r>
-                    </a:p>
-                  </a:txBody>
-                  <a:tcPr/>
-                </a:tc>
-                <a:tc>
-                  <a:txBody>
-                    <a:bodyPr/>
-                    <a:lstStyle/>
-                    <a:p>
-                      <a:r>
-                        <a:rPr lang="en-IN" dirty="0"/>
-                        <a:t>Name</a:t>
-                      </a:r>
-                    </a:p>
-                  </a:txBody>
-                  <a:tcPr/>
-                </a:tc>
-                <a:tc>
-                  <a:txBody>
-                    <a:bodyPr/>
-                    <a:lstStyle/>
-                    <a:p>
-                      <a:r>
-                        <a:rPr lang="en-IN" dirty="0"/>
-                        <a:t>Description</a:t>
-                      </a:r>
-                    </a:p>
-                  </a:txBody>
-                  <a:tcPr/>
-                </a:tc>
-                <a:extLst>
-                  <a:ext uri="{0D108BD9-81ED-4DB2-BD59-A6C34878D82A}">
-                    <a16:rowId xmlns:a16="http://schemas.microsoft.com/office/drawing/2014/main" val="1747284999"/>
-                  </a:ext>
-                </a:extLst>
-              </a:tr>
-              <a:tr h="370840">
-                <a:tc>
-                  <a:txBody>
-                    <a:bodyPr/>
-                    <a:lstStyle/>
-                    <a:p>
-                      <a:r>
-                        <a:rPr lang="en-IN" dirty="0"/>
-                        <a:t>1.</a:t>
-                      </a:r>
-                    </a:p>
-                  </a:txBody>
-                  <a:tcPr/>
-                </a:tc>
-                <a:tc>
-                  <a:txBody>
-                    <a:bodyPr/>
-                    <a:lstStyle/>
-                    <a:p>
-                      <a:r>
-                        <a:rPr lang="en-US" sz="1800" b="0" kern="1200" dirty="0">
-                          <a:solidFill>
-                            <a:schemeClr val="tx1"/>
-                          </a:solidFill>
-                          <a:effectLst/>
-                          <a:latin typeface="+mn-lt"/>
-                          <a:ea typeface="+mn-ea"/>
-                          <a:cs typeface="+mn-cs"/>
-                        </a:rPr>
-                        <a:t>DependenciesCheckModifiedLibraries.yml</a:t>
-                      </a:r>
-                      <a:endParaRPr lang="en-IN" dirty="0"/>
-                    </a:p>
-                  </a:txBody>
-                  <a:tcPr/>
-                </a:tc>
-                <a:tc>
-                  <a:txBody>
-                    <a:bodyPr/>
-                    <a:lstStyle/>
-                    <a:p>
-                      <a:r>
-                        <a:rPr lang="en-US" sz="1800" b="0" kern="1200" dirty="0">
-                          <a:solidFill>
-                            <a:schemeClr val="tx1"/>
-                          </a:solidFill>
-                          <a:effectLst/>
-                          <a:latin typeface="+mn-lt"/>
-                          <a:ea typeface="+mn-ea"/>
-                          <a:cs typeface="+mn-cs"/>
-                        </a:rPr>
-                        <a:t>Implements Automated Dependency Checks on libraries that are modified in the current PR.</a:t>
-                      </a:r>
-                      <a:endParaRPr lang="en-IN" dirty="0"/>
-                    </a:p>
-                  </a:txBody>
-                  <a:tcPr/>
-                </a:tc>
-                <a:extLst>
-                  <a:ext uri="{0D108BD9-81ED-4DB2-BD59-A6C34878D82A}">
-                    <a16:rowId xmlns:a16="http://schemas.microsoft.com/office/drawing/2014/main" val="1395820696"/>
-                  </a:ext>
-                </a:extLst>
-              </a:tr>
-              <a:tr h="370840">
-                <a:tc>
-                  <a:txBody>
-                    <a:bodyPr/>
-                    <a:lstStyle/>
-                    <a:p>
-                      <a:r>
-                        <a:rPr lang="en-IN" dirty="0"/>
-                        <a:t>2. </a:t>
-                      </a:r>
-                    </a:p>
-                  </a:txBody>
-                  <a:tcPr/>
-                </a:tc>
-                <a:tc>
-                  <a:txBody>
-                    <a:bodyPr/>
-                    <a:lstStyle/>
-                    <a:p>
-                      <a:r>
-                        <a:rPr lang="en-US" sz="1800" b="0" kern="1200" dirty="0">
-                          <a:solidFill>
-                            <a:schemeClr val="tx1"/>
-                          </a:solidFill>
-                          <a:effectLst/>
-                          <a:latin typeface="+mn-lt"/>
-                          <a:ea typeface="+mn-ea"/>
-                          <a:cs typeface="+mn-cs"/>
-                        </a:rPr>
-                        <a:t>DependenciesCheckAllLibraries.yml</a:t>
-                      </a:r>
-                      <a:endParaRPr lang="en-IN" dirty="0"/>
-                    </a:p>
-                  </a:txBody>
-                  <a:tcPr/>
-                </a:tc>
-                <a:tc>
-                  <a:txBody>
-                    <a:bodyPr/>
-                    <a:lstStyle/>
-                    <a:p>
-                      <a:r>
-                        <a:rPr lang="en-US" sz="1800" b="0" kern="1200" dirty="0">
-                          <a:solidFill>
-                            <a:schemeClr val="tx1"/>
-                          </a:solidFill>
-                          <a:effectLst/>
-                          <a:latin typeface="+mn-lt"/>
-                          <a:ea typeface="+mn-ea"/>
-                          <a:cs typeface="+mn-cs"/>
-                        </a:rPr>
-                        <a:t>Implements a scheduled Automated Dependency check on all the libraries in the repository.</a:t>
-                      </a:r>
-                    </a:p>
-                    <a:p>
-                      <a:r>
-                        <a:rPr lang="en-US" sz="1800" b="0" kern="1200" dirty="0">
-                          <a:solidFill>
-                            <a:schemeClr val="tx1"/>
-                          </a:solidFill>
-                          <a:effectLst/>
-                          <a:latin typeface="+mn-lt"/>
-                          <a:ea typeface="+mn-ea"/>
-                          <a:cs typeface="+mn-cs"/>
-                        </a:rPr>
-                        <a:t>Regenerates the Consolidated Actual Dependencies List (adeps) file and creates a PR automatically if there are new changes observed in the adeps file.</a:t>
-                      </a:r>
-                    </a:p>
-                    <a:p>
-                      <a:r>
-                        <a:rPr lang="en-US" sz="1800" b="0" kern="1200" dirty="0">
-                          <a:solidFill>
-                            <a:schemeClr val="tx1"/>
-                          </a:solidFill>
-                          <a:effectLst/>
-                          <a:latin typeface="+mn-lt"/>
-                          <a:ea typeface="+mn-ea"/>
-                          <a:cs typeface="+mn-cs"/>
-                        </a:rPr>
-                        <a:t>This helps report any changes that were not covered in any PRs. Example: If a library is modified, only its section is updated in the previous </a:t>
-                      </a:r>
-                      <a:r>
-                        <a:rPr lang="en-US" sz="1800" b="0" kern="1200" dirty="0" err="1">
-                          <a:solidFill>
-                            <a:schemeClr val="tx1"/>
-                          </a:solidFill>
-                          <a:effectLst/>
-                          <a:latin typeface="+mn-lt"/>
-                          <a:ea typeface="+mn-ea"/>
-                          <a:cs typeface="+mn-cs"/>
-                        </a:rPr>
-                        <a:t>yml</a:t>
-                      </a:r>
-                      <a:r>
-                        <a:rPr lang="en-US" sz="1800" b="0" kern="1200" dirty="0">
-                          <a:solidFill>
-                            <a:schemeClr val="tx1"/>
-                          </a:solidFill>
-                          <a:effectLst/>
-                          <a:latin typeface="+mn-lt"/>
-                          <a:ea typeface="+mn-ea"/>
-                          <a:cs typeface="+mn-cs"/>
-                        </a:rPr>
-                        <a:t>, other affected changes can also be observed here.</a:t>
-                      </a:r>
-                      <a:endParaRPr lang="en-IN" dirty="0"/>
-                    </a:p>
-                  </a:txBody>
-                  <a:tcPr/>
-                </a:tc>
-                <a:extLst>
-                  <a:ext uri="{0D108BD9-81ED-4DB2-BD59-A6C34878D82A}">
-                    <a16:rowId xmlns:a16="http://schemas.microsoft.com/office/drawing/2014/main" val="104046521"/>
-                  </a:ext>
-                </a:extLst>
-              </a:tr>
-              <a:tr h="370840">
-                <a:tc>
-                  <a:txBody>
-                    <a:bodyPr/>
-                    <a:lstStyle/>
-                    <a:p>
-                      <a:r>
-                        <a:rPr lang="en-IN" dirty="0"/>
-                        <a:t>3. </a:t>
-                      </a:r>
-                    </a:p>
-                  </a:txBody>
-                  <a:tcPr/>
-                </a:tc>
-                <a:tc>
-                  <a:txBody>
-                    <a:bodyPr/>
-                    <a:lstStyle/>
-                    <a:p>
-                      <a:r>
-                        <a:rPr lang="en-US" sz="1800" b="0" kern="1200" dirty="0">
-                          <a:solidFill>
-                            <a:schemeClr val="tx1"/>
-                          </a:solidFill>
-                          <a:effectLst/>
-                          <a:latin typeface="+mn-lt"/>
-                          <a:ea typeface="+mn-ea"/>
-                          <a:cs typeface="+mn-cs"/>
-                        </a:rPr>
-                        <a:t>PRBaseBranchSyncCheck.yml</a:t>
-                      </a:r>
-                      <a:endParaRPr lang="en-IN" dirty="0"/>
-                    </a:p>
-                  </a:txBody>
-                  <a:tcPr/>
-                </a:tc>
-                <a:tc>
-                  <a:txBody>
-                    <a:bodyPr/>
-                    <a:lstStyle/>
-                    <a:p>
-                      <a:r>
-                        <a:rPr lang="en-US" sz="1800" b="0" kern="1200" dirty="0">
-                          <a:solidFill>
-                            <a:schemeClr val="tx1"/>
-                          </a:solidFill>
-                          <a:effectLst/>
-                          <a:latin typeface="+mn-lt"/>
-                          <a:ea typeface="+mn-ea"/>
-                          <a:cs typeface="+mn-cs"/>
-                        </a:rPr>
-                        <a:t>Checks if the base branch is in sync with the head branch in the PR.</a:t>
-                      </a:r>
-                    </a:p>
-                  </a:txBody>
-                  <a:tcPr/>
-                </a:tc>
-                <a:extLst>
-                  <a:ext uri="{0D108BD9-81ED-4DB2-BD59-A6C34878D82A}">
-                    <a16:rowId xmlns:a16="http://schemas.microsoft.com/office/drawing/2014/main" val="1819082634"/>
-                  </a:ext>
-                </a:extLst>
-              </a:tr>
-            </a:tbl>
-          </a:graphicData>
-        </a:graphic>
-      </p:graphicFrame>
+        </p:nvSpPr>
+        <p:spPr>
+          <a:xfrm>
+            <a:off x="605215" y="993340"/>
+            <a:ext cx="10867546" cy="1978460"/>
+          </a:xfrm>
+        </p:spPr>
+        <p:txBody>
+          <a:bodyPr>
+            <a:normAutofit fontScale="62500" lnSpcReduction="20000"/>
+          </a:bodyPr>
+          <a:lstStyle/>
+          <a:p>
+            <a:pPr>
+              <a:lnSpc>
+                <a:spcPct val="150000"/>
+              </a:lnSpc>
+            </a:pPr>
+            <a:r>
+              <a:rPr lang="en-US" dirty="0"/>
+              <a:t>generate_dependency_graph_for_selected_nodes.py</a:t>
+            </a:r>
+          </a:p>
+          <a:p>
+            <a:pPr lvl="1">
+              <a:lnSpc>
+                <a:spcPct val="150000"/>
+              </a:lnSpc>
+            </a:pPr>
+            <a:r>
+              <a:rPr lang="en-US" dirty="0"/>
+              <a:t>Script to generate a visualization for selected libraries.</a:t>
+            </a:r>
+          </a:p>
+          <a:p>
+            <a:pPr lvl="1">
+              <a:lnSpc>
+                <a:spcPct val="150000"/>
+              </a:lnSpc>
+            </a:pPr>
+            <a:r>
+              <a:rPr lang="en-US" dirty="0"/>
+              <a:t>Selected libraries are passed using argument --nodes</a:t>
+            </a:r>
+          </a:p>
+          <a:p>
+            <a:pPr lvl="2">
+              <a:lnSpc>
+                <a:spcPct val="150000"/>
+              </a:lnSpc>
+            </a:pPr>
+            <a:r>
+              <a:rPr lang="en-US" dirty="0"/>
+              <a:t>python generate_dependency_graph_for_selected_nodes.py --nodes </a:t>
+            </a:r>
+            <a:r>
+              <a:rPr lang="en-US" dirty="0" err="1"/>
+              <a:t>ModuleA</a:t>
+            </a:r>
+            <a:r>
+              <a:rPr lang="en-US" dirty="0"/>
+              <a:t> </a:t>
+            </a:r>
+            <a:r>
+              <a:rPr lang="en-US" dirty="0" err="1"/>
+              <a:t>FileUtilities</a:t>
+            </a:r>
+            <a:r>
+              <a:rPr lang="en-US" dirty="0"/>
+              <a:t> </a:t>
+            </a:r>
+            <a:r>
+              <a:rPr lang="en-US" dirty="0" err="1"/>
+              <a:t>ModuleB</a:t>
+            </a:r>
+            <a:endParaRPr lang="en-US" dirty="0"/>
+          </a:p>
+          <a:p>
+            <a:pPr lvl="1">
+              <a:lnSpc>
+                <a:spcPct val="150000"/>
+              </a:lnSpc>
+            </a:pPr>
+            <a:r>
+              <a:rPr lang="en-US" dirty="0"/>
+              <a:t>Generates separate graph for each selected node.</a:t>
+            </a:r>
+          </a:p>
+        </p:txBody>
+      </p:sp>
+      <p:pic>
+        <p:nvPicPr>
+          <p:cNvPr id="6" name="Picture 5">
+            <a:extLst>
+              <a:ext uri="{FF2B5EF4-FFF2-40B4-BE49-F238E27FC236}">
+                <a16:creationId xmlns:a16="http://schemas.microsoft.com/office/drawing/2014/main" id="{1CB7BCED-224A-EBC1-33D6-A7C4DBAEBA8D}"/>
+              </a:ext>
+            </a:extLst>
+          </p:cNvPr>
+          <p:cNvPicPr>
+            <a:picLocks noChangeAspect="1"/>
+          </p:cNvPicPr>
+          <p:nvPr/>
+        </p:nvPicPr>
+        <p:blipFill>
+          <a:blip r:embed="rId2">
+            <a:extLst>
+              <a:ext uri="{28A0092B-C50C-407E-A947-70E740481C1C}">
+                <a14:useLocalDpi xmlns:a14="http://schemas.microsoft.com/office/drawing/2010/main" val="0"/>
+              </a:ext>
+            </a:extLst>
+          </a:blip>
+          <a:stretch>
+            <a:fillRect/>
+          </a:stretch>
+        </p:blipFill>
+        <p:spPr>
+          <a:xfrm>
+            <a:off x="387442" y="3429000"/>
+            <a:ext cx="3528000" cy="2520000"/>
+          </a:xfrm>
+          <a:prstGeom prst="rect">
+            <a:avLst/>
+          </a:prstGeom>
+        </p:spPr>
+      </p:pic>
+      <p:pic>
+        <p:nvPicPr>
+          <p:cNvPr id="8" name="Picture 7">
+            <a:extLst>
+              <a:ext uri="{FF2B5EF4-FFF2-40B4-BE49-F238E27FC236}">
+                <a16:creationId xmlns:a16="http://schemas.microsoft.com/office/drawing/2014/main" id="{7E8E65E2-CE79-DADE-206D-9123698FDEA8}"/>
+              </a:ext>
+            </a:extLst>
+          </p:cNvPr>
+          <p:cNvPicPr>
+            <a:picLocks noChangeAspect="1"/>
+          </p:cNvPicPr>
+          <p:nvPr/>
+        </p:nvPicPr>
+        <p:blipFill>
+          <a:blip r:embed="rId3">
+            <a:extLst>
+              <a:ext uri="{28A0092B-C50C-407E-A947-70E740481C1C}">
+                <a14:useLocalDpi xmlns:a14="http://schemas.microsoft.com/office/drawing/2010/main" val="0"/>
+              </a:ext>
+            </a:extLst>
+          </a:blip>
+          <a:stretch>
+            <a:fillRect/>
+          </a:stretch>
+        </p:blipFill>
+        <p:spPr>
+          <a:xfrm>
+            <a:off x="4107153" y="3429000"/>
+            <a:ext cx="3528000" cy="2520000"/>
+          </a:xfrm>
+          <a:prstGeom prst="rect">
+            <a:avLst/>
+          </a:prstGeom>
+        </p:spPr>
+      </p:pic>
+      <p:pic>
+        <p:nvPicPr>
+          <p:cNvPr id="10" name="Picture 9">
+            <a:extLst>
+              <a:ext uri="{FF2B5EF4-FFF2-40B4-BE49-F238E27FC236}">
+                <a16:creationId xmlns:a16="http://schemas.microsoft.com/office/drawing/2014/main" id="{880CE59F-CC05-1603-AA46-79F5D5F6F2AD}"/>
+              </a:ext>
+            </a:extLst>
+          </p:cNvPr>
+          <p:cNvPicPr>
+            <a:picLocks noChangeAspect="1"/>
+          </p:cNvPicPr>
+          <p:nvPr/>
+        </p:nvPicPr>
+        <p:blipFill>
+          <a:blip r:embed="rId4">
+            <a:extLst>
+              <a:ext uri="{28A0092B-C50C-407E-A947-70E740481C1C}">
+                <a14:useLocalDpi xmlns:a14="http://schemas.microsoft.com/office/drawing/2010/main" val="0"/>
+              </a:ext>
+            </a:extLst>
+          </a:blip>
+          <a:stretch>
+            <a:fillRect/>
+          </a:stretch>
+        </p:blipFill>
+        <p:spPr>
+          <a:xfrm>
+            <a:off x="7826867" y="3429000"/>
+            <a:ext cx="3528000" cy="2520000"/>
+          </a:xfrm>
+          <a:prstGeom prst="rect">
+            <a:avLst/>
+          </a:prstGeom>
+        </p:spPr>
+      </p:pic>
     </p:spTree>
     <p:extLst>
       <p:ext uri="{BB962C8B-B14F-4D97-AF65-F5344CB8AC3E}">
-        <p14:creationId xmlns:p14="http://schemas.microsoft.com/office/powerpoint/2010/main" val="181779165"/>
+        <p14:creationId xmlns:p14="http://schemas.microsoft.com/office/powerpoint/2010/main" val="238647060"/>
       </p:ext>
     </p:extLst>
   </p:cSld>
@@ -12201,7 +15405,7 @@
 </p:sld>
 </file>
 
-<file path=ppt/slides/slide24.xml><?xml version="1.0" encoding="utf-8"?>
+<file path=ppt/slides/slide27.xml><?xml version="1.0" encoding="utf-8"?>
 <p:sld xmlns:a="http://schemas.openxmlformats.org/drawingml/2006/main" xmlns:r="http://schemas.openxmlformats.org/officeDocument/2006/relationships" xmlns:p="http://schemas.openxmlformats.org/presentationml/2006/main">
   <p:cSld>
     <p:spTree>
@@ -12385,7 +15589,7 @@
             </a:r>
             <a:r>
               <a:rPr lang="en-IN" sz="1800" dirty="0" err="1"/>
-              <a:t>atsleast</a:t>
+              <a:t>atleast</a:t>
             </a:r>
             <a:r>
               <a:rPr lang="en-IN" sz="1800" dirty="0"/>
@@ -12413,7 +15617,7 @@
 </p:sld>
 </file>
 
-<file path=ppt/slides/slide25.xml><?xml version="1.0" encoding="utf-8"?>
+<file path=ppt/slides/slide28.xml><?xml version="1.0" encoding="utf-8"?>
 <p:sld xmlns:a="http://schemas.openxmlformats.org/drawingml/2006/main" xmlns:r="http://schemas.openxmlformats.org/officeDocument/2006/relationships" xmlns:p="http://schemas.openxmlformats.org/presentationml/2006/main">
   <p:cSld>
     <p:spTree>
@@ -12985,7 +16189,7 @@
 </p:sld>
 </file>
 
-<file path=ppt/slides/slide26.xml><?xml version="1.0" encoding="utf-8"?>
+<file path=ppt/slides/slide29.xml><?xml version="1.0" encoding="utf-8"?>
 <p:sld xmlns:a="http://schemas.openxmlformats.org/drawingml/2006/main" xmlns:r="http://schemas.openxmlformats.org/officeDocument/2006/relationships" xmlns:p="http://schemas.openxmlformats.org/presentationml/2006/main">
   <p:cSld>
     <p:spTree>
@@ -13018,7 +16222,12 @@
             <p:ph type="title"/>
           </p:nvPr>
         </p:nvSpPr>
-        <p:spPr/>
+        <p:spPr>
+          <a:xfrm>
+            <a:off x="838200" y="365126"/>
+            <a:ext cx="10515600" cy="867930"/>
+          </a:xfrm>
+        </p:spPr>
         <p:txBody>
           <a:bodyPr/>
           <a:lstStyle/>
@@ -13030,8 +16239,8 @@
           </a:p>
         </p:txBody>
       </p:sp>
-      <mc:AlternateContent xmlns:mc="http://schemas.openxmlformats.org/markup-compatibility/2006">
-        <mc:Choice xmlns:a14="http://schemas.microsoft.com/office/drawing/2010/main" Requires="a14">
+      <mc:AlternateContent xmlns:mc="http://schemas.openxmlformats.org/markup-compatibility/2006" xmlns:a14="http://schemas.microsoft.com/office/drawing/2010/main">
+        <mc:Choice Requires="a14">
           <p:sp>
             <p:nvSpPr>
               <p:cNvPr id="3" name="Content Placeholder 2">
@@ -13050,7 +16259,7 @@
             </p:nvSpPr>
             <p:spPr>
               <a:xfrm>
-                <a:off x="595746" y="1510145"/>
+                <a:off x="595746" y="1432677"/>
                 <a:ext cx="10758054" cy="4675910"/>
               </a:xfrm>
             </p:spPr>
@@ -13216,7 +16425,7 @@
             </p:txBody>
           </p:sp>
         </mc:Choice>
-        <mc:Fallback>
+        <mc:Fallback xmlns="">
           <p:sp>
             <p:nvSpPr>
               <p:cNvPr id="3" name="Content Placeholder 2">
@@ -13235,7 +16444,7 @@
             </p:nvSpPr>
             <p:spPr>
               <a:xfrm>
-                <a:off x="595746" y="1510145"/>
+                <a:off x="595746" y="1432677"/>
                 <a:ext cx="10758054" cy="4675910"/>
               </a:xfrm>
               <a:blipFill>
@@ -13308,575 +16517,6 @@
 </p:sld>
 </file>
 
-<file path=ppt/slides/slide27.xml><?xml version="1.0" encoding="utf-8"?>
-<p:sld xmlns:a="http://schemas.openxmlformats.org/drawingml/2006/main" xmlns:r="http://schemas.openxmlformats.org/officeDocument/2006/relationships" xmlns:p="http://schemas.openxmlformats.org/presentationml/2006/main">
-  <p:cSld>
-    <p:spTree>
-      <p:nvGrpSpPr>
-        <p:cNvPr id="1" name="">
-          <a:extLst>
-            <a:ext uri="{FF2B5EF4-FFF2-40B4-BE49-F238E27FC236}">
-              <a16:creationId xmlns:a16="http://schemas.microsoft.com/office/drawing/2014/main" id="{651E5426-C6F2-9BC0-F08E-198F703F70F7}"/>
-            </a:ext>
-          </a:extLst>
-        </p:cNvPr>
-        <p:cNvGrpSpPr/>
-        <p:nvPr/>
-      </p:nvGrpSpPr>
-      <p:grpSpPr>
-        <a:xfrm>
-          <a:off x="0" y="0"/>
-          <a:ext cx="0" cy="0"/>
-          <a:chOff x="0" y="0"/>
-          <a:chExt cx="0" cy="0"/>
-        </a:xfrm>
-      </p:grpSpPr>
-      <p:sp>
-        <p:nvSpPr>
-          <p:cNvPr id="2" name="Title 1">
-            <a:extLst>
-              <a:ext uri="{FF2B5EF4-FFF2-40B4-BE49-F238E27FC236}">
-                <a16:creationId xmlns:a16="http://schemas.microsoft.com/office/drawing/2014/main" id="{97537E1F-2FCC-6305-3CBB-282543BAB3DE}"/>
-              </a:ext>
-            </a:extLst>
-          </p:cNvPr>
-          <p:cNvSpPr>
-            <a:spLocks noGrp="1"/>
-          </p:cNvSpPr>
-          <p:nvPr>
-            <p:ph type="title"/>
-          </p:nvPr>
-        </p:nvSpPr>
-        <p:spPr/>
-        <p:txBody>
-          <a:bodyPr/>
-          <a:lstStyle/>
-          <a:p>
-            <a:r>
-              <a:rPr lang="en-IN" dirty="0"/>
-              <a:t>Short Introduction to Coupling Metrics</a:t>
-            </a:r>
-          </a:p>
-        </p:txBody>
-      </p:sp>
-      <mc:AlternateContent xmlns:mc="http://schemas.openxmlformats.org/markup-compatibility/2006">
-        <mc:Choice xmlns:a14="http://schemas.microsoft.com/office/drawing/2010/main" Requires="a14">
-          <p:sp>
-            <p:nvSpPr>
-              <p:cNvPr id="3" name="Content Placeholder 2">
-                <a:extLst>
-                  <a:ext uri="{FF2B5EF4-FFF2-40B4-BE49-F238E27FC236}">
-                    <a16:creationId xmlns:a16="http://schemas.microsoft.com/office/drawing/2014/main" id="{5C07A665-BEC8-9CDC-4321-237A540AD759}"/>
-                  </a:ext>
-                </a:extLst>
-              </p:cNvPr>
-              <p:cNvSpPr>
-                <a:spLocks noGrp="1"/>
-              </p:cNvSpPr>
-              <p:nvPr>
-                <p:ph idx="1"/>
-              </p:nvPr>
-            </p:nvSpPr>
-            <p:spPr>
-              <a:xfrm>
-                <a:off x="595746" y="1510145"/>
-                <a:ext cx="10758054" cy="4675910"/>
-              </a:xfrm>
-            </p:spPr>
-            <p:txBody>
-              <a:bodyPr>
-                <a:normAutofit lnSpcReduction="10000"/>
-              </a:bodyPr>
-              <a:lstStyle/>
-              <a:p>
-                <a:pPr>
-                  <a:lnSpc>
-                    <a:spcPct val="150000"/>
-                  </a:lnSpc>
-                </a:pPr>
-                <a:r>
-                  <a:rPr lang="en-US" dirty="0"/>
-                  <a:t>Instability Factor (</a:t>
-                </a:r>
-                <a14:m>
-                  <m:oMath xmlns:m="http://schemas.openxmlformats.org/officeDocument/2006/math">
-                    <m:r>
-                      <a:rPr lang="en-IN" i="1">
-                        <a:latin typeface="Cambria Math" panose="02040503050406030204" pitchFamily="18" charset="0"/>
-                      </a:rPr>
-                      <m:t>𝐼</m:t>
-                    </m:r>
-                  </m:oMath>
-                </a14:m>
-                <a:r>
-                  <a:rPr lang="en-US" dirty="0"/>
-                  <a:t>)</a:t>
-                </a:r>
-              </a:p>
-              <a:p>
-                <a:pPr lvl="1">
-                  <a:lnSpc>
-                    <a:spcPct val="150000"/>
-                  </a:lnSpc>
-                </a:pPr>
-                <a:r>
-                  <a:rPr lang="en-US" dirty="0"/>
-                  <a:t>The ratio of outward dependencies to total dependencies, calculated as:</a:t>
-                </a:r>
-              </a:p>
-              <a:p>
-                <a:pPr lvl="1">
-                  <a:lnSpc>
-                    <a:spcPct val="150000"/>
-                  </a:lnSpc>
-                </a:pPr>
-                <a14:m>
-                  <m:oMath xmlns:m="http://schemas.openxmlformats.org/officeDocument/2006/math">
-                    <m:r>
-                      <a:rPr lang="en-IN" sz="2500" i="1">
-                        <a:latin typeface="Cambria Math" panose="02040503050406030204" pitchFamily="18" charset="0"/>
-                      </a:rPr>
-                      <m:t>𝐼</m:t>
-                    </m:r>
-                    <m:r>
-                      <a:rPr lang="en-IN" sz="2500" i="1">
-                        <a:latin typeface="Cambria Math" panose="02040503050406030204" pitchFamily="18" charset="0"/>
-                      </a:rPr>
-                      <m:t>=</m:t>
-                    </m:r>
-                    <m:f>
-                      <m:fPr>
-                        <m:ctrlPr>
-                          <a:rPr lang="en-IN" sz="2500" i="1">
-                            <a:latin typeface="Cambria Math" panose="02040503050406030204" pitchFamily="18" charset="0"/>
-                          </a:rPr>
-                        </m:ctrlPr>
-                      </m:fPr>
-                      <m:num>
-                        <m:sSub>
-                          <m:sSubPr>
-                            <m:ctrlPr>
-                              <a:rPr lang="en-IN" sz="2500" i="1">
-                                <a:latin typeface="Cambria Math" panose="02040503050406030204" pitchFamily="18" charset="0"/>
-                              </a:rPr>
-                            </m:ctrlPr>
-                          </m:sSubPr>
-                          <m:e>
-                            <m:r>
-                              <a:rPr lang="en-IN" sz="2500" i="1">
-                                <a:latin typeface="Cambria Math" panose="02040503050406030204" pitchFamily="18" charset="0"/>
-                              </a:rPr>
-                              <m:t>𝐶</m:t>
-                            </m:r>
-                          </m:e>
-                          <m:sub>
-                            <m:r>
-                              <a:rPr lang="en-IN" sz="2500" i="1">
-                                <a:latin typeface="Cambria Math" panose="02040503050406030204" pitchFamily="18" charset="0"/>
-                              </a:rPr>
-                              <m:t>𝑒</m:t>
-                            </m:r>
-                          </m:sub>
-                        </m:sSub>
-                      </m:num>
-                      <m:den>
-                        <m:sSub>
-                          <m:sSubPr>
-                            <m:ctrlPr>
-                              <a:rPr lang="en-IN" sz="2500" i="1">
-                                <a:latin typeface="Cambria Math" panose="02040503050406030204" pitchFamily="18" charset="0"/>
-                              </a:rPr>
-                            </m:ctrlPr>
-                          </m:sSubPr>
-                          <m:e>
-                            <m:r>
-                              <a:rPr lang="en-IN" sz="2500" i="1">
-                                <a:latin typeface="Cambria Math" panose="02040503050406030204" pitchFamily="18" charset="0"/>
-                              </a:rPr>
-                              <m:t>𝐶</m:t>
-                            </m:r>
-                          </m:e>
-                          <m:sub>
-                            <m:r>
-                              <a:rPr lang="en-IN" sz="2500" i="1">
-                                <a:latin typeface="Cambria Math" panose="02040503050406030204" pitchFamily="18" charset="0"/>
-                              </a:rPr>
-                              <m:t>𝑎</m:t>
-                            </m:r>
-                          </m:sub>
-                        </m:sSub>
-                        <m:r>
-                          <a:rPr lang="en-IN" sz="2500" i="1">
-                            <a:latin typeface="Cambria Math" panose="02040503050406030204" pitchFamily="18" charset="0"/>
-                          </a:rPr>
-                          <m:t>+</m:t>
-                        </m:r>
-                        <m:sSub>
-                          <m:sSubPr>
-                            <m:ctrlPr>
-                              <a:rPr lang="en-IN" sz="2500" i="1">
-                                <a:latin typeface="Cambria Math" panose="02040503050406030204" pitchFamily="18" charset="0"/>
-                              </a:rPr>
-                            </m:ctrlPr>
-                          </m:sSubPr>
-                          <m:e>
-                            <m:r>
-                              <a:rPr lang="en-IN" sz="2500" i="1">
-                                <a:latin typeface="Cambria Math" panose="02040503050406030204" pitchFamily="18" charset="0"/>
-                              </a:rPr>
-                              <m:t>𝐶</m:t>
-                            </m:r>
-                          </m:e>
-                          <m:sub>
-                            <m:r>
-                              <a:rPr lang="en-IN" sz="2500" i="1">
-                                <a:latin typeface="Cambria Math" panose="02040503050406030204" pitchFamily="18" charset="0"/>
-                              </a:rPr>
-                              <m:t>𝑒</m:t>
-                            </m:r>
-                          </m:sub>
-                        </m:sSub>
-                      </m:den>
-                    </m:f>
-                  </m:oMath>
-                </a14:m>
-                <a:endParaRPr lang="en-IN" sz="2500" dirty="0"/>
-              </a:p>
-              <a:p>
-                <a:pPr lvl="1">
-                  <a:lnSpc>
-                    <a:spcPct val="150000"/>
-                  </a:lnSpc>
-                </a:pPr>
-                <a:r>
-                  <a:rPr lang="en-US" sz="2500" dirty="0"/>
-                  <a:t>Value is between 0 and 1.</a:t>
-                </a:r>
-              </a:p>
-              <a:p>
-                <a:pPr lvl="1">
-                  <a:lnSpc>
-                    <a:spcPct val="150000"/>
-                  </a:lnSpc>
-                </a:pPr>
-                <a:r>
-                  <a:rPr lang="en-US" sz="2500" dirty="0"/>
-                  <a:t>0 : Maximally stable (hard to change because many things depend on it).</a:t>
-                </a:r>
-              </a:p>
-              <a:p>
-                <a:pPr lvl="1">
-                  <a:lnSpc>
-                    <a:spcPct val="150000"/>
-                  </a:lnSpc>
-                </a:pPr>
-                <a:r>
-                  <a:rPr lang="en-US" sz="2500" dirty="0"/>
-                  <a:t>1 : Maximally unstable (easy to change because nothing depends on it, but it depends on many things)</a:t>
-                </a:r>
-                <a:endParaRPr lang="en-IN" sz="2500" dirty="0"/>
-              </a:p>
-            </p:txBody>
-          </p:sp>
-        </mc:Choice>
-        <mc:Fallback>
-          <p:sp>
-            <p:nvSpPr>
-              <p:cNvPr id="3" name="Content Placeholder 2">
-                <a:extLst>
-                  <a:ext uri="{FF2B5EF4-FFF2-40B4-BE49-F238E27FC236}">
-                    <a16:creationId xmlns:a16="http://schemas.microsoft.com/office/drawing/2014/main" id="{5C07A665-BEC8-9CDC-4321-237A540AD759}"/>
-                  </a:ext>
-                </a:extLst>
-              </p:cNvPr>
-              <p:cNvSpPr>
-                <a:spLocks noGrp="1" noRot="1" noChangeAspect="1" noMove="1" noResize="1" noEditPoints="1" noAdjustHandles="1" noChangeArrowheads="1" noChangeShapeType="1" noTextEdit="1"/>
-              </p:cNvSpPr>
-              <p:nvPr>
-                <p:ph idx="1"/>
-              </p:nvPr>
-            </p:nvSpPr>
-            <p:spPr>
-              <a:xfrm>
-                <a:off x="595746" y="1510145"/>
-                <a:ext cx="10758054" cy="4675910"/>
-              </a:xfrm>
-              <a:blipFill>
-                <a:blip r:embed="rId2"/>
-                <a:stretch>
-                  <a:fillRect l="-1020"/>
-                </a:stretch>
-              </a:blipFill>
-            </p:spPr>
-            <p:txBody>
-              <a:bodyPr/>
-              <a:lstStyle/>
-              <a:p>
-                <a:r>
-                  <a:rPr lang="en-IN">
-                    <a:noFill/>
-                  </a:rPr>
-                  <a:t> </a:t>
-                </a:r>
-              </a:p>
-            </p:txBody>
-          </p:sp>
-        </mc:Fallback>
-      </mc:AlternateContent>
-      <p:sp>
-        <p:nvSpPr>
-          <p:cNvPr id="4" name="TextBox 3">
-            <a:extLst>
-              <a:ext uri="{FF2B5EF4-FFF2-40B4-BE49-F238E27FC236}">
-                <a16:creationId xmlns:a16="http://schemas.microsoft.com/office/drawing/2014/main" id="{A73B60A6-1896-6101-C258-2E57129F315B}"/>
-              </a:ext>
-            </a:extLst>
-          </p:cNvPr>
-          <p:cNvSpPr txBox="1"/>
-          <p:nvPr/>
-        </p:nvSpPr>
-        <p:spPr>
-          <a:xfrm>
-            <a:off x="595746" y="6308209"/>
-            <a:ext cx="10515600" cy="369332"/>
-          </a:xfrm>
-          <a:prstGeom prst="rect">
-            <a:avLst/>
-          </a:prstGeom>
-          <a:noFill/>
-        </p:spPr>
-        <p:txBody>
-          <a:bodyPr wrap="square" rtlCol="0">
-            <a:spAutoFit/>
-          </a:bodyPr>
-          <a:lstStyle/>
-          <a:p>
-            <a:r>
-              <a:rPr lang="en-IN" dirty="0"/>
-              <a:t>References: Robert C. Martin (2002). Agile Software Development: Principles, Patterns, and Practices.</a:t>
-            </a:r>
-          </a:p>
-        </p:txBody>
-      </p:sp>
-    </p:spTree>
-    <p:extLst>
-      <p:ext uri="{BB962C8B-B14F-4D97-AF65-F5344CB8AC3E}">
-        <p14:creationId xmlns:p14="http://schemas.microsoft.com/office/powerpoint/2010/main" val="3950674075"/>
-      </p:ext>
-    </p:extLst>
-  </p:cSld>
-  <p:clrMapOvr>
-    <a:masterClrMapping/>
-  </p:clrMapOvr>
-</p:sld>
-</file>
-
-<file path=ppt/slides/slide28.xml><?xml version="1.0" encoding="utf-8"?>
-<p:sld xmlns:a="http://schemas.openxmlformats.org/drawingml/2006/main" xmlns:r="http://schemas.openxmlformats.org/officeDocument/2006/relationships" xmlns:p="http://schemas.openxmlformats.org/presentationml/2006/main">
-  <p:cSld>
-    <p:spTree>
-      <p:nvGrpSpPr>
-        <p:cNvPr id="1" name="">
-          <a:extLst>
-            <a:ext uri="{FF2B5EF4-FFF2-40B4-BE49-F238E27FC236}">
-              <a16:creationId xmlns:a16="http://schemas.microsoft.com/office/drawing/2014/main" id="{BDD5BAA9-D7CB-2759-5BF4-FEA00EAED3CB}"/>
-            </a:ext>
-          </a:extLst>
-        </p:cNvPr>
-        <p:cNvGrpSpPr/>
-        <p:nvPr/>
-      </p:nvGrpSpPr>
-      <p:grpSpPr>
-        <a:xfrm>
-          <a:off x="0" y="0"/>
-          <a:ext cx="0" cy="0"/>
-          <a:chOff x="0" y="0"/>
-          <a:chExt cx="0" cy="0"/>
-        </a:xfrm>
-      </p:grpSpPr>
-      <p:sp>
-        <p:nvSpPr>
-          <p:cNvPr id="2" name="Title 1">
-            <a:extLst>
-              <a:ext uri="{FF2B5EF4-FFF2-40B4-BE49-F238E27FC236}">
-                <a16:creationId xmlns:a16="http://schemas.microsoft.com/office/drawing/2014/main" id="{5C651F09-3A99-D9D1-DC51-0F8A986A2D1A}"/>
-              </a:ext>
-            </a:extLst>
-          </p:cNvPr>
-          <p:cNvSpPr>
-            <a:spLocks noGrp="1"/>
-          </p:cNvSpPr>
-          <p:nvPr>
-            <p:ph type="title"/>
-          </p:nvPr>
-        </p:nvSpPr>
-        <p:spPr>
-          <a:xfrm>
-            <a:off x="838200" y="-2454"/>
-            <a:ext cx="10515600" cy="1325563"/>
-          </a:xfrm>
-        </p:spPr>
-        <p:txBody>
-          <a:bodyPr/>
-          <a:lstStyle/>
-          <a:p>
-            <a:r>
-              <a:rPr lang="en-IN" dirty="0"/>
-              <a:t>Coupling Metrics Report Generation</a:t>
-            </a:r>
-          </a:p>
-        </p:txBody>
-      </p:sp>
-      <p:sp>
-        <p:nvSpPr>
-          <p:cNvPr id="3" name="Content Placeholder 2">
-            <a:extLst>
-              <a:ext uri="{FF2B5EF4-FFF2-40B4-BE49-F238E27FC236}">
-                <a16:creationId xmlns:a16="http://schemas.microsoft.com/office/drawing/2014/main" id="{B975A8EE-223F-C33A-E8CD-F6B69189A74C}"/>
-              </a:ext>
-            </a:extLst>
-          </p:cNvPr>
-          <p:cNvSpPr>
-            <a:spLocks noGrp="1"/>
-          </p:cNvSpPr>
-          <p:nvPr>
-            <p:ph idx="1"/>
-          </p:nvPr>
-        </p:nvSpPr>
-        <p:spPr>
-          <a:xfrm>
-            <a:off x="595746" y="1198418"/>
-            <a:ext cx="10758054" cy="4800601"/>
-          </a:xfrm>
-        </p:spPr>
-        <p:txBody>
-          <a:bodyPr>
-            <a:normAutofit/>
-          </a:bodyPr>
-          <a:lstStyle/>
-          <a:p>
-            <a:pPr>
-              <a:lnSpc>
-                <a:spcPct val="150000"/>
-              </a:lnSpc>
-            </a:pPr>
-            <a:r>
-              <a:rPr lang="en-IN" dirty="0"/>
-              <a:t>calculate_coupling_metrics.py</a:t>
-            </a:r>
-          </a:p>
-          <a:p>
-            <a:pPr>
-              <a:lnSpc>
-                <a:spcPct val="150000"/>
-              </a:lnSpc>
-            </a:pPr>
-            <a:endParaRPr lang="en-IN" sz="2500" dirty="0"/>
-          </a:p>
-        </p:txBody>
-      </p:sp>
-      <p:pic>
-        <p:nvPicPr>
-          <p:cNvPr id="6" name="Picture 5">
-            <a:extLst>
-              <a:ext uri="{FF2B5EF4-FFF2-40B4-BE49-F238E27FC236}">
-                <a16:creationId xmlns:a16="http://schemas.microsoft.com/office/drawing/2014/main" id="{A025A0FB-53D9-BB89-399F-77A77DF877A3}"/>
-              </a:ext>
-            </a:extLst>
-          </p:cNvPr>
-          <p:cNvPicPr>
-            <a:picLocks noChangeAspect="1"/>
-          </p:cNvPicPr>
-          <p:nvPr/>
-        </p:nvPicPr>
-        <p:blipFill>
-          <a:blip r:embed="rId2"/>
-          <a:stretch>
-            <a:fillRect/>
-          </a:stretch>
-        </p:blipFill>
-        <p:spPr>
-          <a:xfrm>
-            <a:off x="838200" y="2012563"/>
-            <a:ext cx="5666163" cy="4370729"/>
-          </a:xfrm>
-          <a:prstGeom prst="rect">
-            <a:avLst/>
-          </a:prstGeom>
-        </p:spPr>
-      </p:pic>
-    </p:spTree>
-    <p:extLst>
-      <p:ext uri="{BB962C8B-B14F-4D97-AF65-F5344CB8AC3E}">
-        <p14:creationId xmlns:p14="http://schemas.microsoft.com/office/powerpoint/2010/main" val="3168348341"/>
-      </p:ext>
-    </p:extLst>
-  </p:cSld>
-  <p:clrMapOvr>
-    <a:masterClrMapping/>
-  </p:clrMapOvr>
-</p:sld>
-</file>
-
-<file path=ppt/slides/slide29.xml><?xml version="1.0" encoding="utf-8"?>
-<p:sld xmlns:a="http://schemas.openxmlformats.org/drawingml/2006/main" xmlns:r="http://schemas.openxmlformats.org/officeDocument/2006/relationships" xmlns:p="http://schemas.openxmlformats.org/presentationml/2006/main">
-  <p:cSld>
-    <p:spTree>
-      <p:nvGrpSpPr>
-        <p:cNvPr id="1" name=""/>
-        <p:cNvGrpSpPr/>
-        <p:nvPr/>
-      </p:nvGrpSpPr>
-      <p:grpSpPr>
-        <a:xfrm>
-          <a:off x="0" y="0"/>
-          <a:ext cx="0" cy="0"/>
-          <a:chOff x="0" y="0"/>
-          <a:chExt cx="0" cy="0"/>
-        </a:xfrm>
-      </p:grpSpPr>
-      <p:sp>
-        <p:nvSpPr>
-          <p:cNvPr id="2" name="Title 1">
-            <a:extLst>
-              <a:ext uri="{FF2B5EF4-FFF2-40B4-BE49-F238E27FC236}">
-                <a16:creationId xmlns:a16="http://schemas.microsoft.com/office/drawing/2014/main" id="{215A4EBC-FE52-94C4-DE3E-C7D0E925C19B}"/>
-              </a:ext>
-            </a:extLst>
-          </p:cNvPr>
-          <p:cNvSpPr>
-            <a:spLocks noGrp="1"/>
-          </p:cNvSpPr>
-          <p:nvPr>
-            <p:ph type="ctrTitle"/>
-          </p:nvPr>
-        </p:nvSpPr>
-        <p:spPr/>
-        <p:txBody>
-          <a:bodyPr/>
-          <a:lstStyle/>
-          <a:p>
-            <a:r>
-              <a:rPr lang="en-US" dirty="0"/>
-              <a:t>Thank You</a:t>
-            </a:r>
-            <a:endParaRPr lang="en-IN" dirty="0"/>
-          </a:p>
-        </p:txBody>
-      </p:sp>
-    </p:spTree>
-    <p:extLst>
-      <p:ext uri="{BB962C8B-B14F-4D97-AF65-F5344CB8AC3E}">
-        <p14:creationId xmlns:p14="http://schemas.microsoft.com/office/powerpoint/2010/main" val="548370455"/>
-      </p:ext>
-    </p:extLst>
-  </p:cSld>
-  <p:clrMapOvr>
-    <a:masterClrMapping/>
-  </p:clrMapOvr>
-</p:sld>
-</file>
-
 <file path=ppt/slides/slide3.xml><?xml version="1.0" encoding="utf-8"?>
 <p:sld xmlns:a="http://schemas.openxmlformats.org/drawingml/2006/main" xmlns:r="http://schemas.openxmlformats.org/officeDocument/2006/relationships" xmlns:p="http://schemas.openxmlformats.org/presentationml/2006/main">
   <p:cSld>
@@ -13973,7 +16613,7 @@
             </a:pPr>
             <a:r>
               <a:rPr lang="en-US" dirty="0"/>
-              <a:t>During the development, There are high possibilities of creating unwanted dependencies between the libraries that violate the separation of concerns defined by the Architecture definition.</a:t>
+              <a:t>During the development with large team, there are high possibilities of creating unwanted dependencies between the libraries that violate the separation of concerns defined by the Architecture definition.</a:t>
             </a:r>
           </a:p>
           <a:p>
@@ -14179,6 +16819,724 @@
 </p:sld>
 </file>
 
+<file path=ppt/slides/slide30.xml><?xml version="1.0" encoding="utf-8"?>
+<p:sld xmlns:a="http://schemas.openxmlformats.org/drawingml/2006/main" xmlns:r="http://schemas.openxmlformats.org/officeDocument/2006/relationships" xmlns:p="http://schemas.openxmlformats.org/presentationml/2006/main">
+  <p:cSld>
+    <p:spTree>
+      <p:nvGrpSpPr>
+        <p:cNvPr id="1" name="">
+          <a:extLst>
+            <a:ext uri="{FF2B5EF4-FFF2-40B4-BE49-F238E27FC236}">
+              <a16:creationId xmlns:a16="http://schemas.microsoft.com/office/drawing/2014/main" id="{651E5426-C6F2-9BC0-F08E-198F703F70F7}"/>
+            </a:ext>
+          </a:extLst>
+        </p:cNvPr>
+        <p:cNvGrpSpPr/>
+        <p:nvPr/>
+      </p:nvGrpSpPr>
+      <p:grpSpPr>
+        <a:xfrm>
+          <a:off x="0" y="0"/>
+          <a:ext cx="0" cy="0"/>
+          <a:chOff x="0" y="0"/>
+          <a:chExt cx="0" cy="0"/>
+        </a:xfrm>
+      </p:grpSpPr>
+      <p:sp>
+        <p:nvSpPr>
+          <p:cNvPr id="2" name="Title 1">
+            <a:extLst>
+              <a:ext uri="{FF2B5EF4-FFF2-40B4-BE49-F238E27FC236}">
+                <a16:creationId xmlns:a16="http://schemas.microsoft.com/office/drawing/2014/main" id="{97537E1F-2FCC-6305-3CBB-282543BAB3DE}"/>
+              </a:ext>
+            </a:extLst>
+          </p:cNvPr>
+          <p:cNvSpPr>
+            <a:spLocks noGrp="1"/>
+          </p:cNvSpPr>
+          <p:nvPr>
+            <p:ph type="title"/>
+          </p:nvPr>
+        </p:nvSpPr>
+        <p:spPr>
+          <a:xfrm>
+            <a:off x="838200" y="365126"/>
+            <a:ext cx="10515600" cy="902566"/>
+          </a:xfrm>
+        </p:spPr>
+        <p:txBody>
+          <a:bodyPr/>
+          <a:lstStyle/>
+          <a:p>
+            <a:r>
+              <a:rPr lang="en-IN" dirty="0"/>
+              <a:t>Short Introduction to Coupling Metrics</a:t>
+            </a:r>
+          </a:p>
+        </p:txBody>
+      </p:sp>
+      <mc:AlternateContent xmlns:mc="http://schemas.openxmlformats.org/markup-compatibility/2006">
+        <mc:Choice xmlns:a14="http://schemas.microsoft.com/office/drawing/2010/main" Requires="a14">
+          <p:sp>
+            <p:nvSpPr>
+              <p:cNvPr id="3" name="Content Placeholder 2">
+                <a:extLst>
+                  <a:ext uri="{FF2B5EF4-FFF2-40B4-BE49-F238E27FC236}">
+                    <a16:creationId xmlns:a16="http://schemas.microsoft.com/office/drawing/2014/main" id="{5C07A665-BEC8-9CDC-4321-237A540AD759}"/>
+                  </a:ext>
+                </a:extLst>
+              </p:cNvPr>
+              <p:cNvSpPr>
+                <a:spLocks noGrp="1"/>
+              </p:cNvSpPr>
+              <p:nvPr>
+                <p:ph idx="1"/>
+              </p:nvPr>
+            </p:nvSpPr>
+            <p:spPr>
+              <a:xfrm>
+                <a:off x="595746" y="1371600"/>
+                <a:ext cx="10758054" cy="4675910"/>
+              </a:xfrm>
+            </p:spPr>
+            <p:txBody>
+              <a:bodyPr>
+                <a:normAutofit fontScale="77500" lnSpcReduction="20000"/>
+              </a:bodyPr>
+              <a:lstStyle/>
+              <a:p>
+                <a:pPr>
+                  <a:lnSpc>
+                    <a:spcPct val="150000"/>
+                  </a:lnSpc>
+                </a:pPr>
+                <a:r>
+                  <a:rPr lang="en-US" dirty="0"/>
+                  <a:t>Instability Factor (</a:t>
+                </a:r>
+                <a14:m>
+                  <m:oMath xmlns:m="http://schemas.openxmlformats.org/officeDocument/2006/math">
+                    <m:r>
+                      <a:rPr lang="en-IN" i="1">
+                        <a:latin typeface="Cambria Math" panose="02040503050406030204" pitchFamily="18" charset="0"/>
+                      </a:rPr>
+                      <m:t>𝐼</m:t>
+                    </m:r>
+                  </m:oMath>
+                </a14:m>
+                <a:r>
+                  <a:rPr lang="en-US" dirty="0"/>
+                  <a:t>)</a:t>
+                </a:r>
+              </a:p>
+              <a:p>
+                <a:pPr lvl="1">
+                  <a:lnSpc>
+                    <a:spcPct val="150000"/>
+                  </a:lnSpc>
+                </a:pPr>
+                <a:r>
+                  <a:rPr lang="en-US" dirty="0"/>
+                  <a:t>The ratio of outward dependencies to total dependencies, calculated as:</a:t>
+                </a:r>
+              </a:p>
+              <a:p>
+                <a:pPr lvl="1">
+                  <a:lnSpc>
+                    <a:spcPct val="150000"/>
+                  </a:lnSpc>
+                </a:pPr>
+                <a14:m>
+                  <m:oMath xmlns:m="http://schemas.openxmlformats.org/officeDocument/2006/math">
+                    <m:r>
+                      <a:rPr lang="en-IN" sz="2500" i="1">
+                        <a:latin typeface="Cambria Math" panose="02040503050406030204" pitchFamily="18" charset="0"/>
+                      </a:rPr>
+                      <m:t>𝐼</m:t>
+                    </m:r>
+                    <m:r>
+                      <a:rPr lang="en-IN" sz="2500" i="1">
+                        <a:latin typeface="Cambria Math" panose="02040503050406030204" pitchFamily="18" charset="0"/>
+                      </a:rPr>
+                      <m:t>=</m:t>
+                    </m:r>
+                    <m:f>
+                      <m:fPr>
+                        <m:ctrlPr>
+                          <a:rPr lang="en-IN" sz="2500" i="1">
+                            <a:latin typeface="Cambria Math" panose="02040503050406030204" pitchFamily="18" charset="0"/>
+                          </a:rPr>
+                        </m:ctrlPr>
+                      </m:fPr>
+                      <m:num>
+                        <m:sSub>
+                          <m:sSubPr>
+                            <m:ctrlPr>
+                              <a:rPr lang="en-IN" sz="2500" i="1">
+                                <a:latin typeface="Cambria Math" panose="02040503050406030204" pitchFamily="18" charset="0"/>
+                              </a:rPr>
+                            </m:ctrlPr>
+                          </m:sSubPr>
+                          <m:e>
+                            <m:r>
+                              <a:rPr lang="en-IN" sz="2500" i="1">
+                                <a:latin typeface="Cambria Math" panose="02040503050406030204" pitchFamily="18" charset="0"/>
+                              </a:rPr>
+                              <m:t>𝐶</m:t>
+                            </m:r>
+                          </m:e>
+                          <m:sub>
+                            <m:r>
+                              <a:rPr lang="en-IN" sz="2500" i="1">
+                                <a:latin typeface="Cambria Math" panose="02040503050406030204" pitchFamily="18" charset="0"/>
+                              </a:rPr>
+                              <m:t>𝑒</m:t>
+                            </m:r>
+                          </m:sub>
+                        </m:sSub>
+                      </m:num>
+                      <m:den>
+                        <m:sSub>
+                          <m:sSubPr>
+                            <m:ctrlPr>
+                              <a:rPr lang="en-IN" sz="2500" i="1">
+                                <a:latin typeface="Cambria Math" panose="02040503050406030204" pitchFamily="18" charset="0"/>
+                              </a:rPr>
+                            </m:ctrlPr>
+                          </m:sSubPr>
+                          <m:e>
+                            <m:r>
+                              <a:rPr lang="en-IN" sz="2500" i="1">
+                                <a:latin typeface="Cambria Math" panose="02040503050406030204" pitchFamily="18" charset="0"/>
+                              </a:rPr>
+                              <m:t>𝐶</m:t>
+                            </m:r>
+                          </m:e>
+                          <m:sub>
+                            <m:r>
+                              <a:rPr lang="en-IN" sz="2500" i="1">
+                                <a:latin typeface="Cambria Math" panose="02040503050406030204" pitchFamily="18" charset="0"/>
+                              </a:rPr>
+                              <m:t>𝑎</m:t>
+                            </m:r>
+                          </m:sub>
+                        </m:sSub>
+                        <m:r>
+                          <a:rPr lang="en-IN" sz="2500" i="1">
+                            <a:latin typeface="Cambria Math" panose="02040503050406030204" pitchFamily="18" charset="0"/>
+                          </a:rPr>
+                          <m:t>+</m:t>
+                        </m:r>
+                        <m:sSub>
+                          <m:sSubPr>
+                            <m:ctrlPr>
+                              <a:rPr lang="en-IN" sz="2500" i="1">
+                                <a:latin typeface="Cambria Math" panose="02040503050406030204" pitchFamily="18" charset="0"/>
+                              </a:rPr>
+                            </m:ctrlPr>
+                          </m:sSubPr>
+                          <m:e>
+                            <m:r>
+                              <a:rPr lang="en-IN" sz="2500" i="1">
+                                <a:latin typeface="Cambria Math" panose="02040503050406030204" pitchFamily="18" charset="0"/>
+                              </a:rPr>
+                              <m:t>𝐶</m:t>
+                            </m:r>
+                          </m:e>
+                          <m:sub>
+                            <m:r>
+                              <a:rPr lang="en-IN" sz="2500" i="1">
+                                <a:latin typeface="Cambria Math" panose="02040503050406030204" pitchFamily="18" charset="0"/>
+                              </a:rPr>
+                              <m:t>𝑒</m:t>
+                            </m:r>
+                          </m:sub>
+                        </m:sSub>
+                      </m:den>
+                    </m:f>
+                  </m:oMath>
+                </a14:m>
+                <a:endParaRPr lang="en-IN" sz="2500" dirty="0"/>
+              </a:p>
+              <a:p>
+                <a:pPr lvl="1">
+                  <a:lnSpc>
+                    <a:spcPct val="150000"/>
+                  </a:lnSpc>
+                </a:pPr>
+                <a:r>
+                  <a:rPr lang="en-US" sz="2500" dirty="0"/>
+                  <a:t>Value is between 0 and 1.</a:t>
+                </a:r>
+              </a:p>
+              <a:p>
+                <a:pPr lvl="1">
+                  <a:lnSpc>
+                    <a:spcPct val="150000"/>
+                  </a:lnSpc>
+                </a:pPr>
+                <a:r>
+                  <a:rPr lang="en-US" sz="2500" dirty="0"/>
+                  <a:t>High instability means a component is very sensitive to changes in other modules, which can make it hard to maintain.</a:t>
+                </a:r>
+              </a:p>
+              <a:p>
+                <a:pPr lvl="1">
+                  <a:lnSpc>
+                    <a:spcPct val="150000"/>
+                  </a:lnSpc>
+                </a:pPr>
+                <a:r>
+                  <a:rPr lang="en-US" sz="2500" dirty="0"/>
+                  <a:t>The ideal design encourages less stable (higher </a:t>
+                </a:r>
+                <a14:m>
+                  <m:oMath xmlns:m="http://schemas.openxmlformats.org/officeDocument/2006/math">
+                    <m:r>
+                      <a:rPr lang="en-IN" sz="2500" i="1">
+                        <a:latin typeface="Cambria Math" panose="02040503050406030204" pitchFamily="18" charset="0"/>
+                      </a:rPr>
+                      <m:t>𝐼</m:t>
+                    </m:r>
+                  </m:oMath>
+                </a14:m>
+                <a:r>
+                  <a:rPr lang="en-US" sz="2500" dirty="0"/>
+                  <a:t>) components to depend on more stable (lower </a:t>
+                </a:r>
+                <a14:m>
+                  <m:oMath xmlns:m="http://schemas.openxmlformats.org/officeDocument/2006/math">
+                    <m:r>
+                      <a:rPr lang="en-IN" sz="2500" i="1">
+                        <a:latin typeface="Cambria Math" panose="02040503050406030204" pitchFamily="18" charset="0"/>
+                      </a:rPr>
+                      <m:t>𝐼</m:t>
+                    </m:r>
+                  </m:oMath>
+                </a14:m>
+                <a:r>
+                  <a:rPr lang="en-US" sz="2500" dirty="0"/>
+                  <a:t>) components.</a:t>
+                </a:r>
+              </a:p>
+              <a:p>
+                <a:pPr lvl="1">
+                  <a:lnSpc>
+                    <a:spcPct val="150000"/>
+                  </a:lnSpc>
+                </a:pPr>
+                <a:r>
+                  <a:rPr lang="en-US" sz="2500" dirty="0"/>
+                  <a:t>High instability is not inherently bad, as it depends on the context of the project and the libraries involved. </a:t>
+                </a:r>
+              </a:p>
+            </p:txBody>
+          </p:sp>
+        </mc:Choice>
+        <mc:Fallback>
+          <p:sp>
+            <p:nvSpPr>
+              <p:cNvPr id="3" name="Content Placeholder 2">
+                <a:extLst>
+                  <a:ext uri="{FF2B5EF4-FFF2-40B4-BE49-F238E27FC236}">
+                    <a16:creationId xmlns:a16="http://schemas.microsoft.com/office/drawing/2014/main" id="{5C07A665-BEC8-9CDC-4321-237A540AD759}"/>
+                  </a:ext>
+                </a:extLst>
+              </p:cNvPr>
+              <p:cNvSpPr>
+                <a:spLocks noGrp="1" noRot="1" noChangeAspect="1" noMove="1" noResize="1" noEditPoints="1" noAdjustHandles="1" noChangeArrowheads="1" noChangeShapeType="1" noTextEdit="1"/>
+              </p:cNvSpPr>
+              <p:nvPr>
+                <p:ph idx="1"/>
+              </p:nvPr>
+            </p:nvSpPr>
+            <p:spPr>
+              <a:xfrm>
+                <a:off x="595746" y="1371600"/>
+                <a:ext cx="10758054" cy="4675910"/>
+              </a:xfrm>
+              <a:blipFill>
+                <a:blip r:embed="rId2"/>
+                <a:stretch>
+                  <a:fillRect l="-680" r="-907"/>
+                </a:stretch>
+              </a:blipFill>
+            </p:spPr>
+            <p:txBody>
+              <a:bodyPr/>
+              <a:lstStyle/>
+              <a:p>
+                <a:r>
+                  <a:rPr lang="en-IN">
+                    <a:noFill/>
+                  </a:rPr>
+                  <a:t> </a:t>
+                </a:r>
+              </a:p>
+            </p:txBody>
+          </p:sp>
+        </mc:Fallback>
+      </mc:AlternateContent>
+      <p:sp>
+        <p:nvSpPr>
+          <p:cNvPr id="4" name="TextBox 3">
+            <a:extLst>
+              <a:ext uri="{FF2B5EF4-FFF2-40B4-BE49-F238E27FC236}">
+                <a16:creationId xmlns:a16="http://schemas.microsoft.com/office/drawing/2014/main" id="{A73B60A6-1896-6101-C258-2E57129F315B}"/>
+              </a:ext>
+            </a:extLst>
+          </p:cNvPr>
+          <p:cNvSpPr txBox="1"/>
+          <p:nvPr/>
+        </p:nvSpPr>
+        <p:spPr>
+          <a:xfrm>
+            <a:off x="595746" y="6308209"/>
+            <a:ext cx="10515600" cy="369332"/>
+          </a:xfrm>
+          <a:prstGeom prst="rect">
+            <a:avLst/>
+          </a:prstGeom>
+          <a:noFill/>
+        </p:spPr>
+        <p:txBody>
+          <a:bodyPr wrap="square" rtlCol="0">
+            <a:spAutoFit/>
+          </a:bodyPr>
+          <a:lstStyle/>
+          <a:p>
+            <a:r>
+              <a:rPr lang="en-IN" dirty="0"/>
+              <a:t>References: Robert C. Martin (2002). Agile Software Development: Principles, Patterns, and Practices.</a:t>
+            </a:r>
+          </a:p>
+        </p:txBody>
+      </p:sp>
+    </p:spTree>
+    <p:extLst>
+      <p:ext uri="{BB962C8B-B14F-4D97-AF65-F5344CB8AC3E}">
+        <p14:creationId xmlns:p14="http://schemas.microsoft.com/office/powerpoint/2010/main" val="3950674075"/>
+      </p:ext>
+    </p:extLst>
+  </p:cSld>
+  <p:clrMapOvr>
+    <a:masterClrMapping/>
+  </p:clrMapOvr>
+</p:sld>
+</file>
+
+<file path=ppt/slides/slide31.xml><?xml version="1.0" encoding="utf-8"?>
+<p:sld xmlns:a="http://schemas.openxmlformats.org/drawingml/2006/main" xmlns:r="http://schemas.openxmlformats.org/officeDocument/2006/relationships" xmlns:p="http://schemas.openxmlformats.org/presentationml/2006/main">
+  <p:cSld>
+    <p:spTree>
+      <p:nvGrpSpPr>
+        <p:cNvPr id="1" name="">
+          <a:extLst>
+            <a:ext uri="{FF2B5EF4-FFF2-40B4-BE49-F238E27FC236}">
+              <a16:creationId xmlns:a16="http://schemas.microsoft.com/office/drawing/2014/main" id="{BDD5BAA9-D7CB-2759-5BF4-FEA00EAED3CB}"/>
+            </a:ext>
+          </a:extLst>
+        </p:cNvPr>
+        <p:cNvGrpSpPr/>
+        <p:nvPr/>
+      </p:nvGrpSpPr>
+      <p:grpSpPr>
+        <a:xfrm>
+          <a:off x="0" y="0"/>
+          <a:ext cx="0" cy="0"/>
+          <a:chOff x="0" y="0"/>
+          <a:chExt cx="0" cy="0"/>
+        </a:xfrm>
+      </p:grpSpPr>
+      <p:sp>
+        <p:nvSpPr>
+          <p:cNvPr id="2" name="Title 1">
+            <a:extLst>
+              <a:ext uri="{FF2B5EF4-FFF2-40B4-BE49-F238E27FC236}">
+                <a16:creationId xmlns:a16="http://schemas.microsoft.com/office/drawing/2014/main" id="{5C651F09-3A99-D9D1-DC51-0F8A986A2D1A}"/>
+              </a:ext>
+            </a:extLst>
+          </p:cNvPr>
+          <p:cNvSpPr>
+            <a:spLocks noGrp="1"/>
+          </p:cNvSpPr>
+          <p:nvPr>
+            <p:ph type="title"/>
+          </p:nvPr>
+        </p:nvSpPr>
+        <p:spPr>
+          <a:xfrm>
+            <a:off x="838200" y="-2454"/>
+            <a:ext cx="10515600" cy="1325563"/>
+          </a:xfrm>
+        </p:spPr>
+        <p:txBody>
+          <a:bodyPr/>
+          <a:lstStyle/>
+          <a:p>
+            <a:r>
+              <a:rPr lang="en-IN" dirty="0"/>
+              <a:t>Coupling Metrics Report Generation</a:t>
+            </a:r>
+          </a:p>
+        </p:txBody>
+      </p:sp>
+      <p:sp>
+        <p:nvSpPr>
+          <p:cNvPr id="3" name="Content Placeholder 2">
+            <a:extLst>
+              <a:ext uri="{FF2B5EF4-FFF2-40B4-BE49-F238E27FC236}">
+                <a16:creationId xmlns:a16="http://schemas.microsoft.com/office/drawing/2014/main" id="{B975A8EE-223F-C33A-E8CD-F6B69189A74C}"/>
+              </a:ext>
+            </a:extLst>
+          </p:cNvPr>
+          <p:cNvSpPr>
+            <a:spLocks noGrp="1"/>
+          </p:cNvSpPr>
+          <p:nvPr>
+            <p:ph idx="1"/>
+          </p:nvPr>
+        </p:nvSpPr>
+        <p:spPr>
+          <a:xfrm>
+            <a:off x="595746" y="1198418"/>
+            <a:ext cx="10758054" cy="4800601"/>
+          </a:xfrm>
+        </p:spPr>
+        <p:txBody>
+          <a:bodyPr>
+            <a:normAutofit/>
+          </a:bodyPr>
+          <a:lstStyle/>
+          <a:p>
+            <a:pPr>
+              <a:lnSpc>
+                <a:spcPct val="150000"/>
+              </a:lnSpc>
+            </a:pPr>
+            <a:r>
+              <a:rPr lang="en-IN" dirty="0"/>
+              <a:t>calculate_coupling_metrics.py</a:t>
+            </a:r>
+          </a:p>
+          <a:p>
+            <a:pPr>
+              <a:lnSpc>
+                <a:spcPct val="150000"/>
+              </a:lnSpc>
+            </a:pPr>
+            <a:endParaRPr lang="en-IN" sz="2500" dirty="0"/>
+          </a:p>
+        </p:txBody>
+      </p:sp>
+      <p:pic>
+        <p:nvPicPr>
+          <p:cNvPr id="6" name="Picture 5">
+            <a:extLst>
+              <a:ext uri="{FF2B5EF4-FFF2-40B4-BE49-F238E27FC236}">
+                <a16:creationId xmlns:a16="http://schemas.microsoft.com/office/drawing/2014/main" id="{A025A0FB-53D9-BB89-399F-77A77DF877A3}"/>
+              </a:ext>
+            </a:extLst>
+          </p:cNvPr>
+          <p:cNvPicPr>
+            <a:picLocks noChangeAspect="1"/>
+          </p:cNvPicPr>
+          <p:nvPr/>
+        </p:nvPicPr>
+        <p:blipFill>
+          <a:blip r:embed="rId2"/>
+          <a:stretch>
+            <a:fillRect/>
+          </a:stretch>
+        </p:blipFill>
+        <p:spPr>
+          <a:xfrm>
+            <a:off x="838200" y="2012563"/>
+            <a:ext cx="5666163" cy="4370729"/>
+          </a:xfrm>
+          <a:prstGeom prst="rect">
+            <a:avLst/>
+          </a:prstGeom>
+        </p:spPr>
+      </p:pic>
+      <p:sp>
+        <p:nvSpPr>
+          <p:cNvPr id="4" name="TextBox 3">
+            <a:extLst>
+              <a:ext uri="{FF2B5EF4-FFF2-40B4-BE49-F238E27FC236}">
+                <a16:creationId xmlns:a16="http://schemas.microsoft.com/office/drawing/2014/main" id="{9CA5F358-820E-5792-1968-F76B29489A60}"/>
+              </a:ext>
+            </a:extLst>
+          </p:cNvPr>
+          <p:cNvSpPr txBox="1"/>
+          <p:nvPr/>
+        </p:nvSpPr>
+        <p:spPr>
+          <a:xfrm>
+            <a:off x="6948055" y="1614055"/>
+            <a:ext cx="4648199" cy="4801314"/>
+          </a:xfrm>
+          <a:prstGeom prst="rect">
+            <a:avLst/>
+          </a:prstGeom>
+          <a:noFill/>
+        </p:spPr>
+        <p:txBody>
+          <a:bodyPr wrap="square" rtlCol="0">
+            <a:spAutoFit/>
+          </a:bodyPr>
+          <a:lstStyle/>
+          <a:p>
+            <a:pPr marL="342900" indent="-342900">
+              <a:buFont typeface="+mj-lt"/>
+              <a:buAutoNum type="arabicPeriod"/>
+            </a:pPr>
+            <a:r>
+              <a:rPr lang="en-IN" dirty="0"/>
+              <a:t>The values closer to 0 represent stable libraries.</a:t>
+            </a:r>
+          </a:p>
+          <a:p>
+            <a:pPr marL="342900" indent="-342900">
+              <a:buFont typeface="+mj-lt"/>
+              <a:buAutoNum type="arabicPeriod"/>
+            </a:pPr>
+            <a:r>
+              <a:rPr lang="en-IN" dirty="0"/>
+              <a:t>The values closer to 1 represents instability.</a:t>
+            </a:r>
+          </a:p>
+          <a:p>
+            <a:pPr marL="342900" indent="-342900">
+              <a:buFont typeface="+mj-lt"/>
+              <a:buAutoNum type="arabicPeriod"/>
+            </a:pPr>
+            <a:r>
+              <a:rPr lang="en-IN" dirty="0"/>
+              <a:t>The top level modules would have value of ‘1’ since it will not be called by any other modules.</a:t>
+            </a:r>
+          </a:p>
+          <a:p>
+            <a:pPr marL="342900" indent="-342900">
+              <a:buFont typeface="+mj-lt"/>
+              <a:buAutoNum type="arabicPeriod"/>
+            </a:pPr>
+            <a:r>
+              <a:rPr lang="en-IN" dirty="0"/>
+              <a:t>The low level modules or reusables will have high Ca values since they will be called by different modules.</a:t>
+            </a:r>
+          </a:p>
+          <a:p>
+            <a:pPr marL="342900" indent="-342900">
+              <a:buFont typeface="+mj-lt"/>
+              <a:buAutoNum type="arabicPeriod"/>
+            </a:pPr>
+            <a:r>
+              <a:rPr lang="en-IN" dirty="0"/>
+              <a:t>Libraries with low Ce values </a:t>
+            </a:r>
+            <a:r>
+              <a:rPr lang="en-IN" dirty="0">
+                <a:sym typeface="Wingdings" panose="05000000000000000000" pitchFamily="2" charset="2"/>
+              </a:rPr>
+              <a:t></a:t>
+            </a:r>
+            <a:r>
+              <a:rPr lang="en-IN" dirty="0"/>
+              <a:t> Indicates they do not call many other libraries and are mostly independent. </a:t>
+            </a:r>
+          </a:p>
+          <a:p>
+            <a:pPr marL="342900" indent="-342900">
+              <a:buFont typeface="+mj-lt"/>
+              <a:buAutoNum type="arabicPeriod"/>
+            </a:pPr>
+            <a:r>
+              <a:rPr lang="en-IN" dirty="0"/>
+              <a:t>Libraries with high Ca values </a:t>
+            </a:r>
+            <a:r>
+              <a:rPr lang="en-IN" dirty="0">
+                <a:sym typeface="Wingdings" panose="05000000000000000000" pitchFamily="2" charset="2"/>
+              </a:rPr>
+              <a:t> Indicates they are actively used in many libraries. Changing it can have impact on other libraries</a:t>
+            </a:r>
+            <a:endParaRPr lang="en-IN" dirty="0"/>
+          </a:p>
+        </p:txBody>
+      </p:sp>
+    </p:spTree>
+    <p:extLst>
+      <p:ext uri="{BB962C8B-B14F-4D97-AF65-F5344CB8AC3E}">
+        <p14:creationId xmlns:p14="http://schemas.microsoft.com/office/powerpoint/2010/main" val="3168348341"/>
+      </p:ext>
+    </p:extLst>
+  </p:cSld>
+  <p:clrMapOvr>
+    <a:masterClrMapping/>
+  </p:clrMapOvr>
+</p:sld>
+</file>
+
+<file path=ppt/slides/slide32.xml><?xml version="1.0" encoding="utf-8"?>
+<p:sld xmlns:a="http://schemas.openxmlformats.org/drawingml/2006/main" xmlns:r="http://schemas.openxmlformats.org/officeDocument/2006/relationships" xmlns:p="http://schemas.openxmlformats.org/presentationml/2006/main">
+  <p:cSld>
+    <p:spTree>
+      <p:nvGrpSpPr>
+        <p:cNvPr id="1" name=""/>
+        <p:cNvGrpSpPr/>
+        <p:nvPr/>
+      </p:nvGrpSpPr>
+      <p:grpSpPr>
+        <a:xfrm>
+          <a:off x="0" y="0"/>
+          <a:ext cx="0" cy="0"/>
+          <a:chOff x="0" y="0"/>
+          <a:chExt cx="0" cy="0"/>
+        </a:xfrm>
+      </p:grpSpPr>
+      <p:sp>
+        <p:nvSpPr>
+          <p:cNvPr id="2" name="Title 1">
+            <a:extLst>
+              <a:ext uri="{FF2B5EF4-FFF2-40B4-BE49-F238E27FC236}">
+                <a16:creationId xmlns:a16="http://schemas.microsoft.com/office/drawing/2014/main" id="{215A4EBC-FE52-94C4-DE3E-C7D0E925C19B}"/>
+              </a:ext>
+            </a:extLst>
+          </p:cNvPr>
+          <p:cNvSpPr>
+            <a:spLocks noGrp="1"/>
+          </p:cNvSpPr>
+          <p:nvPr>
+            <p:ph type="ctrTitle"/>
+          </p:nvPr>
+        </p:nvSpPr>
+        <p:spPr/>
+        <p:txBody>
+          <a:bodyPr/>
+          <a:lstStyle/>
+          <a:p>
+            <a:r>
+              <a:rPr lang="en-US" dirty="0"/>
+              <a:t>Thank You</a:t>
+            </a:r>
+            <a:endParaRPr lang="en-IN" dirty="0"/>
+          </a:p>
+        </p:txBody>
+      </p:sp>
+    </p:spTree>
+    <p:extLst>
+      <p:ext uri="{BB962C8B-B14F-4D97-AF65-F5344CB8AC3E}">
+        <p14:creationId xmlns:p14="http://schemas.microsoft.com/office/powerpoint/2010/main" val="548370455"/>
+      </p:ext>
+    </p:extLst>
+  </p:cSld>
+  <p:clrMapOvr>
+    <a:masterClrMapping/>
+  </p:clrMapOvr>
+</p:sld>
+</file>
+
 <file path=ppt/slides/slide4.xml><?xml version="1.0" encoding="utf-8"?>
 <p:sld xmlns:a="http://schemas.openxmlformats.org/drawingml/2006/main" xmlns:r="http://schemas.openxmlformats.org/officeDocument/2006/relationships" xmlns:p="http://schemas.openxmlformats.org/presentationml/2006/main">
   <p:cSld>
@@ -14358,10 +17716,10 @@
       </p:sp>
       <p:grpSp>
         <p:nvGrpSpPr>
-          <p:cNvPr id="2" name="Group 1">
+          <p:cNvPr id="9" name="Group 8">
             <a:extLst>
               <a:ext uri="{FF2B5EF4-FFF2-40B4-BE49-F238E27FC236}">
-                <a16:creationId xmlns:a16="http://schemas.microsoft.com/office/drawing/2014/main" id="{DD801285-99DF-5EA8-BE33-BA8F36299933}"/>
+                <a16:creationId xmlns:a16="http://schemas.microsoft.com/office/drawing/2014/main" id="{9E1E29E9-2780-EC34-0872-B00E6300E8B4}"/>
               </a:ext>
             </a:extLst>
           </p:cNvPr>
@@ -14993,6 +18351,27 @@
             </a:fontRef>
           </p:style>
         </p:cxnSp>
+      </p:grpSp>
+      <p:grpSp>
+        <p:nvGrpSpPr>
+          <p:cNvPr id="13" name="Group 12">
+            <a:extLst>
+              <a:ext uri="{FF2B5EF4-FFF2-40B4-BE49-F238E27FC236}">
+                <a16:creationId xmlns:a16="http://schemas.microsoft.com/office/drawing/2014/main" id="{1016D650-15EE-7937-68E2-2593B22F007A}"/>
+              </a:ext>
+            </a:extLst>
+          </p:cNvPr>
+          <p:cNvGrpSpPr/>
+          <p:nvPr/>
+        </p:nvGrpSpPr>
+        <p:grpSpPr>
+          <a:xfrm>
+            <a:off x="1516381" y="2239814"/>
+            <a:ext cx="2369813" cy="963449"/>
+            <a:chOff x="1516381" y="2239814"/>
+            <a:chExt cx="2369813" cy="963449"/>
+          </a:xfrm>
+        </p:grpSpPr>
         <p:cxnSp>
           <p:nvCxnSpPr>
             <p:cNvPr id="31" name="Straight Arrow Connector 30">
@@ -16113,7 +19492,7 @@
                                           </p:stCondLst>
                                         </p:cTn>
                                         <p:tgtEl>
-                                          <p:spTgt spid="2"/>
+                                          <p:spTgt spid="9"/>
                                         </p:tgtEl>
                                         <p:attrNameLst>
                                           <p:attrName>style.visibility</p:attrName>
@@ -16145,7 +19524,7 @@
                             </p:stCondLst>
                             <p:childTnLst>
                               <p:par>
-                                <p:cTn id="13" presetID="1" presetClass="entr" presetSubtype="0" fill="hold" grpId="0" nodeType="clickEffect">
+                                <p:cTn id="13" presetID="1" presetClass="entr" presetSubtype="0" fill="hold" nodeType="clickEffect">
                                   <p:stCondLst>
                                     <p:cond delay="0"/>
                                   </p:stCondLst>
@@ -16153,6 +19532,51 @@
                                     <p:set>
                                       <p:cBhvr>
                                         <p:cTn id="14" dur="1" fill="hold">
+                                          <p:stCondLst>
+                                            <p:cond delay="0"/>
+                                          </p:stCondLst>
+                                        </p:cTn>
+                                        <p:tgtEl>
+                                          <p:spTgt spid="13"/>
+                                        </p:tgtEl>
+                                        <p:attrNameLst>
+                                          <p:attrName>style.visibility</p:attrName>
+                                        </p:attrNameLst>
+                                      </p:cBhvr>
+                                      <p:to>
+                                        <p:strVal val="visible"/>
+                                      </p:to>
+                                    </p:set>
+                                  </p:childTnLst>
+                                </p:cTn>
+                              </p:par>
+                            </p:childTnLst>
+                          </p:cTn>
+                        </p:par>
+                      </p:childTnLst>
+                    </p:cTn>
+                  </p:par>
+                  <p:par>
+                    <p:cTn id="15" fill="hold">
+                      <p:stCondLst>
+                        <p:cond delay="indefinite"/>
+                      </p:stCondLst>
+                      <p:childTnLst>
+                        <p:par>
+                          <p:cTn id="16" fill="hold">
+                            <p:stCondLst>
+                              <p:cond delay="0"/>
+                            </p:stCondLst>
+                            <p:childTnLst>
+                              <p:par>
+                                <p:cTn id="17" presetID="1" presetClass="entr" presetSubtype="0" fill="hold" grpId="0" nodeType="clickEffect">
+                                  <p:stCondLst>
+                                    <p:cond delay="0"/>
+                                  </p:stCondLst>
+                                  <p:childTnLst>
+                                    <p:set>
+                                      <p:cBhvr>
+                                        <p:cTn id="18" dur="1" fill="hold">
                                           <p:stCondLst>
                                             <p:cond delay="0"/>
                                           </p:stCondLst>
@@ -16172,56 +19596,7 @@
                                 </p:cTn>
                               </p:par>
                               <p:par>
-                                <p:cTn id="15" presetID="1" presetClass="entr" presetSubtype="0" fill="hold" nodeType="withEffect">
-                                  <p:stCondLst>
-                                    <p:cond delay="0"/>
-                                  </p:stCondLst>
-                                  <p:childTnLst>
-                                    <p:set>
-                                      <p:cBhvr>
-                                        <p:cTn id="16" dur="1" fill="hold">
-                                          <p:stCondLst>
-                                            <p:cond delay="0"/>
-                                          </p:stCondLst>
-                                        </p:cTn>
-                                        <p:tgtEl>
-                                          <p:spTgt spid="8">
-                                            <p:txEl>
-                                              <p:pRg st="0" end="0"/>
-                                            </p:txEl>
-                                          </p:spTgt>
-                                        </p:tgtEl>
-                                        <p:attrNameLst>
-                                          <p:attrName>style.visibility</p:attrName>
-                                        </p:attrNameLst>
-                                      </p:cBhvr>
-                                      <p:to>
-                                        <p:strVal val="visible"/>
-                                      </p:to>
-                                    </p:set>
-                                  </p:childTnLst>
-                                </p:cTn>
-                              </p:par>
-                            </p:childTnLst>
-                          </p:cTn>
-                        </p:par>
-                      </p:childTnLst>
-                    </p:cTn>
-                  </p:par>
-                  <p:par>
-                    <p:cTn id="17" fill="hold">
-                      <p:stCondLst>
-                        <p:cond delay="indefinite"/>
-                      </p:stCondLst>
-                      <p:childTnLst>
-                        <p:par>
-                          <p:cTn id="18" fill="hold">
-                            <p:stCondLst>
-                              <p:cond delay="0"/>
-                            </p:stCondLst>
-                            <p:childTnLst>
-                              <p:par>
-                                <p:cTn id="19" presetID="1" presetClass="entr" presetSubtype="0" fill="hold" nodeType="clickEffect">
+                                <p:cTn id="19" presetID="1" presetClass="entr" presetSubtype="0" fill="hold" nodeType="withEffect">
                                   <p:stCondLst>
                                     <p:cond delay="0"/>
                                   </p:stCondLst>
@@ -16236,7 +19611,7 @@
                                         <p:tgtEl>
                                           <p:spTgt spid="8">
                                             <p:txEl>
-                                              <p:pRg st="1" end="1"/>
+                                              <p:pRg st="0" end="0"/>
                                             </p:txEl>
                                           </p:spTgt>
                                         </p:tgtEl>
@@ -16285,7 +19660,7 @@
                                         <p:tgtEl>
                                           <p:spTgt spid="8">
                                             <p:txEl>
-                                              <p:pRg st="2" end="2"/>
+                                              <p:pRg st="1" end="1"/>
                                             </p:txEl>
                                           </p:spTgt>
                                         </p:tgtEl>
@@ -16334,7 +19709,7 @@
                                         <p:tgtEl>
                                           <p:spTgt spid="8">
                                             <p:txEl>
-                                              <p:pRg st="3" end="3"/>
+                                              <p:pRg st="2" end="2"/>
                                             </p:txEl>
                                           </p:spTgt>
                                         </p:tgtEl>
@@ -16383,7 +19758,7 @@
                                         <p:tgtEl>
                                           <p:spTgt spid="8">
                                             <p:txEl>
-                                              <p:pRg st="4" end="4"/>
+                                              <p:pRg st="3" end="3"/>
                                             </p:txEl>
                                           </p:spTgt>
                                         </p:tgtEl>
@@ -16417,7 +19792,7 @@
                             </p:stCondLst>
                             <p:childTnLst>
                               <p:par>
-                                <p:cTn id="35" presetID="1" presetClass="entr" presetSubtype="0" fill="hold" grpId="0" nodeType="clickEffect">
+                                <p:cTn id="35" presetID="1" presetClass="entr" presetSubtype="0" fill="hold" nodeType="clickEffect">
                                   <p:stCondLst>
                                     <p:cond delay="0"/>
                                   </p:stCondLst>
@@ -16430,7 +19805,11 @@
                                           </p:stCondLst>
                                         </p:cTn>
                                         <p:tgtEl>
-                                          <p:spTgt spid="49"/>
+                                          <p:spTgt spid="8">
+                                            <p:txEl>
+                                              <p:pRg st="4" end="4"/>
+                                            </p:txEl>
+                                          </p:spTgt>
                                         </p:tgtEl>
                                         <p:attrNameLst>
                                           <p:attrName>style.visibility</p:attrName>
@@ -16462,7 +19841,7 @@
                             </p:stCondLst>
                             <p:childTnLst>
                               <p:par>
-                                <p:cTn id="39" presetID="1" presetClass="entr" presetSubtype="0" fill="hold" nodeType="clickEffect">
+                                <p:cTn id="39" presetID="1" presetClass="entr" presetSubtype="0" fill="hold" grpId="0" nodeType="clickEffect">
                                   <p:stCondLst>
                                     <p:cond delay="0"/>
                                   </p:stCondLst>
@@ -16475,7 +19854,7 @@
                                           </p:stCondLst>
                                         </p:cTn>
                                         <p:tgtEl>
-                                          <p:spTgt spid="3"/>
+                                          <p:spTgt spid="49"/>
                                         </p:tgtEl>
                                         <p:attrNameLst>
                                           <p:attrName>style.visibility</p:attrName>
@@ -16507,7 +19886,7 @@
                             </p:stCondLst>
                             <p:childTnLst>
                               <p:par>
-                                <p:cTn id="43" presetID="1" presetClass="entr" presetSubtype="0" fill="hold" grpId="0" nodeType="clickEffect">
+                                <p:cTn id="43" presetID="1" presetClass="entr" presetSubtype="0" fill="hold" nodeType="clickEffect">
                                   <p:stCondLst>
                                     <p:cond delay="0"/>
                                   </p:stCondLst>
@@ -16515,6 +19894,51 @@
                                     <p:set>
                                       <p:cBhvr>
                                         <p:cTn id="44" dur="1" fill="hold">
+                                          <p:stCondLst>
+                                            <p:cond delay="0"/>
+                                          </p:stCondLst>
+                                        </p:cTn>
+                                        <p:tgtEl>
+                                          <p:spTgt spid="3"/>
+                                        </p:tgtEl>
+                                        <p:attrNameLst>
+                                          <p:attrName>style.visibility</p:attrName>
+                                        </p:attrNameLst>
+                                      </p:cBhvr>
+                                      <p:to>
+                                        <p:strVal val="visible"/>
+                                      </p:to>
+                                    </p:set>
+                                  </p:childTnLst>
+                                </p:cTn>
+                              </p:par>
+                            </p:childTnLst>
+                          </p:cTn>
+                        </p:par>
+                      </p:childTnLst>
+                    </p:cTn>
+                  </p:par>
+                  <p:par>
+                    <p:cTn id="45" fill="hold">
+                      <p:stCondLst>
+                        <p:cond delay="indefinite"/>
+                      </p:stCondLst>
+                      <p:childTnLst>
+                        <p:par>
+                          <p:cTn id="46" fill="hold">
+                            <p:stCondLst>
+                              <p:cond delay="0"/>
+                            </p:stCondLst>
+                            <p:childTnLst>
+                              <p:par>
+                                <p:cTn id="47" presetID="1" presetClass="entr" presetSubtype="0" fill="hold" grpId="0" nodeType="clickEffect">
+                                  <p:stCondLst>
+                                    <p:cond delay="0"/>
+                                  </p:stCondLst>
+                                  <p:childTnLst>
+                                    <p:set>
+                                      <p:cBhvr>
+                                        <p:cTn id="48" dur="1" fill="hold">
                                           <p:stCondLst>
                                             <p:cond delay="0"/>
                                           </p:stCondLst>
@@ -16534,56 +19958,7 @@
                                 </p:cTn>
                               </p:par>
                               <p:par>
-                                <p:cTn id="45" presetID="1" presetClass="entr" presetSubtype="0" fill="hold" nodeType="withEffect">
-                                  <p:stCondLst>
-                                    <p:cond delay="0"/>
-                                  </p:stCondLst>
-                                  <p:childTnLst>
-                                    <p:set>
-                                      <p:cBhvr>
-                                        <p:cTn id="46" dur="1" fill="hold">
-                                          <p:stCondLst>
-                                            <p:cond delay="0"/>
-                                          </p:stCondLst>
-                                        </p:cTn>
-                                        <p:tgtEl>
-                                          <p:spTgt spid="67">
-                                            <p:txEl>
-                                              <p:pRg st="0" end="0"/>
-                                            </p:txEl>
-                                          </p:spTgt>
-                                        </p:tgtEl>
-                                        <p:attrNameLst>
-                                          <p:attrName>style.visibility</p:attrName>
-                                        </p:attrNameLst>
-                                      </p:cBhvr>
-                                      <p:to>
-                                        <p:strVal val="visible"/>
-                                      </p:to>
-                                    </p:set>
-                                  </p:childTnLst>
-                                </p:cTn>
-                              </p:par>
-                            </p:childTnLst>
-                          </p:cTn>
-                        </p:par>
-                      </p:childTnLst>
-                    </p:cTn>
-                  </p:par>
-                  <p:par>
-                    <p:cTn id="47" fill="hold">
-                      <p:stCondLst>
-                        <p:cond delay="indefinite"/>
-                      </p:stCondLst>
-                      <p:childTnLst>
-                        <p:par>
-                          <p:cTn id="48" fill="hold">
-                            <p:stCondLst>
-                              <p:cond delay="0"/>
-                            </p:stCondLst>
-                            <p:childTnLst>
-                              <p:par>
-                                <p:cTn id="49" presetID="1" presetClass="entr" presetSubtype="0" fill="hold" nodeType="clickEffect">
+                                <p:cTn id="49" presetID="1" presetClass="entr" presetSubtype="0" fill="hold" nodeType="withEffect">
                                   <p:stCondLst>
                                     <p:cond delay="0"/>
                                   </p:stCondLst>
@@ -16598,7 +19973,7 @@
                                         <p:tgtEl>
                                           <p:spTgt spid="67">
                                             <p:txEl>
-                                              <p:pRg st="1" end="1"/>
+                                              <p:pRg st="0" end="0"/>
                                             </p:txEl>
                                           </p:spTgt>
                                         </p:tgtEl>
@@ -16647,7 +20022,7 @@
                                         <p:tgtEl>
                                           <p:spTgt spid="67">
                                             <p:txEl>
-                                              <p:pRg st="2" end="2"/>
+                                              <p:pRg st="1" end="1"/>
                                             </p:txEl>
                                           </p:spTgt>
                                         </p:tgtEl>
@@ -16696,7 +20071,7 @@
                                         <p:tgtEl>
                                           <p:spTgt spid="67">
                                             <p:txEl>
-                                              <p:pRg st="3" end="3"/>
+                                              <p:pRg st="2" end="2"/>
                                             </p:txEl>
                                           </p:spTgt>
                                         </p:tgtEl>
@@ -16745,7 +20120,7 @@
                                         <p:tgtEl>
                                           <p:spTgt spid="67">
                                             <p:txEl>
-                                              <p:pRg st="4" end="4"/>
+                                              <p:pRg st="3" end="3"/>
                                             </p:txEl>
                                           </p:spTgt>
                                         </p:tgtEl>
@@ -16787,6 +20162,55 @@
                                     <p:set>
                                       <p:cBhvr>
                                         <p:cTn id="66" dur="1" fill="hold">
+                                          <p:stCondLst>
+                                            <p:cond delay="0"/>
+                                          </p:stCondLst>
+                                        </p:cTn>
+                                        <p:tgtEl>
+                                          <p:spTgt spid="67">
+                                            <p:txEl>
+                                              <p:pRg st="4" end="4"/>
+                                            </p:txEl>
+                                          </p:spTgt>
+                                        </p:tgtEl>
+                                        <p:attrNameLst>
+                                          <p:attrName>style.visibility</p:attrName>
+                                        </p:attrNameLst>
+                                      </p:cBhvr>
+                                      <p:to>
+                                        <p:strVal val="visible"/>
+                                      </p:to>
+                                    </p:set>
+                                  </p:childTnLst>
+                                </p:cTn>
+                              </p:par>
+                            </p:childTnLst>
+                          </p:cTn>
+                        </p:par>
+                      </p:childTnLst>
+                    </p:cTn>
+                  </p:par>
+                  <p:par>
+                    <p:cTn id="67" fill="hold">
+                      <p:stCondLst>
+                        <p:cond delay="indefinite"/>
+                      </p:stCondLst>
+                      <p:childTnLst>
+                        <p:par>
+                          <p:cTn id="68" fill="hold">
+                            <p:stCondLst>
+                              <p:cond delay="0"/>
+                            </p:stCondLst>
+                            <p:childTnLst>
+                              <p:par>
+                                <p:cTn id="69" presetID="1" presetClass="entr" presetSubtype="0" fill="hold" nodeType="clickEffect">
+                                  <p:stCondLst>
+                                    <p:cond delay="0"/>
+                                  </p:stCondLst>
+                                  <p:childTnLst>
+                                    <p:set>
+                                      <p:cBhvr>
+                                        <p:cTn id="70" dur="1" fill="hold">
                                           <p:stCondLst>
                                             <p:cond delay="0"/>
                                           </p:stCondLst>
@@ -17383,7 +20807,7 @@
         </p:nvSpPr>
         <p:spPr>
           <a:xfrm>
-            <a:off x="6234952" y="1662953"/>
+            <a:off x="6254686" y="2063606"/>
             <a:ext cx="5369859" cy="646331"/>
           </a:xfrm>
           <a:prstGeom prst="rect">
@@ -17444,7 +20868,7 @@
         </p:blipFill>
         <p:spPr>
           <a:xfrm>
-            <a:off x="6338047" y="2459957"/>
+            <a:off x="6311734" y="2849368"/>
             <a:ext cx="4875764" cy="2028514"/>
           </a:xfrm>
           <a:prstGeom prst="rect">
@@ -17681,7 +21105,7 @@
         </p:blipFill>
         <p:spPr>
           <a:xfrm>
-            <a:off x="7193052" y="2283906"/>
+            <a:off x="7186474" y="2283906"/>
             <a:ext cx="3948387" cy="3401025"/>
           </a:xfrm>
           <a:prstGeom prst="rect">
@@ -18472,18 +21896,18 @@
         </p:nvSpPr>
         <p:spPr>
           <a:xfrm>
-            <a:off x="635000" y="205469"/>
+            <a:off x="551873" y="205469"/>
             <a:ext cx="10515600" cy="542018"/>
           </a:xfrm>
         </p:spPr>
         <p:txBody>
           <a:bodyPr>
-            <a:normAutofit fontScale="90000"/>
+            <a:noAutofit/>
           </a:bodyPr>
           <a:lstStyle/>
           <a:p>
             <a:r>
-              <a:rPr lang="en-IN" dirty="0"/>
+              <a:rPr lang="en-IN" sz="3600" dirty="0"/>
               <a:t>Automate Unexpected Dependencies Check</a:t>
             </a:r>
           </a:p>
@@ -18511,14 +21935,90 @@
         </p:blipFill>
         <p:spPr>
           <a:xfrm>
-            <a:off x="403643" y="928253"/>
-            <a:ext cx="11384714" cy="5398125"/>
+            <a:off x="658091" y="2253138"/>
+            <a:ext cx="9278376" cy="4399393"/>
           </a:xfrm>
           <a:prstGeom prst="rect">
             <a:avLst/>
           </a:prstGeom>
         </p:spPr>
       </p:pic>
+      <p:sp>
+        <p:nvSpPr>
+          <p:cNvPr id="3" name="TextBox 2">
+            <a:extLst>
+              <a:ext uri="{FF2B5EF4-FFF2-40B4-BE49-F238E27FC236}">
+                <a16:creationId xmlns:a16="http://schemas.microsoft.com/office/drawing/2014/main" id="{A881F9DA-F252-712F-C4DC-97B76F9911B9}"/>
+              </a:ext>
+            </a:extLst>
+          </p:cNvPr>
+          <p:cNvSpPr txBox="1"/>
+          <p:nvPr/>
+        </p:nvSpPr>
+        <p:spPr>
+          <a:xfrm>
+            <a:off x="551873" y="823332"/>
+            <a:ext cx="9779448" cy="1353960"/>
+          </a:xfrm>
+          <a:prstGeom prst="rect">
+            <a:avLst/>
+          </a:prstGeom>
+          <a:noFill/>
+        </p:spPr>
+        <p:txBody>
+          <a:bodyPr wrap="square" rtlCol="0">
+            <a:spAutoFit/>
+          </a:bodyPr>
+          <a:lstStyle/>
+          <a:p>
+            <a:pPr>
+              <a:lnSpc>
+                <a:spcPct val="150000"/>
+              </a:lnSpc>
+            </a:pPr>
+            <a:r>
+              <a:rPr lang="en-IN" sz="1400" dirty="0"/>
+              <a:t>UnexpectedDepsCheck.vi – VI used to perform unexpected Dependencies Check</a:t>
+            </a:r>
+          </a:p>
+          <a:p>
+            <a:pPr marL="342900" indent="-342900">
+              <a:lnSpc>
+                <a:spcPct val="150000"/>
+              </a:lnSpc>
+              <a:buAutoNum type="arabicPeriod"/>
+            </a:pPr>
+            <a:r>
+              <a:rPr lang="en-IN" sz="1400" dirty="0"/>
+              <a:t>Can be run in GUI Mode or CLI Mode.</a:t>
+            </a:r>
+          </a:p>
+          <a:p>
+            <a:pPr marL="342900" indent="-342900">
+              <a:lnSpc>
+                <a:spcPct val="150000"/>
+              </a:lnSpc>
+              <a:buAutoNum type="arabicPeriod"/>
+            </a:pPr>
+            <a:r>
+              <a:rPr lang="en-IN" sz="1400" dirty="0"/>
+              <a:t>Has option to limit the check only to Changed Libraries in a PR.</a:t>
+            </a:r>
+          </a:p>
+          <a:p>
+            <a:pPr marL="342900" indent="-342900">
+              <a:lnSpc>
+                <a:spcPct val="150000"/>
+              </a:lnSpc>
+              <a:buAutoNum type="arabicPeriod"/>
+            </a:pPr>
+            <a:r>
+              <a:rPr lang="en-IN" sz="1400" dirty="0"/>
+              <a:t>Library wise failures are displayed.</a:t>
+            </a:r>
+          </a:p>
+        </p:txBody>
+      </p:sp>
     </p:spTree>
     <p:extLst>
       <p:ext uri="{BB962C8B-B14F-4D97-AF65-F5344CB8AC3E}">
